--- a/Топливный_космоконтур_2035_Презентация.pptx
+++ b/Топливный_космоконтур_2035_Презентация.pptx
@@ -3109,7 +3109,7 @@
             <a:avLst/>
           </a:prstGeom>
           <a:solidFill>
-            <a:srgbClr val="050507"/>
+            <a:srgbClr val="F8FAFC"/>
           </a:solidFill>
           <a:ln>
             <a:noFill/>
@@ -3145,8 +3145,8 @@
         </p:nvSpPr>
         <p:spPr>
           <a:xfrm>
-            <a:off x="731520" y="457200"/>
-            <a:ext cx="9144000" cy="1005840"/>
+            <a:off x="731520" y="365760"/>
+            <a:ext cx="9326880" cy="1005840"/>
           </a:xfrm>
           <a:prstGeom prst="rect">
             <a:avLst/>
@@ -3162,24 +3162,24 @@
             <a:pPr>
               <a:defRPr sz="1000" b="1">
                 <a:solidFill>
-                  <a:srgbClr val="CCFF00"/>
-                </a:solidFill>
-              </a:defRPr>
-            </a:pPr>
-            <a:r>
-              <a:t>&lt;СЛАЙД 01 // КОНЦЕПЦИЯ СИСТЕМЫ&gt;</a:t>
-            </a:r>
-          </a:p>
-          <a:p>
-            <a:pPr>
-              <a:defRPr sz="2200" b="1">
-                <a:solidFill>
-                  <a:srgbClr val="FFFFFF"/>
-                </a:solidFill>
-              </a:defRPr>
-            </a:pPr>
-            <a:r>
-              <a:t>ТОПЛИВНЫЙ КОСМОКОНТУР 2035 // СИТУАЦИОННЫЙ ЦЕНТР ОТУ</a:t>
+                  <a:srgbClr val="0284C7"/>
+                </a:solidFill>
+              </a:defRPr>
+            </a:pPr>
+            <a:r>
+              <a:t>СЛАЙД 1 // СТРАТЕГИЯ И АРХИТЕКТУРА</a:t>
+            </a:r>
+          </a:p>
+          <a:p>
+            <a:pPr>
+              <a:defRPr sz="2100" b="1">
+                <a:solidFill>
+                  <a:srgbClr val="0F172A"/>
+                </a:solidFill>
+              </a:defRPr>
+            </a:pPr>
+            <a:r>
+              <a:t>Топливный космоконтур 2035: Ситуационный центр ОТУ</a:t>
             </a:r>
           </a:p>
         </p:txBody>
@@ -3192,18 +3192,18 @@
         </p:nvSpPr>
         <p:spPr>
           <a:xfrm>
-            <a:off x="10058400" y="502920"/>
-            <a:ext cx="1371600" cy="365760"/>
+            <a:off x="10149840" y="411480"/>
+            <a:ext cx="1280160" cy="384048"/>
           </a:xfrm>
           <a:prstGeom prst="roundRect">
             <a:avLst/>
           </a:prstGeom>
           <a:solidFill>
-            <a:srgbClr val="18181C"/>
+            <a:srgbClr val="F1F5F9"/>
           </a:solidFill>
-          <a:ln>
+          <a:ln w="12700">
             <a:solidFill>
-              <a:srgbClr val="23232A"/>
+              <a:srgbClr val="CBD5E1"/>
             </a:solidFill>
           </a:ln>
         </p:spPr>
@@ -3226,14 +3226,14 @@
           <a:lstStyle/>
           <a:p>
             <a:pPr algn="ctr">
-              <a:defRPr sz="1100" b="1">
-                <a:solidFill>
-                  <a:srgbClr val="A1A1AA"/>
-                </a:solidFill>
-              </a:defRPr>
-            </a:pPr>
-            <a:r>
-              <a:t>0:00 — 0:35</a:t>
+              <a:defRPr sz="1000" b="1">
+                <a:solidFill>
+                  <a:srgbClr val="334155"/>
+                </a:solidFill>
+              </a:defRPr>
+            </a:pPr>
+            <a:r>
+              <a:t>⏱ 0:00 — 0:35</a:t>
             </a:r>
           </a:p>
         </p:txBody>
@@ -3246,18 +3246,18 @@
         </p:nvSpPr>
         <p:spPr>
           <a:xfrm>
-            <a:off x="731520" y="1645920"/>
-            <a:ext cx="5120640" cy="4389120"/>
+            <a:off x="731520" y="1508760"/>
+            <a:ext cx="5120640" cy="4846320"/>
           </a:xfrm>
           <a:prstGeom prst="roundRect">
             <a:avLst/>
           </a:prstGeom>
           <a:solidFill>
-            <a:srgbClr val="0F0F14"/>
+            <a:srgbClr val="FFFFFF"/>
           </a:solidFill>
-          <a:ln w="12700">
+          <a:ln w="19050">
             <a:solidFill>
-              <a:srgbClr val="CCFF00"/>
+              <a:srgbClr val="E2E8F0"/>
             </a:solidFill>
           </a:ln>
         </p:spPr>
@@ -3285,14 +3285,57 @@
       </p:sp>
       <p:sp>
         <p:nvSpPr>
-          <p:cNvPr id="6" name="TextBox 5"/>
+          <p:cNvPr id="6" name="Rounded Rectangle 5"/>
+          <p:cNvSpPr/>
+          <p:nvPr/>
+        </p:nvSpPr>
+        <p:spPr>
+          <a:xfrm>
+            <a:off x="731520" y="1508760"/>
+            <a:ext cx="5120640" cy="73152"/>
+          </a:xfrm>
+          <a:prstGeom prst="roundRect">
+            <a:avLst/>
+          </a:prstGeom>
+          <a:solidFill>
+            <a:srgbClr val="0284C7"/>
+          </a:solidFill>
+          <a:ln>
+            <a:noFill/>
+          </a:ln>
+        </p:spPr>
+        <p:style>
+          <a:lnRef idx="1">
+            <a:schemeClr val="accent1"/>
+          </a:lnRef>
+          <a:fillRef idx="3">
+            <a:schemeClr val="accent1"/>
+          </a:fillRef>
+          <a:effectRef idx="2">
+            <a:schemeClr val="accent1"/>
+          </a:effectRef>
+          <a:fontRef idx="minor">
+            <a:schemeClr val="lt1"/>
+          </a:fontRef>
+        </p:style>
+        <p:txBody>
+          <a:bodyPr rtlCol="0" anchor="ctr"/>
+          <a:lstStyle/>
+          <a:p>
+            <a:pPr algn="ctr"/>
+          </a:p>
+        </p:txBody>
+      </p:sp>
+      <p:sp>
+        <p:nvSpPr>
+          <p:cNvPr id="7" name="TextBox 6"/>
           <p:cNvSpPr txBox="1"/>
           <p:nvPr/>
         </p:nvSpPr>
         <p:spPr>
           <a:xfrm>
-            <a:off x="1005840" y="1828800"/>
-            <a:ext cx="4572000" cy="4023360"/>
+            <a:off x="1005840" y="1691640"/>
+            <a:ext cx="4572000" cy="4480560"/>
           </a:xfrm>
           <a:prstGeom prst="rect">
             <a:avLst/>
@@ -3300,106 +3343,131 @@
           <a:noFill/>
         </p:spPr>
         <p:txBody>
-          <a:bodyPr wrap="square">
+          <a:bodyPr wrap="square" lIns="0" tIns="0" rIns="0" bIns="0">
             <a:spAutoFit/>
           </a:bodyPr>
           <a:lstStyle/>
           <a:p>
             <a:pPr>
-              <a:defRPr sz="1300" b="1">
-                <a:solidFill>
-                  <a:srgbClr val="CCFF00"/>
-                </a:solidFill>
-              </a:defRPr>
-            </a:pPr>
-            <a:r>
-              <a:t>🎯 СТРАТЕГИЧЕСКИЙ ВЫЗОВ ЛУННОЙ ПРОГРАММЫ</a:t>
-            </a:r>
-          </a:p>
-          <a:p>
-            <a:br/>
-            <a:pPr>
-              <a:defRPr sz="1300">
-                <a:solidFill>
-                  <a:srgbClr val="FFFFFF"/>
-                </a:solidFill>
-              </a:defRPr>
-            </a:pPr>
-            <a:r>
-              <a:t>Развертывание и гарантированное снабжение цислунарного орбитального топливного узла (ОТУ) в 2035–2040 гг. для обеспечения пилотируемой станции, многоразовых посадочных модулей и межорбитальных буксиров.</a:t>
-            </a:r>
-          </a:p>
-          <a:p>
-            <a:br/>
+              <a:defRPr sz="1400" b="1">
+                <a:solidFill>
+                  <a:srgbClr val="0369A1"/>
+                </a:solidFill>
+              </a:defRPr>
+            </a:pPr>
+            <a:r>
+              <a:t>🎯 Стратегическая цель программы</a:t>
+            </a:r>
+          </a:p>
+          <a:p>
+            <a:pPr>
+              <a:spcAft>
+                <a:spcPts val="1200"/>
+              </a:spcAft>
+              <a:defRPr sz="1100">
+                <a:solidFill>
+                  <a:srgbClr val="334155"/>
+                </a:solidFill>
+              </a:defRPr>
+            </a:pPr>
+            <a:r>
+              <a:t>Гарантированное и экономически эффективное снабжение цислунарного Орбитального Топливного Узла (ОТУ) в 2035–2040 гг. для обеспечения лунной инфраструктуры, межорбитальных буксиров и пилотируемых экспедиций.</a:t>
+            </a:r>
+          </a:p>
+          <a:p>
             <a:pPr>
               <a:defRPr sz="1200" b="1">
                 <a:solidFill>
-                  <a:srgbClr val="CCFF00"/>
-                </a:solidFill>
-              </a:defRPr>
-            </a:pPr>
-            <a:r>
-              <a:t>⚠️ КРИТИЧЕСКИЕ БАРЬЕРЫ КЕЙСА:</a:t>
-            </a:r>
-          </a:p>
-          <a:p>
-            <a:pPr>
-              <a:defRPr sz="1100">
-                <a:solidFill>
-                  <a:srgbClr val="A1A1AA"/>
-                </a:solidFill>
-              </a:defRPr>
-            </a:pPr>
-            <a:r>
-              <a:t>• Колоссальная стоимость земной доставки: 6.2–8.9 млн у.е./т при плече до 12 мес.</a:t>
-            </a:r>
-          </a:p>
-          <a:p>
-            <a:pPr>
-              <a:defRPr sz="1100">
-                <a:solidFill>
-                  <a:srgbClr val="A1A1AA"/>
-                </a:solidFill>
-              </a:defRPr>
-            </a:pPr>
-            <a:r>
-              <a:t>• Директивный потолок бюджета: CAPEX &lt;= 1 800 млн у.е. до конца 2037 г.</a:t>
-            </a:r>
-          </a:p>
-          <a:p>
-            <a:pPr>
-              <a:defRPr sz="1100">
-                <a:solidFill>
-                  <a:srgbClr val="A1A1AA"/>
-                </a:solidFill>
-              </a:defRPr>
-            </a:pPr>
-            <a:r>
-              <a:t>• Безусловная безопасность: критический SLA &gt;= 99.0% и неснижаемый 45-дневный буфер.</a:t>
-            </a:r>
-          </a:p>
-        </p:txBody>
-      </p:sp>
-      <p:sp>
-        <p:nvSpPr>
-          <p:cNvPr id="7" name="Rounded Rectangle 6"/>
+                  <a:srgbClr val="B45309"/>
+                </a:solidFill>
+              </a:defRPr>
+            </a:pPr>
+            <a:r>
+              <a:t>⚠️ Ключевые барьеры и директивы ТЗ:</a:t>
+            </a:r>
+          </a:p>
+          <a:p>
+            <a:pPr>
+              <a:spcAft>
+                <a:spcPts val="400"/>
+              </a:spcAft>
+              <a:defRPr sz="1050">
+                <a:solidFill>
+                  <a:srgbClr val="334155"/>
+                </a:solidFill>
+              </a:defRPr>
+            </a:pPr>
+            <a:r>
+              <a:t>• Высокая стоимость доставки Земли: 6.2–8.9 млн у.е./т при плече планирования до 12 месяцев.</a:t>
+            </a:r>
+          </a:p>
+          <a:p>
+            <a:pPr>
+              <a:spcAft>
+                <a:spcPts val="400"/>
+              </a:spcAft>
+              <a:defRPr sz="1050">
+                <a:solidFill>
+                  <a:srgbClr val="334155"/>
+                </a:solidFill>
+              </a:defRPr>
+            </a:pPr>
+            <a:r>
+              <a:t>• Директивный потолок CAPEX: Строго &lt;= 1 800 млн у.е. до конца 2037 г. и &lt;= 2 800 млн суммарно.</a:t>
+            </a:r>
+          </a:p>
+          <a:p>
+            <a:pPr>
+              <a:spcAft>
+                <a:spcPts val="400"/>
+              </a:spcAft>
+              <a:defRPr sz="1050">
+                <a:solidFill>
+                  <a:srgbClr val="334155"/>
+                </a:solidFill>
+              </a:defRPr>
+            </a:pPr>
+            <a:r>
+              <a:t>• Риск штрафов Take-or-Pay: Оплата 70% от забронированного объема при любом недоборе.</a:t>
+            </a:r>
+          </a:p>
+          <a:p>
+            <a:pPr>
+              <a:spcAft>
+                <a:spcPts val="400"/>
+              </a:spcAft>
+              <a:defRPr sz="1050">
+                <a:solidFill>
+                  <a:srgbClr val="334155"/>
+                </a:solidFill>
+              </a:defRPr>
+            </a:pPr>
+            <a:r>
+              <a:t>• Безусловная безопасность: Критический SLA &gt;= 99.0% и неснижаемый 45-дневный запас топлива.</a:t>
+            </a:r>
+          </a:p>
+        </p:txBody>
+      </p:sp>
+      <p:sp>
+        <p:nvSpPr>
+          <p:cNvPr id="8" name="Rounded Rectangle 7"/>
           <p:cNvSpPr/>
           <p:nvPr/>
         </p:nvSpPr>
         <p:spPr>
           <a:xfrm>
-            <a:off x="6217920" y="1645920"/>
-            <a:ext cx="5212080" cy="4389120"/>
+            <a:off x="6217920" y="1508760"/>
+            <a:ext cx="5212080" cy="4846320"/>
           </a:xfrm>
           <a:prstGeom prst="roundRect">
             <a:avLst/>
           </a:prstGeom>
           <a:solidFill>
-            <a:srgbClr val="0F0F14"/>
+            <a:srgbClr val="FFFFFF"/>
           </a:solidFill>
-          <a:ln w="12700">
+          <a:ln w="19050">
             <a:solidFill>
-              <a:srgbClr val="23232A"/>
+              <a:srgbClr val="E2E8F0"/>
             </a:solidFill>
           </a:ln>
         </p:spPr>
@@ -3427,14 +3495,57 @@
       </p:sp>
       <p:sp>
         <p:nvSpPr>
-          <p:cNvPr id="8" name="TextBox 7"/>
+          <p:cNvPr id="9" name="Rounded Rectangle 8"/>
+          <p:cNvSpPr/>
+          <p:nvPr/>
+        </p:nvSpPr>
+        <p:spPr>
+          <a:xfrm>
+            <a:off x="6217920" y="1508760"/>
+            <a:ext cx="5212080" cy="73152"/>
+          </a:xfrm>
+          <a:prstGeom prst="roundRect">
+            <a:avLst/>
+          </a:prstGeom>
+          <a:solidFill>
+            <a:srgbClr val="10955D"/>
+          </a:solidFill>
+          <a:ln>
+            <a:noFill/>
+          </a:ln>
+        </p:spPr>
+        <p:style>
+          <a:lnRef idx="1">
+            <a:schemeClr val="accent1"/>
+          </a:lnRef>
+          <a:fillRef idx="3">
+            <a:schemeClr val="accent1"/>
+          </a:fillRef>
+          <a:effectRef idx="2">
+            <a:schemeClr val="accent1"/>
+          </a:effectRef>
+          <a:fontRef idx="minor">
+            <a:schemeClr val="lt1"/>
+          </a:fontRef>
+        </p:style>
+        <p:txBody>
+          <a:bodyPr rtlCol="0" anchor="ctr"/>
+          <a:lstStyle/>
+          <a:p>
+            <a:pPr algn="ctr"/>
+          </a:p>
+        </p:txBody>
+      </p:sp>
+      <p:sp>
+        <p:nvSpPr>
+          <p:cNvPr id="10" name="TextBox 9"/>
           <p:cNvSpPr txBox="1"/>
           <p:nvPr/>
         </p:nvSpPr>
         <p:spPr>
           <a:xfrm>
-            <a:off x="6492240" y="1828800"/>
-            <a:ext cx="4663440" cy="4023360"/>
+            <a:off x="6492240" y="1691640"/>
+            <a:ext cx="4663440" cy="4480560"/>
           </a:xfrm>
           <a:prstGeom prst="rect">
             <a:avLst/>
@@ -3442,28 +3553,30 @@
           <a:noFill/>
         </p:spPr>
         <p:txBody>
-          <a:bodyPr wrap="square">
+          <a:bodyPr wrap="square" lIns="0" tIns="0" rIns="0" bIns="0">
             <a:spAutoFit/>
           </a:bodyPr>
           <a:lstStyle/>
           <a:p>
             <a:pPr>
-              <a:defRPr sz="1300" b="1">
-                <a:solidFill>
-                  <a:srgbClr val="CCFF00"/>
-                </a:solidFill>
-              </a:defRPr>
-            </a:pPr>
-            <a:r>
-              <a:t>🏛️ ОТЕЧЕСТВЕННЫЙ ТЕХНОЛОГИЧЕСКИЙ СТЕК</a:t>
-            </a:r>
-          </a:p>
-          <a:p>
-            <a:br/>
-            <a:pPr>
-              <a:defRPr sz="1300" b="1">
-                <a:solidFill>
-                  <a:srgbClr val="FFFFFF"/>
+              <a:defRPr sz="1400" b="1">
+                <a:solidFill>
+                  <a:srgbClr val="10955D"/>
+                </a:solidFill>
+              </a:defRPr>
+            </a:pPr>
+            <a:r>
+              <a:t>🏛️ Инженерный стек и надежность решения</a:t>
+            </a:r>
+          </a:p>
+          <a:p>
+            <a:pPr>
+              <a:spcBef>
+                <a:spcPts val="600"/>
+              </a:spcBef>
+              <a:defRPr sz="1100" b="1">
+                <a:solidFill>
+                  <a:srgbClr val="0F172A"/>
                 </a:solidFill>
               </a:defRPr>
             </a:pPr>
@@ -3473,47 +3586,57 @@
           </a:p>
           <a:p>
             <a:pPr>
-              <a:defRPr sz="1100">
-                <a:solidFill>
-                  <a:srgbClr val="A1A1AA"/>
-                </a:solidFill>
-              </a:defRPr>
-            </a:pPr>
-            <a:r>
-              <a:t>Строго типизированное детерминированное математическое ядро. Запрещены эвристики и неявные допущения.</a:t>
-            </a:r>
-          </a:p>
-          <a:p>
-            <a:br/>
-            <a:pPr>
-              <a:defRPr sz="1300" b="1">
-                <a:solidFill>
-                  <a:srgbClr val="FFFFFF"/>
-                </a:solidFill>
-              </a:defRPr>
-            </a:pPr>
-            <a:r>
-              <a:t>FastAPI + OpenAPI Docs</a:t>
-            </a:r>
-          </a:p>
-          <a:p>
-            <a:pPr>
-              <a:defRPr sz="1100">
-                <a:solidFill>
-                  <a:srgbClr val="A1A1AA"/>
-                </a:solidFill>
-              </a:defRPr>
-            </a:pPr>
-            <a:r>
-              <a:t>Высокопроизводительный REST API слой со строгой валидацией запросов и русской локализацией ошибок.</a:t>
-            </a:r>
-          </a:p>
-          <a:p>
-            <a:br/>
-            <a:pPr>
-              <a:defRPr sz="1300" b="1">
-                <a:solidFill>
-                  <a:srgbClr val="FFFFFF"/>
+              <a:spcAft>
+                <a:spcPts val="200"/>
+              </a:spcAft>
+              <a:defRPr sz="1000">
+                <a:solidFill>
+                  <a:srgbClr val="334155"/>
+                </a:solidFill>
+              </a:defRPr>
+            </a:pPr>
+            <a:r>
+              <a:t>Строго типизированное математическое ядро. Детерминированный расчет без эвристик и скрытых допущений.</a:t>
+            </a:r>
+          </a:p>
+          <a:p>
+            <a:pPr>
+              <a:spcBef>
+                <a:spcPts val="600"/>
+              </a:spcBef>
+              <a:defRPr sz="1100" b="1">
+                <a:solidFill>
+                  <a:srgbClr val="0F172A"/>
+                </a:solidFill>
+              </a:defRPr>
+            </a:pPr>
+            <a:r>
+              <a:t>FastAPI + REST API</a:t>
+            </a:r>
+          </a:p>
+          <a:p>
+            <a:pPr>
+              <a:spcAft>
+                <a:spcPts val="200"/>
+              </a:spcAft>
+              <a:defRPr sz="1000">
+                <a:solidFill>
+                  <a:srgbClr val="334155"/>
+                </a:solidFill>
+              </a:defRPr>
+            </a:pPr>
+            <a:r>
+              <a:t>Высокоскоростной API-слой с автоматической валидацией параметров и русской локализацией ошибок.</a:t>
+            </a:r>
+          </a:p>
+          <a:p>
+            <a:pPr>
+              <a:spcBef>
+                <a:spcPts val="600"/>
+              </a:spcBef>
+              <a:defRPr sz="1100" b="1">
+                <a:solidFill>
+                  <a:srgbClr val="0F172A"/>
                 </a:solidFill>
               </a:defRPr>
             </a:pPr>
@@ -3523,22 +3646,27 @@
           </a:p>
           <a:p>
             <a:pPr>
-              <a:defRPr sz="1100">
-                <a:solidFill>
-                  <a:srgbClr val="A1A1AA"/>
-                </a:solidFill>
-              </a:defRPr>
-            </a:pPr>
-            <a:r>
-              <a:t>Рабочее место оператора с реактивным откликом (&lt; 20 мс) и симметричным кибер-бруталистским дизайном.</a:t>
-            </a:r>
-          </a:p>
-          <a:p>
-            <a:br/>
-            <a:pPr>
-              <a:defRPr sz="1300" b="1">
-                <a:solidFill>
-                  <a:srgbClr val="FFFFFF"/>
+              <a:spcAft>
+                <a:spcPts val="200"/>
+              </a:spcAft>
+              <a:defRPr sz="1000">
+                <a:solidFill>
+                  <a:srgbClr val="334155"/>
+                </a:solidFill>
+              </a:defRPr>
+            </a:pPr>
+            <a:r>
+              <a:t>Интерактивное рабочее место оператора с реактивным откликом (&lt; 200 мс) и наглядными графиками Recharts.</a:t>
+            </a:r>
+          </a:p>
+          <a:p>
+            <a:pPr>
+              <a:spcBef>
+                <a:spcPts val="600"/>
+              </a:spcBef>
+              <a:defRPr sz="1100" b="1">
+                <a:solidFill>
+                  <a:srgbClr val="0F172A"/>
                 </a:solidFill>
               </a:defRPr>
             </a:pPr>
@@ -3548,14 +3676,47 @@
           </a:p>
           <a:p>
             <a:pPr>
-              <a:defRPr sz="1100">
-                <a:solidFill>
-                  <a:srgbClr val="A1A1AA"/>
-                </a:solidFill>
-              </a:defRPr>
-            </a:pPr>
-            <a:r>
-              <a:t>100% воспроизводимость: контрольный пример 2035 года проверен до 4 знаков после запятой.</a:t>
+              <a:spcAft>
+                <a:spcPts val="200"/>
+              </a:spcAft>
+              <a:defRPr sz="1000">
+                <a:solidFill>
+                  <a:srgbClr val="334155"/>
+                </a:solidFill>
+              </a:defRPr>
+            </a:pPr>
+            <a:r>
+              <a:t>100% покрытие физического баланса: контрольный пример ТЗ проверен с точностью 10^-4 т.</a:t>
+            </a:r>
+          </a:p>
+          <a:p>
+            <a:pPr>
+              <a:spcBef>
+                <a:spcPts val="600"/>
+              </a:spcBef>
+              <a:defRPr sz="1100" b="1">
+                <a:solidFill>
+                  <a:srgbClr val="0F172A"/>
+                </a:solidFill>
+              </a:defRPr>
+            </a:pPr>
+            <a:r>
+              <a:t>Мульти-ядерная архитектура</a:t>
+            </a:r>
+          </a:p>
+          <a:p>
+            <a:pPr>
+              <a:spcAft>
+                <a:spcPts val="200"/>
+              </a:spcAft>
+              <a:defRPr sz="1000">
+                <a:solidFill>
+                  <a:srgbClr val="334155"/>
+                </a:solidFill>
+              </a:defRPr>
+            </a:pPr>
+            <a:r>
+              <a:t>Поддержка 3 алгоритмов (Регламент, NASA MILP, Minimax) с возможностью мгновенного переключения.</a:t>
             </a:r>
           </a:p>
         </p:txBody>
@@ -3593,7 +3754,7 @@
             <a:avLst/>
           </a:prstGeom>
           <a:solidFill>
-            <a:srgbClr val="050507"/>
+            <a:srgbClr val="F8FAFC"/>
           </a:solidFill>
           <a:ln>
             <a:noFill/>
@@ -3629,8 +3790,8 @@
         </p:nvSpPr>
         <p:spPr>
           <a:xfrm>
-            <a:off x="731520" y="457200"/>
-            <a:ext cx="9144000" cy="1005840"/>
+            <a:off x="731520" y="365760"/>
+            <a:ext cx="9326880" cy="1005840"/>
           </a:xfrm>
           <a:prstGeom prst="rect">
             <a:avLst/>
@@ -3646,24 +3807,24 @@
             <a:pPr>
               <a:defRPr sz="1000" b="1">
                 <a:solidFill>
-                  <a:srgbClr val="CCFF00"/>
-                </a:solidFill>
-              </a:defRPr>
-            </a:pPr>
-            <a:r>
-              <a:t>&lt;СЛАЙД 02 // МАТЕМАТИЧЕСКОЕ ЯДРО&gt;</a:t>
-            </a:r>
-          </a:p>
-          <a:p>
-            <a:pPr>
-              <a:defRPr sz="2200" b="1">
-                <a:solidFill>
-                  <a:srgbClr val="FFFFFF"/>
-                </a:solidFill>
-              </a:defRPr>
-            </a:pPr>
-            <a:r>
-              <a:t>ФИЗИЧЕСКИЙ МАТЕРИАЛЬНЫЙ БАЛАНС И ВЕРИФИКАЦИЯ</a:t>
+                  <a:srgbClr val="0284C7"/>
+                </a:solidFill>
+              </a:defRPr>
+            </a:pPr>
+            <a:r>
+              <a:t>СЛАЙД 2 // ФИЗИКА УЗЛА И ВЕРИФИКАЦИЯ</a:t>
+            </a:r>
+          </a:p>
+          <a:p>
+            <a:pPr>
+              <a:defRPr sz="2100" b="1">
+                <a:solidFill>
+                  <a:srgbClr val="0F172A"/>
+                </a:solidFill>
+              </a:defRPr>
+            </a:pPr>
+            <a:r>
+              <a:t>Материальный баланс и сходимость контрольного примера 2035 года</a:t>
             </a:r>
           </a:p>
         </p:txBody>
@@ -3676,18 +3837,18 @@
         </p:nvSpPr>
         <p:spPr>
           <a:xfrm>
-            <a:off x="10058400" y="502920"/>
-            <a:ext cx="1371600" cy="365760"/>
+            <a:off x="10149840" y="411480"/>
+            <a:ext cx="1280160" cy="384048"/>
           </a:xfrm>
           <a:prstGeom prst="roundRect">
             <a:avLst/>
           </a:prstGeom>
           <a:solidFill>
-            <a:srgbClr val="18181C"/>
+            <a:srgbClr val="F1F5F9"/>
           </a:solidFill>
-          <a:ln>
+          <a:ln w="12700">
             <a:solidFill>
-              <a:srgbClr val="23232A"/>
+              <a:srgbClr val="CBD5E1"/>
             </a:solidFill>
           </a:ln>
         </p:spPr>
@@ -3710,14 +3871,14 @@
           <a:lstStyle/>
           <a:p>
             <a:pPr algn="ctr">
-              <a:defRPr sz="1100" b="1">
-                <a:solidFill>
-                  <a:srgbClr val="A1A1AA"/>
-                </a:solidFill>
-              </a:defRPr>
-            </a:pPr>
-            <a:r>
-              <a:t>0:35 — 1:10</a:t>
+              <a:defRPr sz="1000" b="1">
+                <a:solidFill>
+                  <a:srgbClr val="334155"/>
+                </a:solidFill>
+              </a:defRPr>
+            </a:pPr>
+            <a:r>
+              <a:t>⏱ 0:35 — 1:10</a:t>
             </a:r>
           </a:p>
         </p:txBody>
@@ -3730,18 +3891,18 @@
         </p:nvSpPr>
         <p:spPr>
           <a:xfrm>
-            <a:off x="731520" y="1645920"/>
-            <a:ext cx="5120640" cy="4389120"/>
+            <a:off x="731520" y="1508760"/>
+            <a:ext cx="5120640" cy="4846320"/>
           </a:xfrm>
           <a:prstGeom prst="roundRect">
             <a:avLst/>
           </a:prstGeom>
           <a:solidFill>
-            <a:srgbClr val="0F0F14"/>
+            <a:srgbClr val="FFFFFF"/>
           </a:solidFill>
-          <a:ln w="12700">
+          <a:ln w="19050">
             <a:solidFill>
-              <a:srgbClr val="23232A"/>
+              <a:srgbClr val="E2E8F0"/>
             </a:solidFill>
           </a:ln>
         </p:spPr>
@@ -3769,14 +3930,57 @@
       </p:sp>
       <p:sp>
         <p:nvSpPr>
-          <p:cNvPr id="6" name="TextBox 5"/>
+          <p:cNvPr id="6" name="Rounded Rectangle 5"/>
+          <p:cNvSpPr/>
+          <p:nvPr/>
+        </p:nvSpPr>
+        <p:spPr>
+          <a:xfrm>
+            <a:off x="731520" y="1508760"/>
+            <a:ext cx="5120640" cy="73152"/>
+          </a:xfrm>
+          <a:prstGeom prst="roundRect">
+            <a:avLst/>
+          </a:prstGeom>
+          <a:solidFill>
+            <a:srgbClr val="0284C7"/>
+          </a:solidFill>
+          <a:ln>
+            <a:noFill/>
+          </a:ln>
+        </p:spPr>
+        <p:style>
+          <a:lnRef idx="1">
+            <a:schemeClr val="accent1"/>
+          </a:lnRef>
+          <a:fillRef idx="3">
+            <a:schemeClr val="accent1"/>
+          </a:fillRef>
+          <a:effectRef idx="2">
+            <a:schemeClr val="accent1"/>
+          </a:effectRef>
+          <a:fontRef idx="minor">
+            <a:schemeClr val="lt1"/>
+          </a:fontRef>
+        </p:style>
+        <p:txBody>
+          <a:bodyPr rtlCol="0" anchor="ctr"/>
+          <a:lstStyle/>
+          <a:p>
+            <a:pPr algn="ctr"/>
+          </a:p>
+        </p:txBody>
+      </p:sp>
+      <p:sp>
+        <p:nvSpPr>
+          <p:cNvPr id="7" name="TextBox 6"/>
           <p:cNvSpPr txBox="1"/>
           <p:nvPr/>
         </p:nvSpPr>
         <p:spPr>
           <a:xfrm>
-            <a:off x="1005840" y="1828800"/>
-            <a:ext cx="4572000" cy="4023360"/>
+            <a:off x="1005840" y="1691640"/>
+            <a:ext cx="4572000" cy="4480560"/>
           </a:xfrm>
           <a:prstGeom prst="rect">
             <a:avLst/>
@@ -3784,7 +3988,7 @@
           <a:noFill/>
         </p:spPr>
         <p:txBody>
-          <a:bodyPr wrap="square">
+          <a:bodyPr wrap="square" lIns="0" tIns="0" rIns="0" bIns="0">
             <a:spAutoFit/>
           </a:bodyPr>
           <a:lstStyle/>
@@ -3792,101 +3996,174 @@
             <a:pPr>
               <a:defRPr sz="1300" b="1">
                 <a:solidFill>
-                  <a:srgbClr val="CCFF00"/>
-                </a:solidFill>
-              </a:defRPr>
-            </a:pPr>
-            <a:r>
-              <a:t>⚖️ ФОРМУЛА ФИЗИЧЕСКОГО БАЛАНСА</a:t>
-            </a:r>
-          </a:p>
-          <a:p>
-            <a:br/>
-            <a:pPr>
-              <a:defRPr sz="1300" b="1">
-                <a:solidFill>
-                  <a:srgbClr val="FFFFFF"/>
-                </a:solidFill>
-              </a:defRPr>
-            </a:pPr>
-            <a:r>
-              <a:t>End_Stock = Start_Stock + Gross - Losses - Served</a:t>
-            </a:r>
-          </a:p>
-          <a:p>
-            <a:br/>
-            <a:pPr>
-              <a:defRPr sz="1100">
-                <a:solidFill>
-                  <a:srgbClr val="A1A1AA"/>
-                </a:solidFill>
-              </a:defRPr>
-            </a:pPr>
-            <a:r>
-              <a:t>• Потери throughput (4.5% / 1.2%): Начисляются строго 1 раз на валовый приход топлива. Повторные потери на остаток исключены.</a:t>
-            </a:r>
-          </a:p>
-          <a:p>
-            <a:br/>
-            <a:pPr>
-              <a:defRPr sz="1100">
-                <a:solidFill>
-                  <a:srgbClr val="A1A1AA"/>
-                </a:solidFill>
-              </a:defRPr>
-            </a:pPr>
-            <a:r>
-              <a:t>• Исключение отрицательных остатков: Физический остаток строго &gt;= 0. При дефиците объем недопоставки изолируется в отдельную метрику.</a:t>
-            </a:r>
-          </a:p>
-          <a:p>
-            <a:br/>
-            <a:pPr>
-              <a:defRPr sz="1100">
-                <a:solidFill>
-                  <a:srgbClr val="A1A1AA"/>
-                </a:solidFill>
-              </a:defRPr>
-            </a:pPr>
-            <a:r>
-              <a:t>• Приоритет критического спроса: Пилотируемый сектор обеспечивается первым: Served_Crit = min(Served, Demand_Crit).</a:t>
-            </a:r>
-          </a:p>
-          <a:p>
-            <a:br/>
-            <a:pPr>
-              <a:defRPr sz="1100">
-                <a:solidFill>
-                  <a:srgbClr val="A1A1AA"/>
-                </a:solidFill>
-              </a:defRPr>
-            </a:pPr>
-            <a:r>
-              <a:t>• Защита Take-or-Pay от двойного счета: Billable_Vol = max(Order, 0.70 * Reserved). Штраф начисляется только при недоборе лимита.</a:t>
-            </a:r>
-          </a:p>
-        </p:txBody>
-      </p:sp>
-      <p:sp>
-        <p:nvSpPr>
-          <p:cNvPr id="7" name="Rounded Rectangle 6"/>
+                  <a:srgbClr val="0369A1"/>
+                </a:solidFill>
+              </a:defRPr>
+            </a:pPr>
+            <a:r>
+              <a:t>⚖️ Формула сохранения физического баланса</a:t>
+            </a:r>
+          </a:p>
+          <a:p>
+            <a:pPr>
+              <a:spcBef>
+                <a:spcPts val="400"/>
+              </a:spcBef>
+              <a:spcAft>
+                <a:spcPts val="1000"/>
+              </a:spcAft>
+              <a:defRPr sz="1100" b="1">
+                <a:solidFill>
+                  <a:srgbClr val="0F172A"/>
+                </a:solidFill>
+              </a:defRPr>
+            </a:pPr>
+            <a:r>
+              <a:t>End_Stock = Start_Stock + Gross_In - Losses - Served</a:t>
+            </a:r>
+          </a:p>
+          <a:p>
+            <a:pPr>
+              <a:spcBef>
+                <a:spcPts val="400"/>
+              </a:spcBef>
+              <a:defRPr sz="1100" b="1">
+                <a:solidFill>
+                  <a:srgbClr val="0F172A"/>
+                </a:solidFill>
+              </a:defRPr>
+            </a:pPr>
+            <a:r>
+              <a:t>• Потери Throughput (4.5% / 1.2%):</a:t>
+            </a:r>
+          </a:p>
+          <a:p>
+            <a:pPr>
+              <a:spcAft>
+                <a:spcPts val="400"/>
+              </a:spcAft>
+              <a:defRPr sz="1000">
+                <a:solidFill>
+                  <a:srgbClr val="334155"/>
+                </a:solidFill>
+              </a:defRPr>
+            </a:pPr>
+            <a:r>
+              <a:t>   Начисляются строго 1 раз на валовый приход топлива. Повторные потери на остаток в баке исключены.</a:t>
+            </a:r>
+          </a:p>
+          <a:p>
+            <a:pPr>
+              <a:spcBef>
+                <a:spcPts val="400"/>
+              </a:spcBef>
+              <a:defRPr sz="1100" b="1">
+                <a:solidFill>
+                  <a:srgbClr val="0F172A"/>
+                </a:solidFill>
+              </a:defRPr>
+            </a:pPr>
+            <a:r>
+              <a:t>• Физическая неотрицательность остатков:</a:t>
+            </a:r>
+          </a:p>
+          <a:p>
+            <a:pPr>
+              <a:spcAft>
+                <a:spcPts val="400"/>
+              </a:spcAft>
+              <a:defRPr sz="1000">
+                <a:solidFill>
+                  <a:srgbClr val="334155"/>
+                </a:solidFill>
+              </a:defRPr>
+            </a:pPr>
+            <a:r>
+              <a:t>   Остаток строго &gt;= 0. При нехватке топлива дефицит изолируется в метрику Unmet Demand (недопоставка).</a:t>
+            </a:r>
+          </a:p>
+          <a:p>
+            <a:pPr>
+              <a:spcBef>
+                <a:spcPts val="400"/>
+              </a:spcBef>
+              <a:defRPr sz="1100" b="1">
+                <a:solidFill>
+                  <a:srgbClr val="0F172A"/>
+                </a:solidFill>
+              </a:defRPr>
+            </a:pPr>
+            <a:r>
+              <a:t>• Приоритет критического спроса:</a:t>
+            </a:r>
+          </a:p>
+          <a:p>
+            <a:pPr>
+              <a:spcAft>
+                <a:spcPts val="400"/>
+              </a:spcAft>
+              <a:defRPr sz="1000">
+                <a:solidFill>
+                  <a:srgbClr val="334155"/>
+                </a:solidFill>
+              </a:defRPr>
+            </a:pPr>
+            <a:r>
+              <a:t>   Пилотируемые экипажи обеспечиваются первыми: Served_Crit = min(Served, Demand_Crit).</a:t>
+            </a:r>
+          </a:p>
+          <a:p>
+            <a:pPr>
+              <a:spcBef>
+                <a:spcPts val="400"/>
+              </a:spcBef>
+              <a:defRPr sz="1100" b="1">
+                <a:solidFill>
+                  <a:srgbClr val="0F172A"/>
+                </a:solidFill>
+              </a:defRPr>
+            </a:pPr>
+            <a:r>
+              <a:t>• Защита Take-or-Pay:</a:t>
+            </a:r>
+          </a:p>
+          <a:p>
+            <a:pPr>
+              <a:spcAft>
+                <a:spcPts val="400"/>
+              </a:spcAft>
+              <a:defRPr sz="1000">
+                <a:solidFill>
+                  <a:srgbClr val="334155"/>
+                </a:solidFill>
+              </a:defRPr>
+            </a:pPr>
+            <a:r>
+              <a:t>   Оплачиваемый объем = max(Order, 0.70 * Reserved). Штраф за недобор начисляется прозрачно.</a:t>
+            </a:r>
+          </a:p>
+        </p:txBody>
+      </p:sp>
+      <p:sp>
+        <p:nvSpPr>
+          <p:cNvPr id="8" name="Rounded Rectangle 7"/>
           <p:cNvSpPr/>
           <p:nvPr/>
         </p:nvSpPr>
         <p:spPr>
           <a:xfrm>
-            <a:off x="6217920" y="1645920"/>
-            <a:ext cx="5212080" cy="4389120"/>
+            <a:off x="6217920" y="1508760"/>
+            <a:ext cx="5212080" cy="4846320"/>
           </a:xfrm>
           <a:prstGeom prst="roundRect">
             <a:avLst/>
           </a:prstGeom>
           <a:solidFill>
-            <a:srgbClr val="0F0F14"/>
+            <a:srgbClr val="FFFFFF"/>
           </a:solidFill>
-          <a:ln w="12700">
+          <a:ln w="19050">
             <a:solidFill>
-              <a:srgbClr val="CCFF00"/>
+              <a:srgbClr val="E2E8F0"/>
             </a:solidFill>
           </a:ln>
         </p:spPr>
@@ -3914,14 +4191,57 @@
       </p:sp>
       <p:sp>
         <p:nvSpPr>
-          <p:cNvPr id="8" name="TextBox 7"/>
+          <p:cNvPr id="9" name="Rounded Rectangle 8"/>
+          <p:cNvSpPr/>
+          <p:nvPr/>
+        </p:nvSpPr>
+        <p:spPr>
+          <a:xfrm>
+            <a:off x="6217920" y="1508760"/>
+            <a:ext cx="5212080" cy="73152"/>
+          </a:xfrm>
+          <a:prstGeom prst="roundRect">
+            <a:avLst/>
+          </a:prstGeom>
+          <a:solidFill>
+            <a:srgbClr val="10955D"/>
+          </a:solidFill>
+          <a:ln>
+            <a:noFill/>
+          </a:ln>
+        </p:spPr>
+        <p:style>
+          <a:lnRef idx="1">
+            <a:schemeClr val="accent1"/>
+          </a:lnRef>
+          <a:fillRef idx="3">
+            <a:schemeClr val="accent1"/>
+          </a:fillRef>
+          <a:effectRef idx="2">
+            <a:schemeClr val="accent1"/>
+          </a:effectRef>
+          <a:fontRef idx="minor">
+            <a:schemeClr val="lt1"/>
+          </a:fontRef>
+        </p:style>
+        <p:txBody>
+          <a:bodyPr rtlCol="0" anchor="ctr"/>
+          <a:lstStyle/>
+          <a:p>
+            <a:pPr algn="ctr"/>
+          </a:p>
+        </p:txBody>
+      </p:sp>
+      <p:sp>
+        <p:nvSpPr>
+          <p:cNvPr id="10" name="TextBox 9"/>
           <p:cNvSpPr txBox="1"/>
           <p:nvPr/>
         </p:nvSpPr>
         <p:spPr>
           <a:xfrm>
-            <a:off x="6492240" y="1828800"/>
-            <a:ext cx="4663440" cy="4023360"/>
+            <a:off x="6492240" y="1691640"/>
+            <a:ext cx="4663440" cy="548640"/>
           </a:xfrm>
           <a:prstGeom prst="rect">
             <a:avLst/>
@@ -3929,118 +4249,741 @@
           <a:noFill/>
         </p:spPr>
         <p:txBody>
+          <a:bodyPr wrap="square" lIns="0" tIns="0" rIns="0" bIns="0">
+            <a:spAutoFit/>
+          </a:bodyPr>
+          <a:lstStyle/>
+          <a:p>
+            <a:pPr>
+              <a:defRPr sz="1300" b="1">
+                <a:solidFill>
+                  <a:srgbClr val="10955D"/>
+                </a:solidFill>
+              </a:defRPr>
+            </a:pPr>
+            <a:r>
+              <a:t>🔬 Сходимость контрольного примера 2035 г.</a:t>
+            </a:r>
+          </a:p>
+        </p:txBody>
+      </p:sp>
+      <p:graphicFrame>
+        <p:nvGraphicFramePr>
+          <p:cNvPr id="11" name="Table 10"/>
+          <p:cNvGraphicFramePr>
+            <a:graphicFrameLocks noGrp="1"/>
+          </p:cNvGraphicFramePr>
+          <p:nvPr/>
+        </p:nvGraphicFramePr>
+        <p:xfrm>
+          <a:off x="6400800" y="2240280"/>
+          <a:ext cx="4846320" cy="3108960"/>
+        </p:xfrm>
+        <a:graphic>
+          <a:graphicData uri="http://schemas.openxmlformats.org/drawingml/2006/table">
+            <a:tbl>
+              <a:tblPr firstRow="1" bandRow="1">
+                <a:tableStyleId>{5C22544A-7EE6-4342-B048-85BDC9FD1C3A}</a:tableStyleId>
+              </a:tblPr>
+              <a:tblGrid>
+                <a:gridCol w="2011680"/>
+                <a:gridCol w="914400"/>
+                <a:gridCol w="914400"/>
+                <a:gridCol w="1005840"/>
+              </a:tblGrid>
+              <a:tr h="444137">
+                <a:tc>
+                  <a:txBody>
+                    <a:bodyPr/>
+                    <a:lstStyle/>
+                    <a:p>
+                      <a:pPr algn="l">
+                        <a:defRPr sz="950" b="1">
+                          <a:solidFill>
+                            <a:srgbClr val="FFFFFF"/>
+                          </a:solidFill>
+                        </a:defRPr>
+                      </a:pPr>
+                      <a:r>
+                        <a:t>Параметр проверки</a:t>
+                      </a:r>
+                    </a:p>
+                  </a:txBody>
+                  <a:tcPr>
+                    <a:solidFill>
+                      <a:srgbClr val="1E293B"/>
+                    </a:solidFill>
+                  </a:tcPr>
+                </a:tc>
+                <a:tc>
+                  <a:txBody>
+                    <a:bodyPr/>
+                    <a:lstStyle/>
+                    <a:p>
+                      <a:pPr algn="ctr">
+                        <a:defRPr sz="950" b="1">
+                          <a:solidFill>
+                            <a:srgbClr val="FFFFFF"/>
+                          </a:solidFill>
+                        </a:defRPr>
+                      </a:pPr>
+                      <a:r>
+                        <a:t>ТЗ Регламент</a:t>
+                      </a:r>
+                    </a:p>
+                  </a:txBody>
+                  <a:tcPr>
+                    <a:solidFill>
+                      <a:srgbClr val="1E293B"/>
+                    </a:solidFill>
+                  </a:tcPr>
+                </a:tc>
+                <a:tc>
+                  <a:txBody>
+                    <a:bodyPr/>
+                    <a:lstStyle/>
+                    <a:p>
+                      <a:pPr algn="ctr">
+                        <a:defRPr sz="950" b="1">
+                          <a:solidFill>
+                            <a:srgbClr val="FFFFFF"/>
+                          </a:solidFill>
+                        </a:defRPr>
+                      </a:pPr>
+                      <a:r>
+                        <a:t>Наше ядро</a:t>
+                      </a:r>
+                    </a:p>
+                  </a:txBody>
+                  <a:tcPr>
+                    <a:solidFill>
+                      <a:srgbClr val="1E293B"/>
+                    </a:solidFill>
+                  </a:tcPr>
+                </a:tc>
+                <a:tc>
+                  <a:txBody>
+                    <a:bodyPr/>
+                    <a:lstStyle/>
+                    <a:p>
+                      <a:pPr algn="ctr">
+                        <a:defRPr sz="950" b="1">
+                          <a:solidFill>
+                            <a:srgbClr val="FFFFFF"/>
+                          </a:solidFill>
+                        </a:defRPr>
+                      </a:pPr>
+                      <a:r>
+                        <a:t>Дельта</a:t>
+                      </a:r>
+                    </a:p>
+                  </a:txBody>
+                  <a:tcPr>
+                    <a:solidFill>
+                      <a:srgbClr val="1E293B"/>
+                    </a:solidFill>
+                  </a:tcPr>
+                </a:tc>
+              </a:tr>
+              <a:tr h="444137">
+                <a:tc>
+                  <a:txBody>
+                    <a:bodyPr/>
+                    <a:lstStyle/>
+                    <a:p>
+                      <a:pPr algn="l">
+                        <a:defRPr sz="950">
+                          <a:solidFill>
+                            <a:srgbClr val="0F172A"/>
+                          </a:solidFill>
+                        </a:defRPr>
+                      </a:pPr>
+                      <a:r>
+                        <a:t>Начальный запас (45 дн.)</a:t>
+                      </a:r>
+                    </a:p>
+                  </a:txBody>
+                  <a:tcPr>
+                    <a:solidFill>
+                      <a:srgbClr val="F8FAFC"/>
+                    </a:solidFill>
+                  </a:tcPr>
+                </a:tc>
+                <a:tc>
+                  <a:txBody>
+                    <a:bodyPr/>
+                    <a:lstStyle/>
+                    <a:p>
+                      <a:pPr algn="ctr">
+                        <a:defRPr sz="950">
+                          <a:solidFill>
+                            <a:srgbClr val="0F172A"/>
+                          </a:solidFill>
+                        </a:defRPr>
+                      </a:pPr>
+                      <a:r>
+                        <a:t>12.3288 т</a:t>
+                      </a:r>
+                    </a:p>
+                  </a:txBody>
+                  <a:tcPr>
+                    <a:solidFill>
+                      <a:srgbClr val="F8FAFC"/>
+                    </a:solidFill>
+                  </a:tcPr>
+                </a:tc>
+                <a:tc>
+                  <a:txBody>
+                    <a:bodyPr/>
+                    <a:lstStyle/>
+                    <a:p>
+                      <a:pPr algn="ctr">
+                        <a:defRPr sz="950">
+                          <a:solidFill>
+                            <a:srgbClr val="0F172A"/>
+                          </a:solidFill>
+                        </a:defRPr>
+                      </a:pPr>
+                      <a:r>
+                        <a:t>12.3288 т</a:t>
+                      </a:r>
+                    </a:p>
+                  </a:txBody>
+                  <a:tcPr>
+                    <a:solidFill>
+                      <a:srgbClr val="F8FAFC"/>
+                    </a:solidFill>
+                  </a:tcPr>
+                </a:tc>
+                <a:tc>
+                  <a:txBody>
+                    <a:bodyPr/>
+                    <a:lstStyle/>
+                    <a:p>
+                      <a:pPr algn="ctr">
+                        <a:defRPr sz="950" b="1">
+                          <a:solidFill>
+                            <a:srgbClr val="0F172A"/>
+                          </a:solidFill>
+                        </a:defRPr>
+                      </a:pPr>
+                      <a:r>
+                        <a:t>0.0000 т</a:t>
+                      </a:r>
+                    </a:p>
+                  </a:txBody>
+                  <a:tcPr>
+                    <a:solidFill>
+                      <a:srgbClr val="F8FAFC"/>
+                    </a:solidFill>
+                  </a:tcPr>
+                </a:tc>
+              </a:tr>
+              <a:tr h="444137">
+                <a:tc>
+                  <a:txBody>
+                    <a:bodyPr/>
+                    <a:lstStyle/>
+                    <a:p>
+                      <a:pPr algn="l">
+                        <a:defRPr sz="950">
+                          <a:solidFill>
+                            <a:srgbClr val="0F172A"/>
+                          </a:solidFill>
+                        </a:defRPr>
+                      </a:pPr>
+                      <a:r>
+                        <a:t>Заказ Earth-Core</a:t>
+                      </a:r>
+                    </a:p>
+                  </a:txBody>
+                  <a:tcPr>
+                    <a:solidFill>
+                      <a:srgbClr val="FFFFFF"/>
+                    </a:solidFill>
+                  </a:tcPr>
+                </a:tc>
+                <a:tc>
+                  <a:txBody>
+                    <a:bodyPr/>
+                    <a:lstStyle/>
+                    <a:p>
+                      <a:pPr algn="ctr">
+                        <a:defRPr sz="950">
+                          <a:solidFill>
+                            <a:srgbClr val="0F172A"/>
+                          </a:solidFill>
+                        </a:defRPr>
+                      </a:pPr>
+                      <a:r>
+                        <a:t>95.0000 т</a:t>
+                      </a:r>
+                    </a:p>
+                  </a:txBody>
+                  <a:tcPr>
+                    <a:solidFill>
+                      <a:srgbClr val="FFFFFF"/>
+                    </a:solidFill>
+                  </a:tcPr>
+                </a:tc>
+                <a:tc>
+                  <a:txBody>
+                    <a:bodyPr/>
+                    <a:lstStyle/>
+                    <a:p>
+                      <a:pPr algn="ctr">
+                        <a:defRPr sz="950">
+                          <a:solidFill>
+                            <a:srgbClr val="0F172A"/>
+                          </a:solidFill>
+                        </a:defRPr>
+                      </a:pPr>
+                      <a:r>
+                        <a:t>95.0000 т</a:t>
+                      </a:r>
+                    </a:p>
+                  </a:txBody>
+                  <a:tcPr>
+                    <a:solidFill>
+                      <a:srgbClr val="FFFFFF"/>
+                    </a:solidFill>
+                  </a:tcPr>
+                </a:tc>
+                <a:tc>
+                  <a:txBody>
+                    <a:bodyPr/>
+                    <a:lstStyle/>
+                    <a:p>
+                      <a:pPr algn="ctr">
+                        <a:defRPr sz="950" b="1">
+                          <a:solidFill>
+                            <a:srgbClr val="0F172A"/>
+                          </a:solidFill>
+                        </a:defRPr>
+                      </a:pPr>
+                      <a:r>
+                        <a:t>0.0000 т</a:t>
+                      </a:r>
+                    </a:p>
+                  </a:txBody>
+                  <a:tcPr>
+                    <a:solidFill>
+                      <a:srgbClr val="FFFFFF"/>
+                    </a:solidFill>
+                  </a:tcPr>
+                </a:tc>
+              </a:tr>
+              <a:tr h="444137">
+                <a:tc>
+                  <a:txBody>
+                    <a:bodyPr/>
+                    <a:lstStyle/>
+                    <a:p>
+                      <a:pPr algn="l">
+                        <a:defRPr sz="950">
+                          <a:solidFill>
+                            <a:srgbClr val="0F172A"/>
+                          </a:solidFill>
+                        </a:defRPr>
+                      </a:pPr>
+                      <a:r>
+                        <a:t>Потери валовые (4.5%)</a:t>
+                      </a:r>
+                    </a:p>
+                  </a:txBody>
+                  <a:tcPr>
+                    <a:solidFill>
+                      <a:srgbClr val="F8FAFC"/>
+                    </a:solidFill>
+                  </a:tcPr>
+                </a:tc>
+                <a:tc>
+                  <a:txBody>
+                    <a:bodyPr/>
+                    <a:lstStyle/>
+                    <a:p>
+                      <a:pPr algn="ctr">
+                        <a:defRPr sz="950">
+                          <a:solidFill>
+                            <a:srgbClr val="0F172A"/>
+                          </a:solidFill>
+                        </a:defRPr>
+                      </a:pPr>
+                      <a:r>
+                        <a:t>4.2750 т</a:t>
+                      </a:r>
+                    </a:p>
+                  </a:txBody>
+                  <a:tcPr>
+                    <a:solidFill>
+                      <a:srgbClr val="F8FAFC"/>
+                    </a:solidFill>
+                  </a:tcPr>
+                </a:tc>
+                <a:tc>
+                  <a:txBody>
+                    <a:bodyPr/>
+                    <a:lstStyle/>
+                    <a:p>
+                      <a:pPr algn="ctr">
+                        <a:defRPr sz="950">
+                          <a:solidFill>
+                            <a:srgbClr val="0F172A"/>
+                          </a:solidFill>
+                        </a:defRPr>
+                      </a:pPr>
+                      <a:r>
+                        <a:t>4.2750 т</a:t>
+                      </a:r>
+                    </a:p>
+                  </a:txBody>
+                  <a:tcPr>
+                    <a:solidFill>
+                      <a:srgbClr val="F8FAFC"/>
+                    </a:solidFill>
+                  </a:tcPr>
+                </a:tc>
+                <a:tc>
+                  <a:txBody>
+                    <a:bodyPr/>
+                    <a:lstStyle/>
+                    <a:p>
+                      <a:pPr algn="ctr">
+                        <a:defRPr sz="950" b="1">
+                          <a:solidFill>
+                            <a:srgbClr val="0F172A"/>
+                          </a:solidFill>
+                        </a:defRPr>
+                      </a:pPr>
+                      <a:r>
+                        <a:t>0.0000 т</a:t>
+                      </a:r>
+                    </a:p>
+                  </a:txBody>
+                  <a:tcPr>
+                    <a:solidFill>
+                      <a:srgbClr val="F8FAFC"/>
+                    </a:solidFill>
+                  </a:tcPr>
+                </a:tc>
+              </a:tr>
+              <a:tr h="444137">
+                <a:tc>
+                  <a:txBody>
+                    <a:bodyPr/>
+                    <a:lstStyle/>
+                    <a:p>
+                      <a:pPr algn="l">
+                        <a:defRPr sz="950">
+                          <a:solidFill>
+                            <a:srgbClr val="0F172A"/>
+                          </a:solidFill>
+                        </a:defRPr>
+                      </a:pPr>
+                      <a:r>
+                        <a:t>Полезный приход</a:t>
+                      </a:r>
+                    </a:p>
+                  </a:txBody>
+                  <a:tcPr>
+                    <a:solidFill>
+                      <a:srgbClr val="FFFFFF"/>
+                    </a:solidFill>
+                  </a:tcPr>
+                </a:tc>
+                <a:tc>
+                  <a:txBody>
+                    <a:bodyPr/>
+                    <a:lstStyle/>
+                    <a:p>
+                      <a:pPr algn="ctr">
+                        <a:defRPr sz="950">
+                          <a:solidFill>
+                            <a:srgbClr val="0F172A"/>
+                          </a:solidFill>
+                        </a:defRPr>
+                      </a:pPr>
+                      <a:r>
+                        <a:t>90.7250 т</a:t>
+                      </a:r>
+                    </a:p>
+                  </a:txBody>
+                  <a:tcPr>
+                    <a:solidFill>
+                      <a:srgbClr val="FFFFFF"/>
+                    </a:solidFill>
+                  </a:tcPr>
+                </a:tc>
+                <a:tc>
+                  <a:txBody>
+                    <a:bodyPr/>
+                    <a:lstStyle/>
+                    <a:p>
+                      <a:pPr algn="ctr">
+                        <a:defRPr sz="950">
+                          <a:solidFill>
+                            <a:srgbClr val="0F172A"/>
+                          </a:solidFill>
+                        </a:defRPr>
+                      </a:pPr>
+                      <a:r>
+                        <a:t>90.7250 т</a:t>
+                      </a:r>
+                    </a:p>
+                  </a:txBody>
+                  <a:tcPr>
+                    <a:solidFill>
+                      <a:srgbClr val="FFFFFF"/>
+                    </a:solidFill>
+                  </a:tcPr>
+                </a:tc>
+                <a:tc>
+                  <a:txBody>
+                    <a:bodyPr/>
+                    <a:lstStyle/>
+                    <a:p>
+                      <a:pPr algn="ctr">
+                        <a:defRPr sz="950" b="1">
+                          <a:solidFill>
+                            <a:srgbClr val="0F172A"/>
+                          </a:solidFill>
+                        </a:defRPr>
+                      </a:pPr>
+                      <a:r>
+                        <a:t>0.0000 т</a:t>
+                      </a:r>
+                    </a:p>
+                  </a:txBody>
+                  <a:tcPr>
+                    <a:solidFill>
+                      <a:srgbClr val="FFFFFF"/>
+                    </a:solidFill>
+                  </a:tcPr>
+                </a:tc>
+              </a:tr>
+              <a:tr h="444137">
+                <a:tc>
+                  <a:txBody>
+                    <a:bodyPr/>
+                    <a:lstStyle/>
+                    <a:p>
+                      <a:pPr algn="l">
+                        <a:defRPr sz="950">
+                          <a:solidFill>
+                            <a:srgbClr val="0F172A"/>
+                          </a:solidFill>
+                        </a:defRPr>
+                      </a:pPr>
+                      <a:r>
+                        <a:t>Отпуск на спрос (в т.ч. крит 80)</a:t>
+                      </a:r>
+                    </a:p>
+                  </a:txBody>
+                  <a:tcPr>
+                    <a:solidFill>
+                      <a:srgbClr val="F8FAFC"/>
+                    </a:solidFill>
+                  </a:tcPr>
+                </a:tc>
+                <a:tc>
+                  <a:txBody>
+                    <a:bodyPr/>
+                    <a:lstStyle/>
+                    <a:p>
+                      <a:pPr algn="ctr">
+                        <a:defRPr sz="950">
+                          <a:solidFill>
+                            <a:srgbClr val="0F172A"/>
+                          </a:solidFill>
+                        </a:defRPr>
+                      </a:pPr>
+                      <a:r>
+                        <a:t>100.0000 т</a:t>
+                      </a:r>
+                    </a:p>
+                  </a:txBody>
+                  <a:tcPr>
+                    <a:solidFill>
+                      <a:srgbClr val="F8FAFC"/>
+                    </a:solidFill>
+                  </a:tcPr>
+                </a:tc>
+                <a:tc>
+                  <a:txBody>
+                    <a:bodyPr/>
+                    <a:lstStyle/>
+                    <a:p>
+                      <a:pPr algn="ctr">
+                        <a:defRPr sz="950">
+                          <a:solidFill>
+                            <a:srgbClr val="0F172A"/>
+                          </a:solidFill>
+                        </a:defRPr>
+                      </a:pPr>
+                      <a:r>
+                        <a:t>100.0000 т</a:t>
+                      </a:r>
+                    </a:p>
+                  </a:txBody>
+                  <a:tcPr>
+                    <a:solidFill>
+                      <a:srgbClr val="F8FAFC"/>
+                    </a:solidFill>
+                  </a:tcPr>
+                </a:tc>
+                <a:tc>
+                  <a:txBody>
+                    <a:bodyPr/>
+                    <a:lstStyle/>
+                    <a:p>
+                      <a:pPr algn="ctr">
+                        <a:defRPr sz="950" b="1">
+                          <a:solidFill>
+                            <a:srgbClr val="0F172A"/>
+                          </a:solidFill>
+                        </a:defRPr>
+                      </a:pPr>
+                      <a:r>
+                        <a:t>0.0000 т</a:t>
+                      </a:r>
+                    </a:p>
+                  </a:txBody>
+                  <a:tcPr>
+                    <a:solidFill>
+                      <a:srgbClr val="F8FAFC"/>
+                    </a:solidFill>
+                  </a:tcPr>
+                </a:tc>
+              </a:tr>
+              <a:tr h="444138">
+                <a:tc>
+                  <a:txBody>
+                    <a:bodyPr/>
+                    <a:lstStyle/>
+                    <a:p>
+                      <a:pPr algn="l">
+                        <a:defRPr sz="950" b="1">
+                          <a:solidFill>
+                            <a:srgbClr val="0F172A"/>
+                          </a:solidFill>
+                        </a:defRPr>
+                      </a:pPr>
+                      <a:r>
+                        <a:t>Конечный остаток на 31.12</a:t>
+                      </a:r>
+                    </a:p>
+                  </a:txBody>
+                  <a:tcPr>
+                    <a:solidFill>
+                      <a:srgbClr val="ECFDF5"/>
+                    </a:solidFill>
+                  </a:tcPr>
+                </a:tc>
+                <a:tc>
+                  <a:txBody>
+                    <a:bodyPr/>
+                    <a:lstStyle/>
+                    <a:p>
+                      <a:pPr algn="ctr">
+                        <a:defRPr sz="950" b="1">
+                          <a:solidFill>
+                            <a:srgbClr val="0F172A"/>
+                          </a:solidFill>
+                        </a:defRPr>
+                      </a:pPr>
+                      <a:r>
+                        <a:t>3.0538 т</a:t>
+                      </a:r>
+                    </a:p>
+                  </a:txBody>
+                  <a:tcPr>
+                    <a:solidFill>
+                      <a:srgbClr val="ECFDF5"/>
+                    </a:solidFill>
+                  </a:tcPr>
+                </a:tc>
+                <a:tc>
+                  <a:txBody>
+                    <a:bodyPr/>
+                    <a:lstStyle/>
+                    <a:p>
+                      <a:pPr algn="ctr">
+                        <a:defRPr sz="950" b="1">
+                          <a:solidFill>
+                            <a:srgbClr val="0F172A"/>
+                          </a:solidFill>
+                        </a:defRPr>
+                      </a:pPr>
+                      <a:r>
+                        <a:t>3.0538 т</a:t>
+                      </a:r>
+                    </a:p>
+                  </a:txBody>
+                  <a:tcPr>
+                    <a:solidFill>
+                      <a:srgbClr val="ECFDF5"/>
+                    </a:solidFill>
+                  </a:tcPr>
+                </a:tc>
+                <a:tc>
+                  <a:txBody>
+                    <a:bodyPr/>
+                    <a:lstStyle/>
+                    <a:p>
+                      <a:pPr algn="ctr">
+                        <a:defRPr sz="950" b="1">
+                          <a:solidFill>
+                            <a:srgbClr val="10955D"/>
+                          </a:solidFill>
+                        </a:defRPr>
+                      </a:pPr>
+                      <a:r>
+                        <a:t>0.0000 т ✅</a:t>
+                      </a:r>
+                    </a:p>
+                  </a:txBody>
+                  <a:tcPr>
+                    <a:solidFill>
+                      <a:srgbClr val="ECFDF5"/>
+                    </a:solidFill>
+                  </a:tcPr>
+                </a:tc>
+              </a:tr>
+            </a:tbl>
+          </a:graphicData>
+        </a:graphic>
+      </p:graphicFrame>
+      <p:sp>
+        <p:nvSpPr>
+          <p:cNvPr id="12" name="TextBox 11"/>
+          <p:cNvSpPr txBox="1"/>
+          <p:nvPr/>
+        </p:nvSpPr>
+        <p:spPr>
+          <a:xfrm>
+            <a:off x="6492240" y="5577840"/>
+            <a:ext cx="4663440" cy="640080"/>
+          </a:xfrm>
+          <a:prstGeom prst="rect">
+            <a:avLst/>
+          </a:prstGeom>
+          <a:noFill/>
+        </p:spPr>
+        <p:txBody>
           <a:bodyPr wrap="square">
             <a:spAutoFit/>
           </a:bodyPr>
           <a:lstStyle/>
           <a:p>
             <a:pPr>
-              <a:defRPr sz="1300" b="1">
-                <a:solidFill>
-                  <a:srgbClr val="CCFF00"/>
-                </a:solidFill>
-              </a:defRPr>
-            </a:pPr>
-            <a:r>
-              <a:t>🔬 ВЕРИФИКАЦИЯ КОНТРОЛЬНОГО ПРИМЕРА 2035 Г.</a:t>
-            </a:r>
-          </a:p>
-          <a:p>
-            <a:br/>
-            <a:pPr>
-              <a:defRPr sz="1100" b="1">
-                <a:solidFill>
-                  <a:srgbClr val="FFFFFF"/>
-                </a:solidFill>
-              </a:defRPr>
-            </a:pPr>
-            <a:r>
-              <a:t>Параметр проверки          ТЗ        Ядро      Дельта</a:t>
-            </a:r>
-          </a:p>
-          <a:p>
-            <a:pPr>
-              <a:defRPr sz="1000">
-                <a:solidFill>
-                  <a:srgbClr val="A1A1AA"/>
-                </a:solidFill>
-              </a:defRPr>
-            </a:pPr>
-            <a:r>
-              <a:t>Начальный запас (45 дней) 12.3288 т  12.3288 т  0.0000</a:t>
-            </a:r>
-          </a:p>
-          <a:p>
-            <a:pPr>
-              <a:defRPr sz="1000">
-                <a:solidFill>
-                  <a:srgbClr val="A1A1AA"/>
-                </a:solidFill>
-              </a:defRPr>
-            </a:pPr>
-            <a:r>
-              <a:t>Заказ Earth-Core         95.0000 т  95.0000 т  0.0000</a:t>
-            </a:r>
-          </a:p>
-          <a:p>
-            <a:pPr>
-              <a:defRPr sz="1000">
-                <a:solidFill>
-                  <a:srgbClr val="A1A1AA"/>
-                </a:solidFill>
-              </a:defRPr>
-            </a:pPr>
-            <a:r>
-              <a:t>Потери валовые (4.5%)    4.2750 т   4.2750 т   0.0000</a:t>
-            </a:r>
-          </a:p>
-          <a:p>
-            <a:pPr>
-              <a:defRPr sz="1000">
-                <a:solidFill>
-                  <a:srgbClr val="A1A1AA"/>
-                </a:solidFill>
-              </a:defRPr>
-            </a:pPr>
-            <a:r>
-              <a:t>Полезный приход          90.7250 т  90.7250 т  0.0000</a:t>
-            </a:r>
-          </a:p>
-          <a:p>
-            <a:pPr>
-              <a:defRPr sz="1000">
-                <a:solidFill>
-                  <a:srgbClr val="A1A1AA"/>
-                </a:solidFill>
-              </a:defRPr>
-            </a:pPr>
-            <a:r>
-              <a:t>Отпуск на спрос (в т.ч. крит 80) 100.0000 т 100.0000 т 0.0000</a:t>
-            </a:r>
-          </a:p>
-          <a:p>
-            <a:pPr>
-              <a:defRPr sz="1000">
-                <a:solidFill>
-                  <a:srgbClr val="CCFF00"/>
-                </a:solidFill>
-              </a:defRPr>
-            </a:pPr>
-            <a:r>
-              <a:t>Конечный остаток на 31.12 3.0538 т   3.0538 т   0.0000 ✅</a:t>
-            </a:r>
-          </a:p>
-          <a:p>
-            <a:br/>
-            <a:pPr>
-              <a:defRPr sz="1100">
-                <a:solidFill>
-                  <a:srgbClr val="FFFFFF"/>
-                </a:solidFill>
-              </a:defRPr>
-            </a:pPr>
-            <a:r>
-              <a:t>✓ Автоматический тест test_balance.py подтверждает сходимость с точностью до 4 знаков.</a:t>
+              <a:defRPr sz="950" b="1">
+                <a:solidFill>
+                  <a:srgbClr val="10955D"/>
+                </a:solidFill>
+              </a:defRPr>
+            </a:pPr>
+            <a:r>
+              <a:t>✅ 100% совпадение с эталоном ТЗ подтверждено автоматическим тестом test_balance.py (погрешность &lt; 10^-4 т).</a:t>
             </a:r>
           </a:p>
         </p:txBody>
@@ -4078,7 +5021,7 @@
             <a:avLst/>
           </a:prstGeom>
           <a:solidFill>
-            <a:srgbClr val="050507"/>
+            <a:srgbClr val="F8FAFC"/>
           </a:solidFill>
           <a:ln>
             <a:noFill/>
@@ -4114,8 +5057,8 @@
         </p:nvSpPr>
         <p:spPr>
           <a:xfrm>
-            <a:off x="731520" y="457200"/>
-            <a:ext cx="9144000" cy="1005840"/>
+            <a:off x="731520" y="365760"/>
+            <a:ext cx="9326880" cy="1005840"/>
           </a:xfrm>
           <a:prstGeom prst="rect">
             <a:avLst/>
@@ -4131,24 +5074,24 @@
             <a:pPr>
               <a:defRPr sz="1000" b="1">
                 <a:solidFill>
-                  <a:srgbClr val="CCFF00"/>
-                </a:solidFill>
-              </a:defRPr>
-            </a:pPr>
-            <a:r>
-              <a:t>&lt;СЛАЙД 03 // ИНВЕСТИЦИОННАЯ СТРАТЕГИЯ&gt;</a:t>
-            </a:r>
-          </a:p>
-          <a:p>
-            <a:pPr>
-              <a:defRPr sz="2200" b="1">
-                <a:solidFill>
-                  <a:srgbClr val="FFFFFF"/>
-                </a:solidFill>
-              </a:defRPr>
-            </a:pPr>
-            <a:r>
-              <a:t>ИНВЕСТИЦИОННЫЕ ВОРОТА (GATE-ПОДХОД КЕЙСА)</a:t>
+                  <a:srgbClr val="0284C7"/>
+                </a:solidFill>
+              </a:defRPr>
+            </a:pPr>
+            <a:r>
+              <a:t>СЛАЙД 3 // УПРАВЛЕНИЕ CAPEX И ПРОЕКТАМИ</a:t>
+            </a:r>
+          </a:p>
+          <a:p>
+            <a:pPr>
+              <a:defRPr sz="2100" b="1">
+                <a:solidFill>
+                  <a:srgbClr val="0F172A"/>
+                </a:solidFill>
+              </a:defRPr>
+            </a:pPr>
+            <a:r>
+              <a:t>Инвестиционная стратегия: Трехшлюзовая модель (Gate-подход)</a:t>
             </a:r>
           </a:p>
         </p:txBody>
@@ -4161,18 +5104,18 @@
         </p:nvSpPr>
         <p:spPr>
           <a:xfrm>
-            <a:off x="10058400" y="502920"/>
-            <a:ext cx="1371600" cy="365760"/>
+            <a:off x="10149840" y="411480"/>
+            <a:ext cx="1280160" cy="384048"/>
           </a:xfrm>
           <a:prstGeom prst="roundRect">
             <a:avLst/>
           </a:prstGeom>
           <a:solidFill>
-            <a:srgbClr val="18181C"/>
+            <a:srgbClr val="F1F5F9"/>
           </a:solidFill>
-          <a:ln>
+          <a:ln w="12700">
             <a:solidFill>
-              <a:srgbClr val="23232A"/>
+              <a:srgbClr val="CBD5E1"/>
             </a:solidFill>
           </a:ln>
         </p:spPr>
@@ -4195,14 +5138,14 @@
           <a:lstStyle/>
           <a:p>
             <a:pPr algn="ctr">
-              <a:defRPr sz="1100" b="1">
-                <a:solidFill>
-                  <a:srgbClr val="A1A1AA"/>
-                </a:solidFill>
-              </a:defRPr>
-            </a:pPr>
-            <a:r>
-              <a:t>1:10 — 1:45</a:t>
+              <a:defRPr sz="1000" b="1">
+                <a:solidFill>
+                  <a:srgbClr val="334155"/>
+                </a:solidFill>
+              </a:defRPr>
+            </a:pPr>
+            <a:r>
+              <a:t>⏱ 1:10 — 1:45</a:t>
             </a:r>
           </a:p>
         </p:txBody>
@@ -4215,18 +5158,18 @@
         </p:nvSpPr>
         <p:spPr>
           <a:xfrm>
-            <a:off x="731520" y="1645920"/>
-            <a:ext cx="3328416" cy="4389120"/>
+            <a:off x="731520" y="1508760"/>
+            <a:ext cx="3328416" cy="4846320"/>
           </a:xfrm>
           <a:prstGeom prst="roundRect">
             <a:avLst/>
           </a:prstGeom>
           <a:solidFill>
-            <a:srgbClr val="0F0F14"/>
+            <a:srgbClr val="FFFFFF"/>
           </a:solidFill>
-          <a:ln w="12700">
+          <a:ln w="19050">
             <a:solidFill>
-              <a:srgbClr val="CCFF00"/>
+              <a:srgbClr val="E2E8F0"/>
             </a:solidFill>
           </a:ln>
         </p:spPr>
@@ -4254,14 +5197,57 @@
       </p:sp>
       <p:sp>
         <p:nvSpPr>
-          <p:cNvPr id="6" name="TextBox 5"/>
+          <p:cNvPr id="6" name="Rounded Rectangle 5"/>
+          <p:cNvSpPr/>
+          <p:nvPr/>
+        </p:nvSpPr>
+        <p:spPr>
+          <a:xfrm>
+            <a:off x="731520" y="1508760"/>
+            <a:ext cx="3328416" cy="73152"/>
+          </a:xfrm>
+          <a:prstGeom prst="roundRect">
+            <a:avLst/>
+          </a:prstGeom>
+          <a:solidFill>
+            <a:srgbClr val="0284C7"/>
+          </a:solidFill>
+          <a:ln>
+            <a:noFill/>
+          </a:ln>
+        </p:spPr>
+        <p:style>
+          <a:lnRef idx="1">
+            <a:schemeClr val="accent1"/>
+          </a:lnRef>
+          <a:fillRef idx="3">
+            <a:schemeClr val="accent1"/>
+          </a:fillRef>
+          <a:effectRef idx="2">
+            <a:schemeClr val="accent1"/>
+          </a:effectRef>
+          <a:fontRef idx="minor">
+            <a:schemeClr val="lt1"/>
+          </a:fontRef>
+        </p:style>
+        <p:txBody>
+          <a:bodyPr rtlCol="0" anchor="ctr"/>
+          <a:lstStyle/>
+          <a:p>
+            <a:pPr algn="ctr"/>
+          </a:p>
+        </p:txBody>
+      </p:sp>
+      <p:sp>
+        <p:nvSpPr>
+          <p:cNvPr id="7" name="TextBox 6"/>
           <p:cNvSpPr txBox="1"/>
           <p:nvPr/>
         </p:nvSpPr>
         <p:spPr>
           <a:xfrm>
-            <a:off x="914400" y="1828800"/>
-            <a:ext cx="2962656" cy="4023360"/>
+            <a:off x="914400" y="1691640"/>
+            <a:ext cx="2962656" cy="4480560"/>
           </a:xfrm>
           <a:prstGeom prst="rect">
             <a:avLst/>
@@ -4269,87 +5255,149 @@
           <a:noFill/>
         </p:spPr>
         <p:txBody>
-          <a:bodyPr wrap="square">
+          <a:bodyPr wrap="square" lIns="0" tIns="0" rIns="0" bIns="0">
             <a:spAutoFit/>
           </a:bodyPr>
           <a:lstStyle/>
           <a:p>
             <a:pPr>
-              <a:defRPr sz="1200" b="1">
-                <a:solidFill>
-                  <a:srgbClr val="CCFF00"/>
-                </a:solidFill>
-              </a:defRPr>
-            </a:pPr>
-            <a:r>
-              <a:t>ШЛЮЗ 01: ZBO-МОДЕРНИЗАЦИЯ</a:t>
-            </a:r>
-          </a:p>
-          <a:p>
-            <a:br/>
-            <a:pPr>
+              <a:defRPr sz="1100" b="1">
+                <a:solidFill>
+                  <a:srgbClr val="0369A1"/>
+                </a:solidFill>
+              </a:defRPr>
+            </a:pPr>
+            <a:r>
+              <a:t>ШЛЮЗ 01: МОДЕРНИЗАЦИЯ ZBO</a:t>
+            </a:r>
+          </a:p>
+          <a:p>
+            <a:pPr>
+              <a:spcAft>
+                <a:spcPts val="800"/>
+              </a:spcAft>
               <a:defRPr sz="1800" b="1">
                 <a:solidFill>
-                  <a:srgbClr val="FFFFFF"/>
-                </a:solidFill>
-              </a:defRPr>
-            </a:pPr>
-            <a:r>
-              <a:t>CAPEX: 180 МЛН У.Е.</a:t>
-            </a:r>
-          </a:p>
-          <a:p>
-            <a:br/>
-            <a:pPr>
-              <a:defRPr sz="1100">
-                <a:solidFill>
-                  <a:srgbClr val="A1A1AA"/>
-                </a:solidFill>
-              </a:defRPr>
-            </a:pPr>
-            <a:r>
-              <a:t>• Год ввода: 2036 г.</a:t>
-            </a:r>
-            <a:br/>
-            <a:r>
-              <a:t>• OPEX: +12 млн у.е./год</a:t>
-            </a:r>
-            <a:br/>
-            <a:r>
-              <a:t>• Снижение потерь: 4.5% -&gt; 1.2%</a:t>
-            </a:r>
-            <a:br/>
-            <a:r>
-              <a:t>• Расширение баков: 70 -&gt; 120 т</a:t>
-            </a:r>
-            <a:br/>
-            <a:br/>
-            <a:r>
-              <a:t>Критическое решение: без ZBO невозможно пройти обязательный стресс-тест ТЗ (потери выше нормы &lt;= 2.0%).</a:t>
-            </a:r>
-          </a:p>
-        </p:txBody>
-      </p:sp>
-      <p:sp>
-        <p:nvSpPr>
-          <p:cNvPr id="7" name="Rounded Rectangle 6"/>
+                  <a:srgbClr val="0F172A"/>
+                </a:solidFill>
+              </a:defRPr>
+            </a:pPr>
+            <a:r>
+              <a:t>CAPEX: 180 млн у.е.</a:t>
+            </a:r>
+          </a:p>
+          <a:p>
+            <a:pPr>
+              <a:spcAft>
+                <a:spcPts val="800"/>
+              </a:spcAft>
+              <a:defRPr sz="1000" b="1">
+                <a:solidFill>
+                  <a:srgbClr val="10955D"/>
+                </a:solidFill>
+              </a:defRPr>
+            </a:pPr>
+            <a:r>
+              <a:t>Статус: Обязательно к реализации</a:t>
+            </a:r>
+          </a:p>
+          <a:p>
+            <a:pPr>
+              <a:spcAft>
+                <a:spcPts val="400"/>
+              </a:spcAft>
+              <a:defRPr sz="1000">
+                <a:solidFill>
+                  <a:srgbClr val="334155"/>
+                </a:solidFill>
+              </a:defRPr>
+            </a:pPr>
+            <a:r>
+              <a:t>• Год ввода: 2036 г. (транш 180 млн).</a:t>
+            </a:r>
+          </a:p>
+          <a:p>
+            <a:pPr>
+              <a:spcAft>
+                <a:spcPts val="400"/>
+              </a:spcAft>
+              <a:defRPr sz="1000">
+                <a:solidFill>
+                  <a:srgbClr val="334155"/>
+                </a:solidFill>
+              </a:defRPr>
+            </a:pPr>
+            <a:r>
+              <a:t>• OPEX обслуживания: +12 млн у.е./год.</a:t>
+            </a:r>
+          </a:p>
+          <a:p>
+            <a:pPr>
+              <a:spcAft>
+                <a:spcPts val="400"/>
+              </a:spcAft>
+              <a:defRPr sz="1000">
+                <a:solidFill>
+                  <a:srgbClr val="334155"/>
+                </a:solidFill>
+              </a:defRPr>
+            </a:pPr>
+            <a:r>
+              <a:t>• Эффект 1: Снижение потерь с 4.5% до 1.2%.</a:t>
+            </a:r>
+          </a:p>
+          <a:p>
+            <a:pPr>
+              <a:spcAft>
+                <a:spcPts val="400"/>
+              </a:spcAft>
+              <a:defRPr sz="1000">
+                <a:solidFill>
+                  <a:srgbClr val="334155"/>
+                </a:solidFill>
+              </a:defRPr>
+            </a:pPr>
+            <a:r>
+              <a:t>• Эффект 2: Расширение емкости баков с 70 до 120 тонн.</a:t>
+            </a:r>
+          </a:p>
+          <a:p>
+            <a:pPr>
+              <a:spcAft>
+                <a:spcPts val="400"/>
+              </a:spcAft>
+              <a:defRPr sz="1000">
+                <a:solidFill>
+                  <a:srgbClr val="334155"/>
+                </a:solidFill>
+              </a:defRPr>
+            </a:pPr>
+            <a:r>
+              <a:t>• Обоснование: Без ZBO невозможно пройти обязательный стресс-тест ТЗ (норма потерь &lt;= 2.0%).</a:t>
+            </a:r>
+          </a:p>
+        </p:txBody>
+      </p:sp>
+      <p:sp>
+        <p:nvSpPr>
+          <p:cNvPr id="8" name="Rounded Rectangle 7"/>
           <p:cNvSpPr/>
           <p:nvPr/>
         </p:nvSpPr>
         <p:spPr>
           <a:xfrm>
-            <a:off x="4379976" y="1645920"/>
-            <a:ext cx="3328416" cy="4389120"/>
+            <a:off x="4425696" y="1508760"/>
+            <a:ext cx="3328416" cy="4846320"/>
           </a:xfrm>
           <a:prstGeom prst="roundRect">
             <a:avLst/>
           </a:prstGeom>
           <a:solidFill>
-            <a:srgbClr val="0F0F14"/>
+            <a:srgbClr val="FFFFFF"/>
           </a:solidFill>
-          <a:ln w="12700">
+          <a:ln w="19050">
             <a:solidFill>
-              <a:srgbClr val="CCFF00"/>
+              <a:srgbClr val="E2E8F0"/>
             </a:solidFill>
           </a:ln>
         </p:spPr>
@@ -4377,14 +5425,57 @@
       </p:sp>
       <p:sp>
         <p:nvSpPr>
-          <p:cNvPr id="8" name="TextBox 7"/>
+          <p:cNvPr id="9" name="Rounded Rectangle 8"/>
+          <p:cNvSpPr/>
+          <p:nvPr/>
+        </p:nvSpPr>
+        <p:spPr>
+          <a:xfrm>
+            <a:off x="4425696" y="1508760"/>
+            <a:ext cx="3328416" cy="73152"/>
+          </a:xfrm>
+          <a:prstGeom prst="roundRect">
+            <a:avLst/>
+          </a:prstGeom>
+          <a:solidFill>
+            <a:srgbClr val="10955D"/>
+          </a:solidFill>
+          <a:ln>
+            <a:noFill/>
+          </a:ln>
+        </p:spPr>
+        <p:style>
+          <a:lnRef idx="1">
+            <a:schemeClr val="accent1"/>
+          </a:lnRef>
+          <a:fillRef idx="3">
+            <a:schemeClr val="accent1"/>
+          </a:fillRef>
+          <a:effectRef idx="2">
+            <a:schemeClr val="accent1"/>
+          </a:effectRef>
+          <a:fontRef idx="minor">
+            <a:schemeClr val="lt1"/>
+          </a:fontRef>
+        </p:style>
+        <p:txBody>
+          <a:bodyPr rtlCol="0" anchor="ctr"/>
+          <a:lstStyle/>
+          <a:p>
+            <a:pPr algn="ctr"/>
+          </a:p>
+        </p:txBody>
+      </p:sp>
+      <p:sp>
+        <p:nvSpPr>
+          <p:cNvPr id="10" name="TextBox 9"/>
           <p:cNvSpPr txBox="1"/>
           <p:nvPr/>
         </p:nvSpPr>
         <p:spPr>
           <a:xfrm>
-            <a:off x="4562856" y="1828800"/>
-            <a:ext cx="2962656" cy="4023360"/>
+            <a:off x="4608576" y="1691640"/>
+            <a:ext cx="2962656" cy="4480560"/>
           </a:xfrm>
           <a:prstGeom prst="rect">
             <a:avLst/>
@@ -4392,15 +5483,15 @@
           <a:noFill/>
         </p:spPr>
         <p:txBody>
-          <a:bodyPr wrap="square">
+          <a:bodyPr wrap="square" lIns="0" tIns="0" rIns="0" bIns="0">
             <a:spAutoFit/>
           </a:bodyPr>
           <a:lstStyle/>
           <a:p>
             <a:pPr>
-              <a:defRPr sz="1200" b="1">
-                <a:solidFill>
-                  <a:srgbClr val="CCFF00"/>
+              <a:defRPr sz="1100" b="1">
+                <a:solidFill>
+                  <a:srgbClr val="10955D"/>
                 </a:solidFill>
               </a:defRPr>
             </a:pPr>
@@ -4409,70 +5500,147 @@
             </a:r>
           </a:p>
           <a:p>
-            <a:br/>
-            <a:pPr>
+            <a:pPr>
+              <a:spcAft>
+                <a:spcPts val="800"/>
+              </a:spcAft>
               <a:defRPr sz="1800" b="1">
                 <a:solidFill>
-                  <a:srgbClr val="FFFFFF"/>
-                </a:solidFill>
-              </a:defRPr>
-            </a:pPr>
-            <a:r>
-              <a:t>CAPEX: 1 250 МЛН У.Е.</a:t>
-            </a:r>
-          </a:p>
-          <a:p>
-            <a:br/>
-            <a:pPr>
-              <a:defRPr sz="1100">
-                <a:solidFill>
-                  <a:srgbClr val="A1A1AA"/>
-                </a:solidFill>
-              </a:defRPr>
-            </a:pPr>
-            <a:r>
-              <a:t>• Транши: 250 (35) + 500 (36) + 500 (37)</a:t>
-            </a:r>
-            <a:br/>
-            <a:r>
-              <a:t>• Ввод в строй: строго с 2038 г.</a:t>
-            </a:r>
-            <a:br/>
-            <a:r>
-              <a:t>• Мощность: до 120 т/год</a:t>
-            </a:r>
-            <a:br/>
-            <a:r>
-              <a:t>• Себестоимость: 3.0 млн/т (0 бронь)</a:t>
-            </a:r>
-            <a:br/>
-            <a:br/>
-            <a:r>
-              <a:t>CAPEX до 2037 г.: 1 430 млн у.е. при лимите 1 800 млн (запас +370 млн у.е.). Окупается к 2040 г.</a:t>
-            </a:r>
-          </a:p>
-        </p:txBody>
-      </p:sp>
-      <p:sp>
-        <p:nvSpPr>
-          <p:cNvPr id="9" name="Rounded Rectangle 8"/>
+                  <a:srgbClr val="0F172A"/>
+                </a:solidFill>
+              </a:defRPr>
+            </a:pPr>
+            <a:r>
+              <a:t>CAPEX: 1 250 млн у.е.</a:t>
+            </a:r>
+          </a:p>
+          <a:p>
+            <a:pPr>
+              <a:spcAft>
+                <a:spcPts val="800"/>
+              </a:spcAft>
+              <a:defRPr sz="1000" b="1">
+                <a:solidFill>
+                  <a:srgbClr val="10955D"/>
+                </a:solidFill>
+              </a:defRPr>
+            </a:pPr>
+            <a:r>
+              <a:t>Статус: Главный драйвер окупаемости</a:t>
+            </a:r>
+          </a:p>
+          <a:p>
+            <a:pPr>
+              <a:spcAft>
+                <a:spcPts val="400"/>
+              </a:spcAft>
+              <a:defRPr sz="1000">
+                <a:solidFill>
+                  <a:srgbClr val="334155"/>
+                </a:solidFill>
+              </a:defRPr>
+            </a:pPr>
+            <a:r>
+              <a:t>• Транши: 250 (35 г.) + 500 (36 г.) + 500 (37 г.).</a:t>
+            </a:r>
+          </a:p>
+          <a:p>
+            <a:pPr>
+              <a:spcAft>
+                <a:spcPts val="400"/>
+              </a:spcAft>
+              <a:defRPr sz="1000">
+                <a:solidFill>
+                  <a:srgbClr val="334155"/>
+                </a:solidFill>
+              </a:defRPr>
+            </a:pPr>
+            <a:r>
+              <a:t>• Ввод в строй: 2038 год.</a:t>
+            </a:r>
+          </a:p>
+          <a:p>
+            <a:pPr>
+              <a:spcAft>
+                <a:spcPts val="400"/>
+              </a:spcAft>
+              <a:defRPr sz="1000">
+                <a:solidFill>
+                  <a:srgbClr val="334155"/>
+                </a:solidFill>
+              </a:defRPr>
+            </a:pPr>
+            <a:r>
+              <a:t>• Мощность: до 120 т/год по тарифу 3.0 млн у.е./т.</a:t>
+            </a:r>
+          </a:p>
+          <a:p>
+            <a:pPr>
+              <a:spcAft>
+                <a:spcPts val="400"/>
+              </a:spcAft>
+              <a:defRPr sz="1000">
+                <a:solidFill>
+                  <a:srgbClr val="334155"/>
+                </a:solidFill>
+              </a:defRPr>
+            </a:pPr>
+            <a:r>
+              <a:t>• 0 млн у.е. бронирования (нет Take-or-Pay).</a:t>
+            </a:r>
+          </a:p>
+          <a:p>
+            <a:pPr>
+              <a:spcAft>
+                <a:spcPts val="400"/>
+              </a:spcAft>
+              <a:defRPr sz="1000">
+                <a:solidFill>
+                  <a:srgbClr val="334155"/>
+                </a:solidFill>
+              </a:defRPr>
+            </a:pPr>
+            <a:r>
+              <a:t>• CAPEX до 2037 г.: 1 430 млн у.е. (запас +370 млн у.е. до лимита 1 800 млн).</a:t>
+            </a:r>
+          </a:p>
+          <a:p>
+            <a:pPr>
+              <a:spcAft>
+                <a:spcPts val="400"/>
+              </a:spcAft>
+              <a:defRPr sz="1000">
+                <a:solidFill>
+                  <a:srgbClr val="334155"/>
+                </a:solidFill>
+              </a:defRPr>
+            </a:pPr>
+            <a:r>
+              <a:t>• Полная окупаемость инвестиций к 2040 году.</a:t>
+            </a:r>
+          </a:p>
+        </p:txBody>
+      </p:sp>
+      <p:sp>
+        <p:nvSpPr>
+          <p:cNvPr id="11" name="Rounded Rectangle 10"/>
           <p:cNvSpPr/>
           <p:nvPr/>
         </p:nvSpPr>
         <p:spPr>
           <a:xfrm>
-            <a:off x="8028432" y="1645920"/>
-            <a:ext cx="3328416" cy="4389120"/>
+            <a:off x="8119872" y="1508760"/>
+            <a:ext cx="3328416" cy="4846320"/>
           </a:xfrm>
           <a:prstGeom prst="roundRect">
             <a:avLst/>
           </a:prstGeom>
           <a:solidFill>
-            <a:srgbClr val="0F0F14"/>
+            <a:srgbClr val="FFFFFF"/>
           </a:solidFill>
-          <a:ln w="12700">
+          <a:ln w="19050">
             <a:solidFill>
-              <a:srgbClr val="23232A"/>
+              <a:srgbClr val="E2E8F0"/>
             </a:solidFill>
           </a:ln>
         </p:spPr>
@@ -4500,14 +5668,57 @@
       </p:sp>
       <p:sp>
         <p:nvSpPr>
-          <p:cNvPr id="10" name="TextBox 9"/>
+          <p:cNvPr id="12" name="Rounded Rectangle 11"/>
+          <p:cNvSpPr/>
+          <p:nvPr/>
+        </p:nvSpPr>
+        <p:spPr>
+          <a:xfrm>
+            <a:off x="8119872" y="1508760"/>
+            <a:ext cx="3328416" cy="73152"/>
+          </a:xfrm>
+          <a:prstGeom prst="roundRect">
+            <a:avLst/>
+          </a:prstGeom>
+          <a:solidFill>
+            <a:srgbClr val="B45309"/>
+          </a:solidFill>
+          <a:ln>
+            <a:noFill/>
+          </a:ln>
+        </p:spPr>
+        <p:style>
+          <a:lnRef idx="1">
+            <a:schemeClr val="accent1"/>
+          </a:lnRef>
+          <a:fillRef idx="3">
+            <a:schemeClr val="accent1"/>
+          </a:fillRef>
+          <a:effectRef idx="2">
+            <a:schemeClr val="accent1"/>
+          </a:effectRef>
+          <a:fontRef idx="minor">
+            <a:schemeClr val="lt1"/>
+          </a:fontRef>
+        </p:style>
+        <p:txBody>
+          <a:bodyPr rtlCol="0" anchor="ctr"/>
+          <a:lstStyle/>
+          <a:p>
+            <a:pPr algn="ctr"/>
+          </a:p>
+        </p:txBody>
+      </p:sp>
+      <p:sp>
+        <p:nvSpPr>
+          <p:cNvPr id="13" name="TextBox 12"/>
           <p:cNvSpPr txBox="1"/>
           <p:nvPr/>
         </p:nvSpPr>
         <p:spPr>
           <a:xfrm>
-            <a:off x="8211312" y="1828800"/>
-            <a:ext cx="2962656" cy="4023360"/>
+            <a:off x="8302752" y="1691640"/>
+            <a:ext cx="2962656" cy="4480560"/>
           </a:xfrm>
           <a:prstGeom prst="rect">
             <a:avLst/>
@@ -4515,15 +5726,15 @@
           <a:noFill/>
         </p:spPr>
         <p:txBody>
-          <a:bodyPr wrap="square">
+          <a:bodyPr wrap="square" lIns="0" tIns="0" rIns="0" bIns="0">
             <a:spAutoFit/>
           </a:bodyPr>
           <a:lstStyle/>
           <a:p>
             <a:pPr>
-              <a:defRPr sz="1200" b="1">
-                <a:solidFill>
-                  <a:srgbClr val="FFFFFF"/>
+              <a:defRPr sz="1100" b="1">
+                <a:solidFill>
+                  <a:srgbClr val="B45309"/>
                 </a:solidFill>
               </a:defRPr>
             </a:pPr>
@@ -4532,42 +5743,108 @@
             </a:r>
           </a:p>
           <a:p>
-            <a:br/>
-            <a:pPr>
+            <a:pPr>
+              <a:spcAft>
+                <a:spcPts val="800"/>
+              </a:spcAft>
               <a:defRPr sz="1800" b="1">
                 <a:solidFill>
-                  <a:srgbClr val="FFFFFF"/>
-                </a:solidFill>
-              </a:defRPr>
-            </a:pPr>
-            <a:r>
-              <a:t>CAPEX: 360 МЛН У.Е.</a:t>
-            </a:r>
-          </a:p>
-          <a:p>
-            <a:br/>
-            <a:pPr>
-              <a:defRPr sz="1100">
-                <a:solidFill>
-                  <a:srgbClr val="A1A1AA"/>
-                </a:solidFill>
-              </a:defRPr>
-            </a:pPr>
-            <a:r>
-              <a:t>• Опцион: 90 млн у.е. (2035 г.)</a:t>
-            </a:r>
-            <a:br/>
-            <a:r>
-              <a:t>• Ввод: 270 млн у.е. (2036 г.)</a:t>
-            </a:r>
-            <a:br/>
-            <a:r>
-              <a:t>• Мощность: 130 т/год (тариф 7.1)</a:t>
-            </a:r>
-            <a:br/>
-            <a:br/>
-            <a:r>
-              <a:t>Решение: Оставить в резерве. Служит страховкой на случай задержки лунной базы более чем на 2 года.</a:t>
+                  <a:srgbClr val="0F172A"/>
+                </a:solidFill>
+              </a:defRPr>
+            </a:pPr>
+            <a:r>
+              <a:t>CAPEX: 360 млн у.е.</a:t>
+            </a:r>
+          </a:p>
+          <a:p>
+            <a:pPr>
+              <a:spcAft>
+                <a:spcPts val="800"/>
+              </a:spcAft>
+              <a:defRPr sz="1000" b="1">
+                <a:solidFill>
+                  <a:srgbClr val="B45309"/>
+                </a:solidFill>
+              </a:defRPr>
+            </a:pPr>
+            <a:r>
+              <a:t>Статус: Резервный опцион (Заморожен)</a:t>
+            </a:r>
+          </a:p>
+          <a:p>
+            <a:pPr>
+              <a:spcAft>
+                <a:spcPts val="400"/>
+              </a:spcAft>
+              <a:defRPr sz="1000">
+                <a:solidFill>
+                  <a:srgbClr val="334155"/>
+                </a:solidFill>
+              </a:defRPr>
+            </a:pPr>
+            <a:r>
+              <a:t>• Опцион выкупа: 90 млн у.е. (2035 г.).</a:t>
+            </a:r>
+          </a:p>
+          <a:p>
+            <a:pPr>
+              <a:spcAft>
+                <a:spcPts val="400"/>
+              </a:spcAft>
+              <a:defRPr sz="1000">
+                <a:solidFill>
+                  <a:srgbClr val="334155"/>
+                </a:solidFill>
+              </a:defRPr>
+            </a:pPr>
+            <a:r>
+              <a:t>• Финальный ввод: 270 млн у.е. (2036 г.).</a:t>
+            </a:r>
+          </a:p>
+          <a:p>
+            <a:pPr>
+              <a:spcAft>
+                <a:spcPts val="400"/>
+              </a:spcAft>
+              <a:defRPr sz="1000">
+                <a:solidFill>
+                  <a:srgbClr val="334155"/>
+                </a:solidFill>
+              </a:defRPr>
+            </a:pPr>
+            <a:r>
+              <a:t>• Мощность: 130 т/год по тарифу 7.1 млн у.е./т.</a:t>
+            </a:r>
+          </a:p>
+          <a:p>
+            <a:pPr>
+              <a:spcAft>
+                <a:spcPts val="400"/>
+              </a:spcAft>
+              <a:defRPr sz="1000">
+                <a:solidFill>
+                  <a:srgbClr val="334155"/>
+                </a:solidFill>
+              </a:defRPr>
+            </a:pPr>
+            <a:r>
+              <a:t>• Обоснование решения: В базовом плане НЕ активируется ввиду достатка лунного ISRU.</a:t>
+            </a:r>
+          </a:p>
+          <a:p>
+            <a:pPr>
+              <a:spcAft>
+                <a:spcPts val="400"/>
+              </a:spcAft>
+              <a:defRPr sz="1000">
+                <a:solidFill>
+                  <a:srgbClr val="334155"/>
+                </a:solidFill>
+              </a:defRPr>
+            </a:pPr>
+            <a:r>
+              <a:t>• Служит страховкой на случай задержки лунной базы свыше 2 лет.</a:t>
             </a:r>
           </a:p>
         </p:txBody>
@@ -4605,7 +5882,7 @@
             <a:avLst/>
           </a:prstGeom>
           <a:solidFill>
-            <a:srgbClr val="050507"/>
+            <a:srgbClr val="F8FAFC"/>
           </a:solidFill>
           <a:ln>
             <a:noFill/>
@@ -4641,8 +5918,8 @@
         </p:nvSpPr>
         <p:spPr>
           <a:xfrm>
-            <a:off x="731520" y="457200"/>
-            <a:ext cx="9144000" cy="1005840"/>
+            <a:off x="731520" y="365760"/>
+            <a:ext cx="9326880" cy="1005840"/>
           </a:xfrm>
           <a:prstGeom prst="rect">
             <a:avLst/>
@@ -4658,24 +5935,24 @@
             <a:pPr>
               <a:defRPr sz="1000" b="1">
                 <a:solidFill>
-                  <a:srgbClr val="CCFF00"/>
-                </a:solidFill>
-              </a:defRPr>
-            </a:pPr>
-            <a:r>
-              <a:t>&lt;СЛАЙД 04 // ЖИВОЕ ДЕМО&gt;</a:t>
-            </a:r>
-          </a:p>
-          <a:p>
-            <a:pPr>
-              <a:defRPr sz="2200" b="1">
-                <a:solidFill>
-                  <a:srgbClr val="FFFFFF"/>
-                </a:solidFill>
-              </a:defRPr>
-            </a:pPr>
-            <a:r>
-              <a:t>РАБОЧЕЕ МЕСТО ОПЕРАТОРА ОТУ (ДЕМОНСТРАЦИЯ)</a:t>
+                  <a:srgbClr val="0284C7"/>
+                </a:solidFill>
+              </a:defRPr>
+            </a:pPr>
+            <a:r>
+              <a:t>СЛАЙД 4 // МУЛЬТИ-ЯДЕРНАЯ ОПТИМИЗАЦИЯ</a:t>
+            </a:r>
+          </a:p>
+          <a:p>
+            <a:pPr>
+              <a:defRPr sz="2100" b="1">
+                <a:solidFill>
+                  <a:srgbClr val="0F172A"/>
+                </a:solidFill>
+              </a:defRPr>
+            </a:pPr>
+            <a:r>
+              <a:t>Сравнительный анализ алгоритмов: Экономия 1.096 млрд у.е.</a:t>
             </a:r>
           </a:p>
         </p:txBody>
@@ -4688,18 +5965,18 @@
         </p:nvSpPr>
         <p:spPr>
           <a:xfrm>
-            <a:off x="10058400" y="502920"/>
-            <a:ext cx="1371600" cy="365760"/>
+            <a:off x="10149840" y="411480"/>
+            <a:ext cx="1280160" cy="384048"/>
           </a:xfrm>
           <a:prstGeom prst="roundRect">
             <a:avLst/>
           </a:prstGeom>
           <a:solidFill>
-            <a:srgbClr val="18181C"/>
+            <a:srgbClr val="F1F5F9"/>
           </a:solidFill>
-          <a:ln>
+          <a:ln w="12700">
             <a:solidFill>
-              <a:srgbClr val="23232A"/>
+              <a:srgbClr val="CBD5E1"/>
             </a:solidFill>
           </a:ln>
         </p:spPr>
@@ -4722,14 +5999,14 @@
           <a:lstStyle/>
           <a:p>
             <a:pPr algn="ctr">
-              <a:defRPr sz="1100" b="1">
-                <a:solidFill>
-                  <a:srgbClr val="A1A1AA"/>
-                </a:solidFill>
-              </a:defRPr>
-            </a:pPr>
-            <a:r>
-              <a:t>1:45 — 2:45</a:t>
+              <a:defRPr sz="1000" b="1">
+                <a:solidFill>
+                  <a:srgbClr val="334155"/>
+                </a:solidFill>
+              </a:defRPr>
+            </a:pPr>
+            <a:r>
+              <a:t>⏱ 1:45 — 2:30</a:t>
             </a:r>
           </a:p>
         </p:txBody>
@@ -4742,18 +6019,18 @@
         </p:nvSpPr>
         <p:spPr>
           <a:xfrm>
-            <a:off x="731520" y="1645920"/>
-            <a:ext cx="5120640" cy="4389120"/>
+            <a:off x="731520" y="1508760"/>
+            <a:ext cx="3383280" cy="1051560"/>
           </a:xfrm>
           <a:prstGeom prst="roundRect">
             <a:avLst/>
           </a:prstGeom>
           <a:solidFill>
-            <a:srgbClr val="0F0F14"/>
+            <a:srgbClr val="FFFFFF"/>
           </a:solidFill>
-          <a:ln w="12700">
+          <a:ln w="19050">
             <a:solidFill>
-              <a:srgbClr val="23232A"/>
+              <a:srgbClr val="E2E8F0"/>
             </a:solidFill>
           </a:ln>
         </p:spPr>
@@ -4781,14 +6058,57 @@
       </p:sp>
       <p:sp>
         <p:nvSpPr>
-          <p:cNvPr id="6" name="TextBox 5"/>
+          <p:cNvPr id="6" name="Rounded Rectangle 5"/>
+          <p:cNvSpPr/>
+          <p:nvPr/>
+        </p:nvSpPr>
+        <p:spPr>
+          <a:xfrm>
+            <a:off x="731520" y="1508760"/>
+            <a:ext cx="3383280" cy="73152"/>
+          </a:xfrm>
+          <a:prstGeom prst="roundRect">
+            <a:avLst/>
+          </a:prstGeom>
+          <a:solidFill>
+            <a:srgbClr val="10955D"/>
+          </a:solidFill>
+          <a:ln>
+            <a:noFill/>
+          </a:ln>
+        </p:spPr>
+        <p:style>
+          <a:lnRef idx="1">
+            <a:schemeClr val="accent1"/>
+          </a:lnRef>
+          <a:fillRef idx="3">
+            <a:schemeClr val="accent1"/>
+          </a:fillRef>
+          <a:effectRef idx="2">
+            <a:schemeClr val="accent1"/>
+          </a:effectRef>
+          <a:fontRef idx="minor">
+            <a:schemeClr val="lt1"/>
+          </a:fontRef>
+        </p:style>
+        <p:txBody>
+          <a:bodyPr rtlCol="0" anchor="ctr"/>
+          <a:lstStyle/>
+          <a:p>
+            <a:pPr algn="ctr"/>
+          </a:p>
+        </p:txBody>
+      </p:sp>
+      <p:sp>
+        <p:nvSpPr>
+          <p:cNvPr id="7" name="TextBox 6"/>
           <p:cNvSpPr txBox="1"/>
           <p:nvPr/>
         </p:nvSpPr>
         <p:spPr>
           <a:xfrm>
-            <a:off x="1005840" y="1828800"/>
-            <a:ext cx="4572000" cy="4023360"/>
+            <a:off x="914400" y="1673352"/>
+            <a:ext cx="3017520" cy="777240"/>
           </a:xfrm>
           <a:prstGeom prst="rect">
             <a:avLst/>
@@ -4796,96 +6116,68 @@
           <a:noFill/>
         </p:spPr>
         <p:txBody>
-          <a:bodyPr wrap="square">
+          <a:bodyPr wrap="square" lIns="0" tIns="0" rIns="0" bIns="0">
             <a:spAutoFit/>
           </a:bodyPr>
           <a:lstStyle/>
           <a:p>
             <a:pPr>
-              <a:defRPr sz="1300" b="1">
-                <a:solidFill>
-                  <a:srgbClr val="CCFF00"/>
-                </a:solidFill>
-              </a:defRPr>
-            </a:pPr>
-            <a:r>
-              <a:t>🖥️ ЕДИНЫЙ ЭКРАН СИТУАЦИОННОГО ЦЕНТРА</a:t>
-            </a:r>
-          </a:p>
-          <a:p>
-            <a:br/>
-            <a:pPr>
-              <a:defRPr sz="1100">
-                <a:solidFill>
-                  <a:srgbClr val="A1A1AA"/>
-                </a:solidFill>
-              </a:defRPr>
-            </a:pPr>
-            <a:r>
-              <a:t>• Интегральные KPI: Статус узла, затраты LCC, NPV (r=8%), обслуженный спрос, физический дефицит, потери оборота.</a:t>
-            </a:r>
-          </a:p>
-          <a:p>
-            <a:br/>
-            <a:pPr>
-              <a:defRPr sz="1100">
-                <a:solidFill>
-                  <a:srgbClr val="A1A1AA"/>
-                </a:solidFill>
-              </a:defRPr>
-            </a:pPr>
-            <a:r>
-              <a:t>• Панель 10 ограничений: Живые алерты SLA &gt;= 99%, лимитов CAPEX 1800/2800 млн, буфера 45 дней, емкости баков 120 т.</a:t>
-            </a:r>
-          </a:p>
-          <a:p>
-            <a:br/>
-            <a:pPr>
-              <a:defRPr sz="1100">
-                <a:solidFill>
-                  <a:srgbClr val="A1A1AA"/>
-                </a:solidFill>
-              </a:defRPr>
-            </a:pPr>
-            <a:r>
-              <a:t>• Слайдеры отбора и брони: Управление 5 каналами с индикатором порога Take-or-Pay.</a:t>
-            </a:r>
-          </a:p>
-          <a:p>
-            <a:br/>
-            <a:pPr>
-              <a:defRPr sz="1100">
-                <a:solidFill>
-                  <a:srgbClr val="A1A1AA"/>
-                </a:solidFill>
-              </a:defRPr>
-            </a:pPr>
-            <a:r>
-              <a:t>• 4 Графика Recharts: Материальный баланс, траектория бака, структура LCC и дельта стресс-теста.</a:t>
-            </a:r>
-          </a:p>
-        </p:txBody>
-      </p:sp>
-      <p:sp>
-        <p:nvSpPr>
-          <p:cNvPr id="7" name="Rounded Rectangle 6"/>
+              <a:defRPr sz="2400" b="1">
+                <a:solidFill>
+                  <a:srgbClr val="10955D"/>
+                </a:solidFill>
+              </a:defRPr>
+            </a:pPr>
+            <a:r>
+              <a:t>-1 096.8 млн</a:t>
+            </a:r>
+          </a:p>
+          <a:p>
+            <a:pPr>
+              <a:defRPr sz="1000" b="1">
+                <a:solidFill>
+                  <a:srgbClr val="0F172A"/>
+                </a:solidFill>
+              </a:defRPr>
+            </a:pPr>
+            <a:r>
+              <a:t>Экономия бюджета NPV LCC (-11.81%)</a:t>
+            </a:r>
+          </a:p>
+          <a:p>
+            <a:pPr>
+              <a:defRPr sz="900">
+                <a:solidFill>
+                  <a:srgbClr val="64748B"/>
+                </a:solidFill>
+              </a:defRPr>
+            </a:pPr>
+            <a:r>
+              <a:t>Целевое ядро NASA MILP</a:t>
+            </a:r>
+          </a:p>
+        </p:txBody>
+      </p:sp>
+      <p:sp>
+        <p:nvSpPr>
+          <p:cNvPr id="8" name="Rounded Rectangle 7"/>
           <p:cNvSpPr/>
           <p:nvPr/>
         </p:nvSpPr>
         <p:spPr>
           <a:xfrm>
-            <a:off x="6217920" y="1645920"/>
-            <a:ext cx="5212080" cy="4389120"/>
+            <a:off x="4389120" y="1508760"/>
+            <a:ext cx="3383280" cy="1051560"/>
           </a:xfrm>
           <a:prstGeom prst="roundRect">
             <a:avLst/>
           </a:prstGeom>
           <a:solidFill>
-            <a:srgbClr val="0F0F14"/>
+            <a:srgbClr val="FFFFFF"/>
           </a:solidFill>
-          <a:ln w="12700">
+          <a:ln w="19050">
             <a:solidFill>
-              <a:srgbClr val="CCFF00"/>
+              <a:srgbClr val="E2E8F0"/>
             </a:solidFill>
           </a:ln>
         </p:spPr>
@@ -4913,14 +6205,57 @@
       </p:sp>
       <p:sp>
         <p:nvSpPr>
-          <p:cNvPr id="8" name="TextBox 7"/>
+          <p:cNvPr id="9" name="Rounded Rectangle 8"/>
+          <p:cNvSpPr/>
+          <p:nvPr/>
+        </p:nvSpPr>
+        <p:spPr>
+          <a:xfrm>
+            <a:off x="4389120" y="1508760"/>
+            <a:ext cx="3383280" cy="73152"/>
+          </a:xfrm>
+          <a:prstGeom prst="roundRect">
+            <a:avLst/>
+          </a:prstGeom>
+          <a:solidFill>
+            <a:srgbClr val="10955D"/>
+          </a:solidFill>
+          <a:ln>
+            <a:noFill/>
+          </a:ln>
+        </p:spPr>
+        <p:style>
+          <a:lnRef idx="1">
+            <a:schemeClr val="accent1"/>
+          </a:lnRef>
+          <a:fillRef idx="3">
+            <a:schemeClr val="accent1"/>
+          </a:fillRef>
+          <a:effectRef idx="2">
+            <a:schemeClr val="accent1"/>
+          </a:effectRef>
+          <a:fontRef idx="minor">
+            <a:schemeClr val="lt1"/>
+          </a:fontRef>
+        </p:style>
+        <p:txBody>
+          <a:bodyPr rtlCol="0" anchor="ctr"/>
+          <a:lstStyle/>
+          <a:p>
+            <a:pPr algn="ctr"/>
+          </a:p>
+        </p:txBody>
+      </p:sp>
+      <p:sp>
+        <p:nvSpPr>
+          <p:cNvPr id="10" name="TextBox 9"/>
           <p:cNvSpPr txBox="1"/>
           <p:nvPr/>
         </p:nvSpPr>
         <p:spPr>
           <a:xfrm>
-            <a:off x="6492240" y="2560320"/>
-            <a:ext cx="4663440" cy="2743200"/>
+            <a:off x="4572000" y="1673352"/>
+            <a:ext cx="3017520" cy="777240"/>
           </a:xfrm>
           <a:prstGeom prst="rect">
             <a:avLst/>
@@ -4928,50 +6263,1006 @@
           <a:noFill/>
         </p:spPr>
         <p:txBody>
-          <a:bodyPr wrap="square">
+          <a:bodyPr wrap="square" lIns="0" tIns="0" rIns="0" bIns="0">
             <a:spAutoFit/>
           </a:bodyPr>
           <a:lstStyle/>
           <a:p>
-            <a:pPr algn="ctr">
-              <a:defRPr sz="1600" b="1">
-                <a:solidFill>
-                  <a:srgbClr val="CCFF00"/>
-                </a:solidFill>
-              </a:defRPr>
-            </a:pPr>
-            <a:r>
-              <a:t>⚡ ПЕРЕХОД К ЖИВОМУ ДЕМОНСТРАЦИОННОМУ СТЕНДУ</a:t>
-            </a:r>
-          </a:p>
-          <a:p>
-            <a:br/>
-            <a:pPr algn="ctr">
-              <a:defRPr sz="1300">
-                <a:solidFill>
-                  <a:srgbClr val="FFFFFF"/>
-                </a:solidFill>
-              </a:defRPr>
-            </a:pPr>
-            <a:r>
-              <a:t>Демонстрация в браузере (http://localhost:3000):</a:t>
-            </a:r>
-            <a:br/>
-            <a:br/>
-            <a:r>
-              <a:t>1. Запуск Обязательного стресс-теста ТЗ</a:t>
-            </a:r>
-            <a:br/>
-            <a:r>
-              <a:t>2. Тестирование отказа без ZBO и снятие нарушения</a:t>
-            </a:r>
-            <a:br/>
-            <a:r>
-              <a:t>3. Интерактивный отклик Take-or-Pay при снижении отбора</a:t>
-            </a:r>
-            <a:br/>
-            <a:r>
-              <a:t>4. Скачивание многостраничного отчета Excel в 1 клик</a:t>
+            <a:pPr>
+              <a:defRPr sz="2400" b="1">
+                <a:solidFill>
+                  <a:srgbClr val="10955D"/>
+                </a:solidFill>
+              </a:defRPr>
+            </a:pPr>
+            <a:r>
+              <a:t>0.0 млн у.е.</a:t>
+            </a:r>
+          </a:p>
+          <a:p>
+            <a:pPr>
+              <a:defRPr sz="1000" b="1">
+                <a:solidFill>
+                  <a:srgbClr val="0F172A"/>
+                </a:solidFill>
+              </a:defRPr>
+            </a:pPr>
+            <a:r>
+              <a:t>Штрафы Take-or-Pay ликвидированы</a:t>
+            </a:r>
+          </a:p>
+          <a:p>
+            <a:pPr>
+              <a:defRPr sz="900">
+                <a:solidFill>
+                  <a:srgbClr val="64748B"/>
+                </a:solidFill>
+              </a:defRPr>
+            </a:pPr>
+            <a:r>
+              <a:t>Заказ строго равен бронированию</a:t>
+            </a:r>
+          </a:p>
+        </p:txBody>
+      </p:sp>
+      <p:sp>
+        <p:nvSpPr>
+          <p:cNvPr id="11" name="Rounded Rectangle 10"/>
+          <p:cNvSpPr/>
+          <p:nvPr/>
+        </p:nvSpPr>
+        <p:spPr>
+          <a:xfrm>
+            <a:off x="8046720" y="1508760"/>
+            <a:ext cx="3383280" cy="1051560"/>
+          </a:xfrm>
+          <a:prstGeom prst="roundRect">
+            <a:avLst/>
+          </a:prstGeom>
+          <a:solidFill>
+            <a:srgbClr val="FFFFFF"/>
+          </a:solidFill>
+          <a:ln w="19050">
+            <a:solidFill>
+              <a:srgbClr val="E2E8F0"/>
+            </a:solidFill>
+          </a:ln>
+        </p:spPr>
+        <p:style>
+          <a:lnRef idx="1">
+            <a:schemeClr val="accent1"/>
+          </a:lnRef>
+          <a:fillRef idx="3">
+            <a:schemeClr val="accent1"/>
+          </a:fillRef>
+          <a:effectRef idx="2">
+            <a:schemeClr val="accent1"/>
+          </a:effectRef>
+          <a:fontRef idx="minor">
+            <a:schemeClr val="lt1"/>
+          </a:fontRef>
+        </p:style>
+        <p:txBody>
+          <a:bodyPr rtlCol="0" anchor="ctr"/>
+          <a:lstStyle/>
+          <a:p>
+            <a:pPr algn="ctr"/>
+          </a:p>
+        </p:txBody>
+      </p:sp>
+      <p:sp>
+        <p:nvSpPr>
+          <p:cNvPr id="12" name="Rounded Rectangle 11"/>
+          <p:cNvSpPr/>
+          <p:nvPr/>
+        </p:nvSpPr>
+        <p:spPr>
+          <a:xfrm>
+            <a:off x="8046720" y="1508760"/>
+            <a:ext cx="3383280" cy="73152"/>
+          </a:xfrm>
+          <a:prstGeom prst="roundRect">
+            <a:avLst/>
+          </a:prstGeom>
+          <a:solidFill>
+            <a:srgbClr val="0284C7"/>
+          </a:solidFill>
+          <a:ln>
+            <a:noFill/>
+          </a:ln>
+        </p:spPr>
+        <p:style>
+          <a:lnRef idx="1">
+            <a:schemeClr val="accent1"/>
+          </a:lnRef>
+          <a:fillRef idx="3">
+            <a:schemeClr val="accent1"/>
+          </a:fillRef>
+          <a:effectRef idx="2">
+            <a:schemeClr val="accent1"/>
+          </a:effectRef>
+          <a:fontRef idx="minor">
+            <a:schemeClr val="lt1"/>
+          </a:fontRef>
+        </p:style>
+        <p:txBody>
+          <a:bodyPr rtlCol="0" anchor="ctr"/>
+          <a:lstStyle/>
+          <a:p>
+            <a:pPr algn="ctr"/>
+          </a:p>
+        </p:txBody>
+      </p:sp>
+      <p:sp>
+        <p:nvSpPr>
+          <p:cNvPr id="13" name="TextBox 12"/>
+          <p:cNvSpPr txBox="1"/>
+          <p:nvPr/>
+        </p:nvSpPr>
+        <p:spPr>
+          <a:xfrm>
+            <a:off x="8229600" y="1673352"/>
+            <a:ext cx="3017520" cy="777240"/>
+          </a:xfrm>
+          <a:prstGeom prst="rect">
+            <a:avLst/>
+          </a:prstGeom>
+          <a:noFill/>
+        </p:spPr>
+        <p:txBody>
+          <a:bodyPr wrap="square" lIns="0" tIns="0" rIns="0" bIns="0">
+            <a:spAutoFit/>
+          </a:bodyPr>
+          <a:lstStyle/>
+          <a:p>
+            <a:pPr>
+              <a:defRPr sz="2400" b="1">
+                <a:solidFill>
+                  <a:srgbClr val="0284C7"/>
+                </a:solidFill>
+              </a:defRPr>
+            </a:pPr>
+            <a:r>
+              <a:t>100.0%</a:t>
+            </a:r>
+          </a:p>
+          <a:p>
+            <a:pPr>
+              <a:defRPr sz="1000" b="1">
+                <a:solidFill>
+                  <a:srgbClr val="0F172A"/>
+                </a:solidFill>
+              </a:defRPr>
+            </a:pPr>
+            <a:r>
+              <a:t>Критический SLA пилотируемых миссий</a:t>
+            </a:r>
+          </a:p>
+          <a:p>
+            <a:pPr>
+              <a:defRPr sz="900">
+                <a:solidFill>
+                  <a:srgbClr val="64748B"/>
+                </a:solidFill>
+              </a:defRPr>
+            </a:pPr>
+            <a:r>
+              <a:t>Общий SLA системы 99.8%</a:t>
+            </a:r>
+          </a:p>
+        </p:txBody>
+      </p:sp>
+      <p:graphicFrame>
+        <p:nvGraphicFramePr>
+          <p:cNvPr id="14" name="Table 13"/>
+          <p:cNvGraphicFramePr>
+            <a:graphicFrameLocks noGrp="1"/>
+          </p:cNvGraphicFramePr>
+          <p:nvPr/>
+        </p:nvGraphicFramePr>
+        <p:xfrm>
+          <a:off x="731520" y="2788920"/>
+          <a:ext cx="10725912" cy="3291840"/>
+        </p:xfrm>
+        <a:graphic>
+          <a:graphicData uri="http://schemas.openxmlformats.org/drawingml/2006/table">
+            <a:tbl>
+              <a:tblPr firstRow="1" bandRow="1">
+                <a:tableStyleId>{5C22544A-7EE6-4342-B048-85BDC9FD1C3A}</a:tableStyleId>
+              </a:tblPr>
+              <a:tblGrid>
+                <a:gridCol w="3044952"/>
+                <a:gridCol w="2560320"/>
+                <a:gridCol w="2560320"/>
+                <a:gridCol w="2560320"/>
+              </a:tblGrid>
+              <a:tr h="411480">
+                <a:tc>
+                  <a:txBody>
+                    <a:bodyPr/>
+                    <a:lstStyle/>
+                    <a:p>
+                      <a:pPr algn="l">
+                        <a:defRPr sz="1000" b="1">
+                          <a:solidFill>
+                            <a:srgbClr val="FFFFFF"/>
+                          </a:solidFill>
+                        </a:defRPr>
+                      </a:pPr>
+                      <a:r>
+                        <a:t>Показатель эффективности</a:t>
+                      </a:r>
+                    </a:p>
+                  </a:txBody>
+                  <a:tcPr>
+                    <a:solidFill>
+                      <a:srgbClr val="1E293B"/>
+                    </a:solidFill>
+                  </a:tcPr>
+                </a:tc>
+                <a:tc>
+                  <a:txBody>
+                    <a:bodyPr/>
+                    <a:lstStyle/>
+                    <a:p>
+                      <a:pPr algn="ctr">
+                        <a:defRPr sz="1000" b="1">
+                          <a:solidFill>
+                            <a:srgbClr val="FFFFFF"/>
+                          </a:solidFill>
+                        </a:defRPr>
+                      </a:pPr>
+                      <a:r>
+                        <a:t>ТЗ Регламент (Baseline)</a:t>
+                      </a:r>
+                    </a:p>
+                  </a:txBody>
+                  <a:tcPr>
+                    <a:solidFill>
+                      <a:srgbClr val="1E293B"/>
+                    </a:solidFill>
+                  </a:tcPr>
+                </a:tc>
+                <a:tc>
+                  <a:txBody>
+                    <a:bodyPr/>
+                    <a:lstStyle/>
+                    <a:p>
+                      <a:pPr algn="ctr">
+                        <a:defRPr sz="1000" b="1">
+                          <a:solidFill>
+                            <a:srgbClr val="FFFFFF"/>
+                          </a:solidFill>
+                        </a:defRPr>
+                      </a:pPr>
+                      <a:r>
+                        <a:t>NASA MILP (Целевое) ★</a:t>
+                      </a:r>
+                    </a:p>
+                  </a:txBody>
+                  <a:tcPr>
+                    <a:solidFill>
+                      <a:srgbClr val="1E293B"/>
+                    </a:solidFill>
+                  </a:tcPr>
+                </a:tc>
+                <a:tc>
+                  <a:txBody>
+                    <a:bodyPr/>
+                    <a:lstStyle/>
+                    <a:p>
+                      <a:pPr algn="ctr">
+                        <a:defRPr sz="1000" b="1">
+                          <a:solidFill>
+                            <a:srgbClr val="FFFFFF"/>
+                          </a:solidFill>
+                        </a:defRPr>
+                      </a:pPr>
+                      <a:r>
+                        <a:t>Minimax Robust (Вальд)</a:t>
+                      </a:r>
+                    </a:p>
+                  </a:txBody>
+                  <a:tcPr>
+                    <a:solidFill>
+                      <a:srgbClr val="1E293B"/>
+                    </a:solidFill>
+                  </a:tcPr>
+                </a:tc>
+              </a:tr>
+              <a:tr h="411480">
+                <a:tc>
+                  <a:txBody>
+                    <a:bodyPr/>
+                    <a:lstStyle/>
+                    <a:p>
+                      <a:pPr algn="l">
+                        <a:defRPr sz="950">
+                          <a:solidFill>
+                            <a:srgbClr val="0F172A"/>
+                          </a:solidFill>
+                        </a:defRPr>
+                      </a:pPr>
+                      <a:r>
+                        <a:t>Критический SLA (пилотируемый)</a:t>
+                      </a:r>
+                    </a:p>
+                  </a:txBody>
+                  <a:tcPr>
+                    <a:solidFill>
+                      <a:srgbClr val="FFFFFF"/>
+                    </a:solidFill>
+                  </a:tcPr>
+                </a:tc>
+                <a:tc>
+                  <a:txBody>
+                    <a:bodyPr/>
+                    <a:lstStyle/>
+                    <a:p>
+                      <a:pPr algn="ctr">
+                        <a:defRPr sz="950">
+                          <a:solidFill>
+                            <a:srgbClr val="0F172A"/>
+                          </a:solidFill>
+                        </a:defRPr>
+                      </a:pPr>
+                      <a:r>
+                        <a:t>100.0%</a:t>
+                      </a:r>
+                    </a:p>
+                  </a:txBody>
+                  <a:tcPr>
+                    <a:solidFill>
+                      <a:srgbClr val="FFFFFF"/>
+                    </a:solidFill>
+                  </a:tcPr>
+                </a:tc>
+                <a:tc>
+                  <a:txBody>
+                    <a:bodyPr/>
+                    <a:lstStyle/>
+                    <a:p>
+                      <a:pPr algn="ctr">
+                        <a:defRPr sz="950" b="1">
+                          <a:solidFill>
+                            <a:srgbClr val="10955D"/>
+                          </a:solidFill>
+                        </a:defRPr>
+                      </a:pPr>
+                      <a:r>
+                        <a:t>100.0%</a:t>
+                      </a:r>
+                    </a:p>
+                  </a:txBody>
+                  <a:tcPr>
+                    <a:solidFill>
+                      <a:srgbClr val="ECFDF5"/>
+                    </a:solidFill>
+                  </a:tcPr>
+                </a:tc>
+                <a:tc>
+                  <a:txBody>
+                    <a:bodyPr/>
+                    <a:lstStyle/>
+                    <a:p>
+                      <a:pPr algn="ctr">
+                        <a:defRPr sz="950">
+                          <a:solidFill>
+                            <a:srgbClr val="0F172A"/>
+                          </a:solidFill>
+                        </a:defRPr>
+                      </a:pPr>
+                      <a:r>
+                        <a:t>100.0%</a:t>
+                      </a:r>
+                    </a:p>
+                  </a:txBody>
+                  <a:tcPr>
+                    <a:solidFill>
+                      <a:srgbClr val="FFFFFF"/>
+                    </a:solidFill>
+                  </a:tcPr>
+                </a:tc>
+              </a:tr>
+              <a:tr h="411480">
+                <a:tc>
+                  <a:txBody>
+                    <a:bodyPr/>
+                    <a:lstStyle/>
+                    <a:p>
+                      <a:pPr algn="l">
+                        <a:defRPr sz="950">
+                          <a:solidFill>
+                            <a:srgbClr val="0F172A"/>
+                          </a:solidFill>
+                        </a:defRPr>
+                      </a:pPr>
+                      <a:r>
+                        <a:t>Совокупный SLA программы</a:t>
+                      </a:r>
+                    </a:p>
+                  </a:txBody>
+                  <a:tcPr>
+                    <a:solidFill>
+                      <a:srgbClr val="F8FAFC"/>
+                    </a:solidFill>
+                  </a:tcPr>
+                </a:tc>
+                <a:tc>
+                  <a:txBody>
+                    <a:bodyPr/>
+                    <a:lstStyle/>
+                    <a:p>
+                      <a:pPr algn="ctr">
+                        <a:defRPr sz="950">
+                          <a:solidFill>
+                            <a:srgbClr val="0F172A"/>
+                          </a:solidFill>
+                        </a:defRPr>
+                      </a:pPr>
+                      <a:r>
+                        <a:t>98.8%</a:t>
+                      </a:r>
+                    </a:p>
+                  </a:txBody>
+                  <a:tcPr>
+                    <a:solidFill>
+                      <a:srgbClr val="F8FAFC"/>
+                    </a:solidFill>
+                  </a:tcPr>
+                </a:tc>
+                <a:tc>
+                  <a:txBody>
+                    <a:bodyPr/>
+                    <a:lstStyle/>
+                    <a:p>
+                      <a:pPr algn="ctr">
+                        <a:defRPr sz="950" b="1">
+                          <a:solidFill>
+                            <a:srgbClr val="10955D"/>
+                          </a:solidFill>
+                        </a:defRPr>
+                      </a:pPr>
+                      <a:r>
+                        <a:t>99.8%</a:t>
+                      </a:r>
+                    </a:p>
+                  </a:txBody>
+                  <a:tcPr>
+                    <a:solidFill>
+                      <a:srgbClr val="ECFDF5"/>
+                    </a:solidFill>
+                  </a:tcPr>
+                </a:tc>
+                <a:tc>
+                  <a:txBody>
+                    <a:bodyPr/>
+                    <a:lstStyle/>
+                    <a:p>
+                      <a:pPr algn="ctr">
+                        <a:defRPr sz="950">
+                          <a:solidFill>
+                            <a:srgbClr val="0F172A"/>
+                          </a:solidFill>
+                        </a:defRPr>
+                      </a:pPr>
+                      <a:r>
+                        <a:t>99.5%</a:t>
+                      </a:r>
+                    </a:p>
+                  </a:txBody>
+                  <a:tcPr>
+                    <a:solidFill>
+                      <a:srgbClr val="F8FAFC"/>
+                    </a:solidFill>
+                  </a:tcPr>
+                </a:tc>
+              </a:tr>
+              <a:tr h="411480">
+                <a:tc>
+                  <a:txBody>
+                    <a:bodyPr/>
+                    <a:lstStyle/>
+                    <a:p>
+                      <a:pPr algn="l">
+                        <a:defRPr sz="950">
+                          <a:solidFill>
+                            <a:srgbClr val="0F172A"/>
+                          </a:solidFill>
+                        </a:defRPr>
+                      </a:pPr>
+                      <a:r>
+                        <a:t>Недисконтированный LCC (2035–2040)</a:t>
+                      </a:r>
+                    </a:p>
+                  </a:txBody>
+                  <a:tcPr>
+                    <a:solidFill>
+                      <a:srgbClr val="FFFFFF"/>
+                    </a:solidFill>
+                  </a:tcPr>
+                </a:tc>
+                <a:tc>
+                  <a:txBody>
+                    <a:bodyPr/>
+                    <a:lstStyle/>
+                    <a:p>
+                      <a:pPr algn="ctr">
+                        <a:defRPr sz="950">
+                          <a:solidFill>
+                            <a:srgbClr val="0F172A"/>
+                          </a:solidFill>
+                        </a:defRPr>
+                      </a:pPr>
+                      <a:r>
+                        <a:t>11 483.0 млн у.е.</a:t>
+                      </a:r>
+                    </a:p>
+                  </a:txBody>
+                  <a:tcPr>
+                    <a:solidFill>
+                      <a:srgbClr val="FFFFFF"/>
+                    </a:solidFill>
+                  </a:tcPr>
+                </a:tc>
+                <a:tc>
+                  <a:txBody>
+                    <a:bodyPr/>
+                    <a:lstStyle/>
+                    <a:p>
+                      <a:pPr algn="ctr">
+                        <a:defRPr sz="950" b="1">
+                          <a:solidFill>
+                            <a:srgbClr val="10955D"/>
+                          </a:solidFill>
+                        </a:defRPr>
+                      </a:pPr>
+                      <a:r>
+                        <a:t>10 112.4 млн у.е.</a:t>
+                      </a:r>
+                    </a:p>
+                  </a:txBody>
+                  <a:tcPr>
+                    <a:solidFill>
+                      <a:srgbClr val="ECFDF5"/>
+                    </a:solidFill>
+                  </a:tcPr>
+                </a:tc>
+                <a:tc>
+                  <a:txBody>
+                    <a:bodyPr/>
+                    <a:lstStyle/>
+                    <a:p>
+                      <a:pPr algn="ctr">
+                        <a:defRPr sz="950">
+                          <a:solidFill>
+                            <a:srgbClr val="0F172A"/>
+                          </a:solidFill>
+                        </a:defRPr>
+                      </a:pPr>
+                      <a:r>
+                        <a:t>11 950.0 млн у.е.</a:t>
+                      </a:r>
+                    </a:p>
+                  </a:txBody>
+                  <a:tcPr>
+                    <a:solidFill>
+                      <a:srgbClr val="FFFFFF"/>
+                    </a:solidFill>
+                  </a:tcPr>
+                </a:tc>
+              </a:tr>
+              <a:tr h="411480">
+                <a:tc>
+                  <a:txBody>
+                    <a:bodyPr/>
+                    <a:lstStyle/>
+                    <a:p>
+                      <a:pPr algn="l">
+                        <a:defRPr sz="950">
+                          <a:solidFill>
+                            <a:srgbClr val="0F172A"/>
+                          </a:solidFill>
+                        </a:defRPr>
+                      </a:pPr>
+                      <a:r>
+                        <a:t>Дисконтированный LCC (NPV r=8%)</a:t>
+                      </a:r>
+                    </a:p>
+                  </a:txBody>
+                  <a:tcPr>
+                    <a:solidFill>
+                      <a:srgbClr val="F8FAFC"/>
+                    </a:solidFill>
+                  </a:tcPr>
+                </a:tc>
+                <a:tc>
+                  <a:txBody>
+                    <a:bodyPr/>
+                    <a:lstStyle/>
+                    <a:p>
+                      <a:pPr algn="ctr">
+                        <a:defRPr sz="950">
+                          <a:solidFill>
+                            <a:srgbClr val="0F172A"/>
+                          </a:solidFill>
+                        </a:defRPr>
+                      </a:pPr>
+                      <a:r>
+                        <a:t>9 284.7 млн у.е.</a:t>
+                      </a:r>
+                    </a:p>
+                  </a:txBody>
+                  <a:tcPr>
+                    <a:solidFill>
+                      <a:srgbClr val="F8FAFC"/>
+                    </a:solidFill>
+                  </a:tcPr>
+                </a:tc>
+                <a:tc>
+                  <a:txBody>
+                    <a:bodyPr/>
+                    <a:lstStyle/>
+                    <a:p>
+                      <a:pPr algn="ctr">
+                        <a:defRPr sz="950" b="1">
+                          <a:solidFill>
+                            <a:srgbClr val="10955D"/>
+                          </a:solidFill>
+                        </a:defRPr>
+                      </a:pPr>
+                      <a:r>
+                        <a:t>8 187.9 млн у.е.</a:t>
+                      </a:r>
+                    </a:p>
+                  </a:txBody>
+                  <a:tcPr>
+                    <a:solidFill>
+                      <a:srgbClr val="ECFDF5"/>
+                    </a:solidFill>
+                  </a:tcPr>
+                </a:tc>
+                <a:tc>
+                  <a:txBody>
+                    <a:bodyPr/>
+                    <a:lstStyle/>
+                    <a:p>
+                      <a:pPr algn="ctr">
+                        <a:defRPr sz="950">
+                          <a:solidFill>
+                            <a:srgbClr val="0F172A"/>
+                          </a:solidFill>
+                        </a:defRPr>
+                      </a:pPr>
+                      <a:r>
+                        <a:t>9 540.0 млн у.е.</a:t>
+                      </a:r>
+                    </a:p>
+                  </a:txBody>
+                  <a:tcPr>
+                    <a:solidFill>
+                      <a:srgbClr val="F8FAFC"/>
+                    </a:solidFill>
+                  </a:tcPr>
+                </a:tc>
+              </a:tr>
+              <a:tr h="411480">
+                <a:tc>
+                  <a:txBody>
+                    <a:bodyPr/>
+                    <a:lstStyle/>
+                    <a:p>
+                      <a:pPr algn="l">
+                        <a:defRPr sz="950">
+                          <a:solidFill>
+                            <a:srgbClr val="0F172A"/>
+                          </a:solidFill>
+                        </a:defRPr>
+                      </a:pPr>
+                      <a:r>
+                        <a:t>Экономия бюджета (NPV дельта)</a:t>
+                      </a:r>
+                    </a:p>
+                  </a:txBody>
+                  <a:tcPr>
+                    <a:solidFill>
+                      <a:srgbClr val="FFFFFF"/>
+                    </a:solidFill>
+                  </a:tcPr>
+                </a:tc>
+                <a:tc>
+                  <a:txBody>
+                    <a:bodyPr/>
+                    <a:lstStyle/>
+                    <a:p>
+                      <a:pPr algn="ctr">
+                        <a:defRPr sz="950">
+                          <a:solidFill>
+                            <a:srgbClr val="0F172A"/>
+                          </a:solidFill>
+                        </a:defRPr>
+                      </a:pPr>
+                      <a:r>
+                        <a:t>0.0 млн (База)</a:t>
+                      </a:r>
+                    </a:p>
+                  </a:txBody>
+                  <a:tcPr>
+                    <a:solidFill>
+                      <a:srgbClr val="FFFFFF"/>
+                    </a:solidFill>
+                  </a:tcPr>
+                </a:tc>
+                <a:tc>
+                  <a:txBody>
+                    <a:bodyPr/>
+                    <a:lstStyle/>
+                    <a:p>
+                      <a:pPr algn="ctr">
+                        <a:defRPr sz="950" b="1">
+                          <a:solidFill>
+                            <a:srgbClr val="10955D"/>
+                          </a:solidFill>
+                        </a:defRPr>
+                      </a:pPr>
+                      <a:r>
+                        <a:t>-1 096.8 млн у.е. (-11.81%) ★</a:t>
+                      </a:r>
+                    </a:p>
+                  </a:txBody>
+                  <a:tcPr>
+                    <a:solidFill>
+                      <a:srgbClr val="ECFDF5"/>
+                    </a:solidFill>
+                  </a:tcPr>
+                </a:tc>
+                <a:tc>
+                  <a:txBody>
+                    <a:bodyPr/>
+                    <a:lstStyle/>
+                    <a:p>
+                      <a:pPr algn="ctr">
+                        <a:defRPr sz="950">
+                          <a:solidFill>
+                            <a:srgbClr val="0F172A"/>
+                          </a:solidFill>
+                        </a:defRPr>
+                      </a:pPr>
+                      <a:r>
+                        <a:t>+255.3 млн (+2.7% запас)</a:t>
+                      </a:r>
+                    </a:p>
+                  </a:txBody>
+                  <a:tcPr>
+                    <a:solidFill>
+                      <a:srgbClr val="FFFFFF"/>
+                    </a:solidFill>
+                  </a:tcPr>
+                </a:tc>
+              </a:tr>
+              <a:tr h="411480">
+                <a:tc>
+                  <a:txBody>
+                    <a:bodyPr/>
+                    <a:lstStyle/>
+                    <a:p>
+                      <a:pPr algn="l">
+                        <a:defRPr sz="950">
+                          <a:solidFill>
+                            <a:srgbClr val="0F172A"/>
+                          </a:solidFill>
+                        </a:defRPr>
+                      </a:pPr>
+                      <a:r>
+                        <a:t>Штрафы за недобор Take-or-Pay</a:t>
+                      </a:r>
+                    </a:p>
+                  </a:txBody>
+                  <a:tcPr>
+                    <a:solidFill>
+                      <a:srgbClr val="F8FAFC"/>
+                    </a:solidFill>
+                  </a:tcPr>
+                </a:tc>
+                <a:tc>
+                  <a:txBody>
+                    <a:bodyPr/>
+                    <a:lstStyle/>
+                    <a:p>
+                      <a:pPr algn="ctr">
+                        <a:defRPr sz="950">
+                          <a:solidFill>
+                            <a:srgbClr val="0F172A"/>
+                          </a:solidFill>
+                        </a:defRPr>
+                      </a:pPr>
+                      <a:r>
+                        <a:t>147.2 млн у.е.</a:t>
+                      </a:r>
+                    </a:p>
+                  </a:txBody>
+                  <a:tcPr>
+                    <a:solidFill>
+                      <a:srgbClr val="F8FAFC"/>
+                    </a:solidFill>
+                  </a:tcPr>
+                </a:tc>
+                <a:tc>
+                  <a:txBody>
+                    <a:bodyPr/>
+                    <a:lstStyle/>
+                    <a:p>
+                      <a:pPr algn="ctr">
+                        <a:defRPr sz="950" b="1">
+                          <a:solidFill>
+                            <a:srgbClr val="10955D"/>
+                          </a:solidFill>
+                        </a:defRPr>
+                      </a:pPr>
+                      <a:r>
+                        <a:t>0.0 млн у.е. (100% защита)</a:t>
+                      </a:r>
+                    </a:p>
+                  </a:txBody>
+                  <a:tcPr>
+                    <a:solidFill>
+                      <a:srgbClr val="ECFDF5"/>
+                    </a:solidFill>
+                  </a:tcPr>
+                </a:tc>
+                <a:tc>
+                  <a:txBody>
+                    <a:bodyPr/>
+                    <a:lstStyle/>
+                    <a:p>
+                      <a:pPr algn="ctr">
+                        <a:defRPr sz="950">
+                          <a:solidFill>
+                            <a:srgbClr val="0F172A"/>
+                          </a:solidFill>
+                        </a:defRPr>
+                      </a:pPr>
+                      <a:r>
+                        <a:t>0.0 млн у.е.</a:t>
+                      </a:r>
+                    </a:p>
+                  </a:txBody>
+                  <a:tcPr>
+                    <a:solidFill>
+                      <a:srgbClr val="F8FAFC"/>
+                    </a:solidFill>
+                  </a:tcPr>
+                </a:tc>
+              </a:tr>
+              <a:tr h="411480">
+                <a:tc>
+                  <a:txBody>
+                    <a:bodyPr/>
+                    <a:lstStyle/>
+                    <a:p>
+                      <a:pPr algn="l">
+                        <a:defRPr sz="950">
+                          <a:solidFill>
+                            <a:srgbClr val="0F172A"/>
+                          </a:solidFill>
+                        </a:defRPr>
+                      </a:pPr>
+                      <a:r>
+                        <a:t>Логика формирования заказов</a:t>
+                      </a:r>
+                    </a:p>
+                  </a:txBody>
+                  <a:tcPr>
+                    <a:solidFill>
+                      <a:srgbClr val="FFFFFF"/>
+                    </a:solidFill>
+                  </a:tcPr>
+                </a:tc>
+                <a:tc>
+                  <a:txBody>
+                    <a:bodyPr/>
+                    <a:lstStyle/>
+                    <a:p>
+                      <a:pPr algn="ctr">
+                        <a:defRPr sz="950">
+                          <a:solidFill>
+                            <a:srgbClr val="0F172A"/>
+                          </a:solidFill>
+                        </a:defRPr>
+                      </a:pPr>
+                      <a:r>
+                        <a:t>Фиксированные квоты ТЗ</a:t>
+                      </a:r>
+                    </a:p>
+                  </a:txBody>
+                  <a:tcPr>
+                    <a:solidFill>
+                      <a:srgbClr val="FFFFFF"/>
+                    </a:solidFill>
+                  </a:tcPr>
+                </a:tc>
+                <a:tc>
+                  <a:txBody>
+                    <a:bodyPr/>
+                    <a:lstStyle/>
+                    <a:p>
+                      <a:pPr algn="ctr">
+                        <a:defRPr sz="950" b="1">
+                          <a:solidFill>
+                            <a:srgbClr val="10955D"/>
+                          </a:solidFill>
+                        </a:defRPr>
+                      </a:pPr>
+                      <a:r>
+                        <a:t>MILP оптимизация потоков</a:t>
+                      </a:r>
+                    </a:p>
+                  </a:txBody>
+                  <a:tcPr>
+                    <a:solidFill>
+                      <a:srgbClr val="ECFDF5"/>
+                    </a:solidFill>
+                  </a:tcPr>
+                </a:tc>
+                <a:tc>
+                  <a:txBody>
+                    <a:bodyPr/>
+                    <a:lstStyle/>
+                    <a:p>
+                      <a:pPr algn="ctr">
+                        <a:defRPr sz="950">
+                          <a:solidFill>
+                            <a:srgbClr val="0F172A"/>
+                          </a:solidFill>
+                        </a:defRPr>
+                      </a:pPr>
+                      <a:r>
+                        <a:t>Худший сценарий (буфер 60 дн)</a:t>
+                      </a:r>
+                    </a:p>
+                  </a:txBody>
+                  <a:tcPr>
+                    <a:solidFill>
+                      <a:srgbClr val="FFFFFF"/>
+                    </a:solidFill>
+                  </a:tcPr>
+                </a:tc>
+              </a:tr>
+            </a:tbl>
+          </a:graphicData>
+        </a:graphic>
+      </p:graphicFrame>
+      <p:sp>
+        <p:nvSpPr>
+          <p:cNvPr id="15" name="TextBox 14"/>
+          <p:cNvSpPr txBox="1"/>
+          <p:nvPr/>
+        </p:nvSpPr>
+        <p:spPr>
+          <a:xfrm>
+            <a:off x="731520" y="6217920"/>
+            <a:ext cx="10725912" cy="365760"/>
+          </a:xfrm>
+          <a:prstGeom prst="rect">
+            <a:avLst/>
+          </a:prstGeom>
+          <a:noFill/>
+        </p:spPr>
+        <p:txBody>
+          <a:bodyPr wrap="none">
+            <a:spAutoFit/>
+          </a:bodyPr>
+          <a:lstStyle/>
+          <a:p>
+            <a:pPr>
+              <a:defRPr sz="1000" b="1">
+                <a:solidFill>
+                  <a:srgbClr val="0F172A"/>
+                </a:solidFill>
+              </a:defRPr>
+            </a:pPr>
+            <a:r>
+              <a:t>💡 Вывод: Ядро NASA MILP превосходит базовый регламент по всем параметрам, высвобождая более 1.09 млрд у.е. при нулевом риске.</a:t>
             </a:r>
           </a:p>
         </p:txBody>
@@ -5009,7 +7300,7 @@
             <a:avLst/>
           </a:prstGeom>
           <a:solidFill>
-            <a:srgbClr val="050507"/>
+            <a:srgbClr val="F8FAFC"/>
           </a:solidFill>
           <a:ln>
             <a:noFill/>
@@ -5045,8 +7336,8 @@
         </p:nvSpPr>
         <p:spPr>
           <a:xfrm>
-            <a:off x="731520" y="457200"/>
-            <a:ext cx="9144000" cy="1005840"/>
+            <a:off x="731520" y="365760"/>
+            <a:ext cx="9326880" cy="1005840"/>
           </a:xfrm>
           <a:prstGeom prst="rect">
             <a:avLst/>
@@ -5062,24 +7353,24 @@
             <a:pPr>
               <a:defRPr sz="1000" b="1">
                 <a:solidFill>
-                  <a:srgbClr val="CCFF00"/>
-                </a:solidFill>
-              </a:defRPr>
-            </a:pPr>
-            <a:r>
-              <a:t>&lt;СЛАЙД 05 // ИННОВАЦИЯ И ВАУ-ЭФФЕКТ&gt;</a:t>
-            </a:r>
-          </a:p>
-          <a:p>
-            <a:pPr>
-              <a:defRPr sz="2200" b="1">
-                <a:solidFill>
-                  <a:srgbClr val="FFFFFF"/>
-                </a:solidFill>
-              </a:defRPr>
-            </a:pPr>
-            <a:r>
-              <a:t>МУЛЬТИ-ЯДЕРНАЯ ОПТИМИЗАЦИЯ // NASA SPACE LOGISTICS</a:t>
+                  <a:srgbClr val="0284C7"/>
+                </a:solidFill>
+              </a:defRPr>
+            </a:pPr>
+            <a:r>
+              <a:t>СЛАЙД 5 // ОПЕРАЦИОННЫЙ КОНТУР</a:t>
+            </a:r>
+          </a:p>
+          <a:p>
+            <a:pPr>
+              <a:defRPr sz="2100" b="1">
+                <a:solidFill>
+                  <a:srgbClr val="0F172A"/>
+                </a:solidFill>
+              </a:defRPr>
+            </a:pPr>
+            <a:r>
+              <a:t>Интерфейс ситуационного центра и план демонстрации</a:t>
             </a:r>
           </a:p>
         </p:txBody>
@@ -5092,18 +7383,18 @@
         </p:nvSpPr>
         <p:spPr>
           <a:xfrm>
-            <a:off x="10058400" y="502920"/>
-            <a:ext cx="1371600" cy="365760"/>
+            <a:off x="10149840" y="411480"/>
+            <a:ext cx="1280160" cy="384048"/>
           </a:xfrm>
           <a:prstGeom prst="roundRect">
             <a:avLst/>
           </a:prstGeom>
           <a:solidFill>
-            <a:srgbClr val="18181C"/>
+            <a:srgbClr val="F1F5F9"/>
           </a:solidFill>
-          <a:ln>
+          <a:ln w="12700">
             <a:solidFill>
-              <a:srgbClr val="23232A"/>
+              <a:srgbClr val="CBD5E1"/>
             </a:solidFill>
           </a:ln>
         </p:spPr>
@@ -5126,14 +7417,14 @@
           <a:lstStyle/>
           <a:p>
             <a:pPr algn="ctr">
-              <a:defRPr sz="1100" b="1">
-                <a:solidFill>
-                  <a:srgbClr val="A1A1AA"/>
-                </a:solidFill>
-              </a:defRPr>
-            </a:pPr>
-            <a:r>
-              <a:t>2:45 — 3:20</a:t>
+              <a:defRPr sz="1000" b="1">
+                <a:solidFill>
+                  <a:srgbClr val="334155"/>
+                </a:solidFill>
+              </a:defRPr>
+            </a:pPr>
+            <a:r>
+              <a:t>⏱ 2:30 — 3:05</a:t>
             </a:r>
           </a:p>
         </p:txBody>
@@ -5146,18 +7437,18 @@
         </p:nvSpPr>
         <p:spPr>
           <a:xfrm>
-            <a:off x="731520" y="1645920"/>
-            <a:ext cx="5120640" cy="4389120"/>
+            <a:off x="731520" y="1508760"/>
+            <a:ext cx="5120640" cy="4846320"/>
           </a:xfrm>
           <a:prstGeom prst="roundRect">
             <a:avLst/>
           </a:prstGeom>
           <a:solidFill>
-            <a:srgbClr val="0F0F14"/>
+            <a:srgbClr val="FFFFFF"/>
           </a:solidFill>
-          <a:ln w="12700">
+          <a:ln w="19050">
             <a:solidFill>
-              <a:srgbClr val="CCFF00"/>
+              <a:srgbClr val="E2E8F0"/>
             </a:solidFill>
           </a:ln>
         </p:spPr>
@@ -5185,14 +7476,57 @@
       </p:sp>
       <p:sp>
         <p:nvSpPr>
-          <p:cNvPr id="6" name="TextBox 5"/>
+          <p:cNvPr id="6" name="Rounded Rectangle 5"/>
+          <p:cNvSpPr/>
+          <p:nvPr/>
+        </p:nvSpPr>
+        <p:spPr>
+          <a:xfrm>
+            <a:off x="731520" y="1508760"/>
+            <a:ext cx="5120640" cy="73152"/>
+          </a:xfrm>
+          <a:prstGeom prst="roundRect">
+            <a:avLst/>
+          </a:prstGeom>
+          <a:solidFill>
+            <a:srgbClr val="0284C7"/>
+          </a:solidFill>
+          <a:ln>
+            <a:noFill/>
+          </a:ln>
+        </p:spPr>
+        <p:style>
+          <a:lnRef idx="1">
+            <a:schemeClr val="accent1"/>
+          </a:lnRef>
+          <a:fillRef idx="3">
+            <a:schemeClr val="accent1"/>
+          </a:fillRef>
+          <a:effectRef idx="2">
+            <a:schemeClr val="accent1"/>
+          </a:effectRef>
+          <a:fontRef idx="minor">
+            <a:schemeClr val="lt1"/>
+          </a:fontRef>
+        </p:style>
+        <p:txBody>
+          <a:bodyPr rtlCol="0" anchor="ctr"/>
+          <a:lstStyle/>
+          <a:p>
+            <a:pPr algn="ctr"/>
+          </a:p>
+        </p:txBody>
+      </p:sp>
+      <p:sp>
+        <p:nvSpPr>
+          <p:cNvPr id="7" name="TextBox 6"/>
           <p:cNvSpPr txBox="1"/>
           <p:nvPr/>
         </p:nvSpPr>
         <p:spPr>
           <a:xfrm>
-            <a:off x="1005840" y="1828800"/>
-            <a:ext cx="4572000" cy="4023360"/>
+            <a:off x="1005840" y="1691640"/>
+            <a:ext cx="4572000" cy="4480560"/>
           </a:xfrm>
           <a:prstGeom prst="rect">
             <a:avLst/>
@@ -5200,7 +7534,7 @@
           <a:noFill/>
         </p:spPr>
         <p:txBody>
-          <a:bodyPr wrap="square">
+          <a:bodyPr wrap="square" lIns="0" tIns="0" rIns="0" bIns="0">
             <a:spAutoFit/>
           </a:bodyPr>
           <a:lstStyle/>
@@ -5208,83 +7542,186 @@
             <a:pPr>
               <a:defRPr sz="1300" b="1">
                 <a:solidFill>
-                  <a:srgbClr val="CCFF00"/>
-                </a:solidFill>
-              </a:defRPr>
-            </a:pPr>
-            <a:r>
-              <a:t>🚀 NASA SPACE LOGISTICS (MILP) ★ ЦЕЛЕВОЕ ЯДРО</a:t>
-            </a:r>
-          </a:p>
-          <a:p>
-            <a:br/>
-            <a:pPr>
-              <a:defRPr sz="2200" b="1">
-                <a:solidFill>
-                  <a:srgbClr val="CCFF00"/>
-                </a:solidFill>
-              </a:defRPr>
-            </a:pPr>
-            <a:r>
-              <a:t>ЭКОНОМИЯ: -11.81% NPV LCC</a:t>
-            </a:r>
-          </a:p>
-          <a:p>
-            <a:br/>
-            <a:pPr>
-              <a:defRPr sz="1100">
-                <a:solidFill>
-                  <a:srgbClr val="FFFFFF"/>
-                </a:solidFill>
-              </a:defRPr>
-            </a:pPr>
-            <a:r>
-              <a:t>Снижение бюджета программы на 1 096.8 млн у.е. при сохранении 100% надежности!</a:t>
-            </a:r>
-            <a:br/>
-            <a:br/>
-            <a:r>
-              <a:t>• Методология: MIT / NASA Glenn (AIAA Space Logistics Framework).</a:t>
-            </a:r>
-            <a:br/>
-            <a:r>
-              <a:t>• Целочисленное линейное программирование (MILP).</a:t>
-            </a:r>
-            <a:br/>
-            <a:r>
-              <a:t>• Обнуление Take-or-Pay: объем заказа строго равен бронированию.</a:t>
-            </a:r>
-            <a:br/>
-            <a:r>
-              <a:t>• Максимизация лунного топлива: забор 120 т/год по 3.0 млн у.е./т.</a:t>
-            </a:r>
-            <a:br/>
-            <a:r>
-              <a:t>• Минимизация расходов на хранение (0.72 млн/т·год).</a:t>
-            </a:r>
-          </a:p>
-        </p:txBody>
-      </p:sp>
-      <p:sp>
-        <p:nvSpPr>
-          <p:cNvPr id="7" name="Rounded Rectangle 6"/>
+                  <a:srgbClr val="0369A1"/>
+                </a:solidFill>
+              </a:defRPr>
+            </a:pPr>
+            <a:r>
+              <a:t>🖥️ Функционал веб-приложения оператора</a:t>
+            </a:r>
+          </a:p>
+          <a:p>
+            <a:pPr>
+              <a:spcBef>
+                <a:spcPts val="500"/>
+              </a:spcBef>
+              <a:defRPr sz="1100" b="1">
+                <a:solidFill>
+                  <a:srgbClr val="0F172A"/>
+                </a:solidFill>
+              </a:defRPr>
+            </a:pPr>
+            <a:r>
+              <a:t>• Селектор алгоритмов:</a:t>
+            </a:r>
+          </a:p>
+          <a:p>
+            <a:pPr>
+              <a:spcAft>
+                <a:spcPts val="200"/>
+              </a:spcAft>
+              <a:defRPr sz="1000">
+                <a:solidFill>
+                  <a:srgbClr val="334155"/>
+                </a:solidFill>
+              </a:defRPr>
+            </a:pPr>
+            <a:r>
+              <a:t>   Переключение между Регламентом, NASA MILP и Минимаксом с динамическим пересчетом за ~200 мс.</a:t>
+            </a:r>
+          </a:p>
+          <a:p>
+            <a:pPr>
+              <a:spcBef>
+                <a:spcPts val="500"/>
+              </a:spcBef>
+              <a:defRPr sz="1100" b="1">
+                <a:solidFill>
+                  <a:srgbClr val="0F172A"/>
+                </a:solidFill>
+              </a:defRPr>
+            </a:pPr>
+            <a:r>
+              <a:t>• Светофор 10 ограничений ТЗ:</a:t>
+            </a:r>
+          </a:p>
+          <a:p>
+            <a:pPr>
+              <a:spcAft>
+                <a:spcPts val="200"/>
+              </a:spcAft>
+              <a:defRPr sz="1000">
+                <a:solidFill>
+                  <a:srgbClr val="334155"/>
+                </a:solidFill>
+              </a:defRPr>
+            </a:pPr>
+            <a:r>
+              <a:t>   Мгновенные алерты SLA &gt;= 99%, лимитов CAPEX 1800/2800 млн, емкости баков 120 т и 45-дневного буфера.</a:t>
+            </a:r>
+          </a:p>
+          <a:p>
+            <a:pPr>
+              <a:spcBef>
+                <a:spcPts val="500"/>
+              </a:spcBef>
+              <a:defRPr sz="1100" b="1">
+                <a:solidFill>
+                  <a:srgbClr val="0F172A"/>
+                </a:solidFill>
+              </a:defRPr>
+            </a:pPr>
+            <a:r>
+              <a:t>• Слайдеры отбора и бронирования:</a:t>
+            </a:r>
+          </a:p>
+          <a:p>
+            <a:pPr>
+              <a:spcAft>
+                <a:spcPts val="200"/>
+              </a:spcAft>
+              <a:defRPr sz="1000">
+                <a:solidFill>
+                  <a:srgbClr val="334155"/>
+                </a:solidFill>
+              </a:defRPr>
+            </a:pPr>
+            <a:r>
+              <a:t>   Интерактивное управление 5 каналами с динамическим контролем порога Take-or-Pay 70%.</a:t>
+            </a:r>
+          </a:p>
+          <a:p>
+            <a:pPr>
+              <a:spcBef>
+                <a:spcPts val="500"/>
+              </a:spcBef>
+              <a:defRPr sz="1100" b="1">
+                <a:solidFill>
+                  <a:srgbClr val="0F172A"/>
+                </a:solidFill>
+              </a:defRPr>
+            </a:pPr>
+            <a:r>
+              <a:t>• 4 Интерактивных графика Recharts:</a:t>
+            </a:r>
+          </a:p>
+          <a:p>
+            <a:pPr>
+              <a:spcAft>
+                <a:spcPts val="200"/>
+              </a:spcAft>
+              <a:defRPr sz="1000">
+                <a:solidFill>
+                  <a:srgbClr val="334155"/>
+                </a:solidFill>
+              </a:defRPr>
+            </a:pPr>
+            <a:r>
+              <a:t>   Траектория остатка в баке, структура LCC, материальный баланс и дельта стресс-теста.</a:t>
+            </a:r>
+          </a:p>
+          <a:p>
+            <a:pPr>
+              <a:spcBef>
+                <a:spcPts val="500"/>
+              </a:spcBef>
+              <a:defRPr sz="1100" b="1">
+                <a:solidFill>
+                  <a:srgbClr val="0F172A"/>
+                </a:solidFill>
+              </a:defRPr>
+            </a:pPr>
+            <a:r>
+              <a:t>• Экспорт аудиторского отчета:</a:t>
+            </a:r>
+          </a:p>
+          <a:p>
+            <a:pPr>
+              <a:spcAft>
+                <a:spcPts val="200"/>
+              </a:spcAft>
+              <a:defRPr sz="1000">
+                <a:solidFill>
+                  <a:srgbClr val="334155"/>
+                </a:solidFill>
+              </a:defRPr>
+            </a:pPr>
+            <a:r>
+              <a:t>   Скачивание полной книги XLSX на 7 листов с формулами и единицами измерения в 1 клик.</a:t>
+            </a:r>
+          </a:p>
+        </p:txBody>
+      </p:sp>
+      <p:sp>
+        <p:nvSpPr>
+          <p:cNvPr id="8" name="Rounded Rectangle 7"/>
           <p:cNvSpPr/>
           <p:nvPr/>
         </p:nvSpPr>
         <p:spPr>
           <a:xfrm>
-            <a:off x="6217920" y="1645920"/>
-            <a:ext cx="5212080" cy="4389120"/>
+            <a:off x="6217920" y="1508760"/>
+            <a:ext cx="5212080" cy="4846320"/>
           </a:xfrm>
           <a:prstGeom prst="roundRect">
             <a:avLst/>
           </a:prstGeom>
           <a:solidFill>
-            <a:srgbClr val="0F0F14"/>
+            <a:srgbClr val="FFFFFF"/>
           </a:solidFill>
-          <a:ln w="12700">
+          <a:ln w="19050">
             <a:solidFill>
-              <a:srgbClr val="23232A"/>
+              <a:srgbClr val="E2E8F0"/>
             </a:solidFill>
           </a:ln>
         </p:spPr>
@@ -5312,14 +7749,57 @@
       </p:sp>
       <p:sp>
         <p:nvSpPr>
-          <p:cNvPr id="8" name="TextBox 7"/>
+          <p:cNvPr id="9" name="Rounded Rectangle 8"/>
+          <p:cNvSpPr/>
+          <p:nvPr/>
+        </p:nvSpPr>
+        <p:spPr>
+          <a:xfrm>
+            <a:off x="6217920" y="1508760"/>
+            <a:ext cx="5212080" cy="73152"/>
+          </a:xfrm>
+          <a:prstGeom prst="roundRect">
+            <a:avLst/>
+          </a:prstGeom>
+          <a:solidFill>
+            <a:srgbClr val="10955D"/>
+          </a:solidFill>
+          <a:ln>
+            <a:noFill/>
+          </a:ln>
+        </p:spPr>
+        <p:style>
+          <a:lnRef idx="1">
+            <a:schemeClr val="accent1"/>
+          </a:lnRef>
+          <a:fillRef idx="3">
+            <a:schemeClr val="accent1"/>
+          </a:fillRef>
+          <a:effectRef idx="2">
+            <a:schemeClr val="accent1"/>
+          </a:effectRef>
+          <a:fontRef idx="minor">
+            <a:schemeClr val="lt1"/>
+          </a:fontRef>
+        </p:style>
+        <p:txBody>
+          <a:bodyPr rtlCol="0" anchor="ctr"/>
+          <a:lstStyle/>
+          <a:p>
+            <a:pPr algn="ctr"/>
+          </a:p>
+        </p:txBody>
+      </p:sp>
+      <p:sp>
+        <p:nvSpPr>
+          <p:cNvPr id="10" name="TextBox 9"/>
           <p:cNvSpPr txBox="1"/>
           <p:nvPr/>
         </p:nvSpPr>
         <p:spPr>
           <a:xfrm>
-            <a:off x="6492240" y="1828800"/>
-            <a:ext cx="4663440" cy="4023360"/>
+            <a:off x="6492240" y="1691640"/>
+            <a:ext cx="4663440" cy="4480560"/>
           </a:xfrm>
           <a:prstGeom prst="rect">
             <a:avLst/>
@@ -5327,7 +7807,7 @@
           <a:noFill/>
         </p:spPr>
         <p:txBody>
-          <a:bodyPr wrap="square">
+          <a:bodyPr wrap="square" lIns="0" tIns="0" rIns="0" bIns="0">
             <a:spAutoFit/>
           </a:bodyPr>
           <a:lstStyle/>
@@ -5335,98 +7815,162 @@
             <a:pPr>
               <a:defRPr sz="1300" b="1">
                 <a:solidFill>
-                  <a:srgbClr val="CCFF00"/>
-                </a:solidFill>
-              </a:defRPr>
-            </a:pPr>
-            <a:r>
-              <a:t>📊 СРАВНЕНИЕ МАТЕМАТИЧЕСКИХ АЛГОРИТМОВ</a:t>
-            </a:r>
-          </a:p>
-          <a:p>
-            <a:br/>
-            <a:pPr>
+                  <a:srgbClr val="10955D"/>
+                </a:solidFill>
+              </a:defRPr>
+            </a:pPr>
+            <a:r>
+              <a:t>⚡ План показа живой системы на стенде</a:t>
+            </a:r>
+          </a:p>
+          <a:p>
+            <a:pPr>
+              <a:spcBef>
+                <a:spcPts val="600"/>
+              </a:spcBef>
               <a:defRPr sz="1100" b="1">
                 <a:solidFill>
-                  <a:srgbClr val="FFFFFF"/>
-                </a:solidFill>
-              </a:defRPr>
-            </a:pPr>
-            <a:r>
-              <a:t>Метрика                  Регламент ТЗ   NASA MILP      Minimax</a:t>
-            </a:r>
-          </a:p>
-          <a:p>
-            <a:pPr>
+                  <a:srgbClr val="0F172A"/>
+                </a:solidFill>
+              </a:defRPr>
+            </a:pPr>
+            <a:r>
+              <a:t>Шаг 1: Базовый режим NASA MILP</a:t>
+            </a:r>
+          </a:p>
+          <a:p>
+            <a:pPr>
+              <a:spcAft>
+                <a:spcPts val="200"/>
+              </a:spcAft>
               <a:defRPr sz="1000">
                 <a:solidFill>
-                  <a:srgbClr val="A1A1AA"/>
-                </a:solidFill>
-              </a:defRPr>
-            </a:pPr>
-            <a:r>
-              <a:t>Критический SLA          100.0%         100.0%         100.0%</a:t>
-            </a:r>
-          </a:p>
-          <a:p>
-            <a:pPr>
+                  <a:srgbClr val="334155"/>
+                </a:solidFill>
+              </a:defRPr>
+            </a:pPr>
+            <a:r>
+              <a:t>Демонстрация нулевых штрафов Take-or-Pay, NPV 8.188 млрд у.е. и зеленого статуса всех 10 лимитов.</a:t>
+            </a:r>
+          </a:p>
+          <a:p>
+            <a:pPr>
+              <a:spcBef>
+                <a:spcPts val="600"/>
+              </a:spcBef>
+              <a:defRPr sz="1100" b="1">
+                <a:solidFill>
+                  <a:srgbClr val="0F172A"/>
+                </a:solidFill>
+              </a:defRPr>
+            </a:pPr>
+            <a:r>
+              <a:t>Шаг 2: Сравнение с ТЗ Регламентом</a:t>
+            </a:r>
+          </a:p>
+          <a:p>
+            <a:pPr>
+              <a:spcAft>
+                <a:spcPts val="200"/>
+              </a:spcAft>
               <a:defRPr sz="1000">
                 <a:solidFill>
-                  <a:srgbClr val="A1A1AA"/>
-                </a:solidFill>
-              </a:defRPr>
-            </a:pPr>
-            <a:r>
-              <a:t>Общий SLA                98.8%          99.8%          99.5%</a:t>
-            </a:r>
-          </a:p>
-          <a:p>
-            <a:pPr>
+                  <a:srgbClr val="334155"/>
+                </a:solidFill>
+              </a:defRPr>
+            </a:pPr>
+            <a:r>
+              <a:t>Включение ядра 'ТЗ Регламент': визуализация падения эффективности на 1.096 млрд у.е. из-за неоптимального отбора.</a:t>
+            </a:r>
+          </a:p>
+          <a:p>
+            <a:pPr>
+              <a:spcBef>
+                <a:spcPts val="600"/>
+              </a:spcBef>
+              <a:defRPr sz="1100" b="1">
+                <a:solidFill>
+                  <a:srgbClr val="0F172A"/>
+                </a:solidFill>
+              </a:defRPr>
+            </a:pPr>
+            <a:r>
+              <a:t>Шаг 3: Активация стресс-теста ТЗ</a:t>
+            </a:r>
+          </a:p>
+          <a:p>
+            <a:pPr>
+              <a:spcAft>
+                <a:spcPts val="200"/>
+              </a:spcAft>
               <a:defRPr sz="1000">
                 <a:solidFill>
-                  <a:srgbClr val="A1A1AA"/>
-                </a:solidFill>
-              </a:defRPr>
-            </a:pPr>
-            <a:r>
-              <a:t>Недисконтированный LCC   11 483 млн     10 112 млн     11 950 млн</a:t>
-            </a:r>
-          </a:p>
-          <a:p>
-            <a:pPr>
+                  <a:srgbClr val="334155"/>
+                </a:solidFill>
+              </a:defRPr>
+            </a:pPr>
+            <a:r>
+              <a:t>Нажатие кнопки 'Обязательный стресс-тест': рост спроса +15%, срез ISRU, подтверждение потерь 1.2% (норма &lt;= 2.0%).</a:t>
+            </a:r>
+          </a:p>
+          <a:p>
+            <a:pPr>
+              <a:spcBef>
+                <a:spcPts val="600"/>
+              </a:spcBef>
+              <a:defRPr sz="1100" b="1">
+                <a:solidFill>
+                  <a:srgbClr val="0F172A"/>
+                </a:solidFill>
+              </a:defRPr>
+            </a:pPr>
+            <a:r>
+              <a:t>Шаг 4: Тест отказа ZBO</a:t>
+            </a:r>
+          </a:p>
+          <a:p>
+            <a:pPr>
+              <a:spcAft>
+                <a:spcPts val="200"/>
+              </a:spcAft>
               <a:defRPr sz="1000">
                 <a:solidFill>
-                  <a:srgbClr val="A1A1AA"/>
-                </a:solidFill>
-              </a:defRPr>
-            </a:pPr>
-            <a:r>
-              <a:t>NPV LCC (r=8%)           9 284.7 млн    8 187.9 млн    9 540 млн</a:t>
-            </a:r>
-          </a:p>
-          <a:p>
-            <a:pPr>
+                  <a:srgbClr val="334155"/>
+                </a:solidFill>
+              </a:defRPr>
+            </a:pPr>
+            <a:r>
+              <a:t>Отключение ZBO: демонстрация мгновенного срабатывания красного алерта нарушения емкости и потерь.</a:t>
+            </a:r>
+          </a:p>
+          <a:p>
+            <a:pPr>
+              <a:spcBef>
+                <a:spcPts val="600"/>
+              </a:spcBef>
+              <a:defRPr sz="1100" b="1">
+                <a:solidFill>
+                  <a:srgbClr val="0F172A"/>
+                </a:solidFill>
+              </a:defRPr>
+            </a:pPr>
+            <a:r>
+              <a:t>Шаг 5: Экспорт в Excel</a:t>
+            </a:r>
+          </a:p>
+          <a:p>
+            <a:pPr>
+              <a:spcAft>
+                <a:spcPts val="200"/>
+              </a:spcAft>
               <a:defRPr sz="1000">
                 <a:solidFill>
-                  <a:srgbClr val="CCFF00"/>
-                </a:solidFill>
-              </a:defRPr>
-            </a:pPr>
-            <a:r>
-              <a:t>Экономия бюджета         База (0%)      -11.81% (1.09 млрд) ★ +2.7% запас</a:t>
-            </a:r>
-          </a:p>
-          <a:p>
-            <a:br/>
-            <a:pPr>
-              <a:defRPr sz="1100">
-                <a:solidFill>
-                  <a:srgbClr val="FFFFFF"/>
-                </a:solidFill>
-              </a:defRPr>
-            </a:pPr>
-            <a:r>
-              <a:t>Вывод: Алгоритм NASA MILP признан целевым ядром для минимизации затрат программы.</a:t>
+                  <a:srgbClr val="334155"/>
+                </a:solidFill>
+              </a:defRPr>
+            </a:pPr>
+            <a:r>
+              <a:t>Генерация официальной отчетности для руководства за 1 секунду.</a:t>
             </a:r>
           </a:p>
         </p:txBody>
@@ -5464,7 +8008,7 @@
             <a:avLst/>
           </a:prstGeom>
           <a:solidFill>
-            <a:srgbClr val="050507"/>
+            <a:srgbClr val="F8FAFC"/>
           </a:solidFill>
           <a:ln>
             <a:noFill/>
@@ -5500,8 +8044,8 @@
         </p:nvSpPr>
         <p:spPr>
           <a:xfrm>
-            <a:off x="731520" y="457200"/>
-            <a:ext cx="9144000" cy="1005840"/>
+            <a:off x="731520" y="365760"/>
+            <a:ext cx="9326880" cy="1005840"/>
           </a:xfrm>
           <a:prstGeom prst="rect">
             <a:avLst/>
@@ -5517,24 +8061,24 @@
             <a:pPr>
               <a:defRPr sz="1000" b="1">
                 <a:solidFill>
-                  <a:srgbClr val="CCFF00"/>
-                </a:solidFill>
-              </a:defRPr>
-            </a:pPr>
-            <a:r>
-              <a:t>&lt;СЛАЙД 06 // СТРЕСС-ТЕСТЫ И РИСКИ&gt;</a:t>
-            </a:r>
-          </a:p>
-          <a:p>
-            <a:pPr>
-              <a:defRPr sz="2200" b="1">
-                <a:solidFill>
-                  <a:srgbClr val="FFFFFF"/>
-                </a:solidFill>
-              </a:defRPr>
-            </a:pPr>
-            <a:r>
-              <a:t>СТРЕСС-ТЕСТИРОВАНИЕ И МАТРИЦА РИСКОВ</a:t>
+                  <a:srgbClr val="0284C7"/>
+                </a:solidFill>
+              </a:defRPr>
+            </a:pPr>
+            <a:r>
+              <a:t>СЛАЙД 6 // НАДЕЖНОСТЬ И РИСК-МЕНЕДЖМЕНТ</a:t>
+            </a:r>
+          </a:p>
+          <a:p>
+            <a:pPr>
+              <a:defRPr sz="2100" b="1">
+                <a:solidFill>
+                  <a:srgbClr val="0F172A"/>
+                </a:solidFill>
+              </a:defRPr>
+            </a:pPr>
+            <a:r>
+              <a:t>Стресс-тестирование и матрица парирования рисков</a:t>
             </a:r>
           </a:p>
         </p:txBody>
@@ -5547,18 +8091,18 @@
         </p:nvSpPr>
         <p:spPr>
           <a:xfrm>
-            <a:off x="10058400" y="502920"/>
-            <a:ext cx="1371600" cy="365760"/>
+            <a:off x="10149840" y="411480"/>
+            <a:ext cx="1280160" cy="384048"/>
           </a:xfrm>
           <a:prstGeom prst="roundRect">
             <a:avLst/>
           </a:prstGeom>
           <a:solidFill>
-            <a:srgbClr val="18181C"/>
+            <a:srgbClr val="F1F5F9"/>
           </a:solidFill>
-          <a:ln>
+          <a:ln w="12700">
             <a:solidFill>
-              <a:srgbClr val="23232A"/>
+              <a:srgbClr val="CBD5E1"/>
             </a:solidFill>
           </a:ln>
         </p:spPr>
@@ -5581,14 +8125,14 @@
           <a:lstStyle/>
           <a:p>
             <a:pPr algn="ctr">
-              <a:defRPr sz="1100" b="1">
-                <a:solidFill>
-                  <a:srgbClr val="A1A1AA"/>
-                </a:solidFill>
-              </a:defRPr>
-            </a:pPr>
-            <a:r>
-              <a:t>3:20 — 3:45</a:t>
+              <a:defRPr sz="1000" b="1">
+                <a:solidFill>
+                  <a:srgbClr val="334155"/>
+                </a:solidFill>
+              </a:defRPr>
+            </a:pPr>
+            <a:r>
+              <a:t>⏱ 3:05 — 3:45</a:t>
             </a:r>
           </a:p>
         </p:txBody>
@@ -5601,18 +8145,18 @@
         </p:nvSpPr>
         <p:spPr>
           <a:xfrm>
-            <a:off x="731520" y="1645920"/>
-            <a:ext cx="5120640" cy="4389120"/>
+            <a:off x="731520" y="1508760"/>
+            <a:ext cx="10725912" cy="2011680"/>
           </a:xfrm>
           <a:prstGeom prst="roundRect">
             <a:avLst/>
           </a:prstGeom>
           <a:solidFill>
-            <a:srgbClr val="0F0F14"/>
+            <a:srgbClr val="FFFFFF"/>
           </a:solidFill>
-          <a:ln w="12700">
+          <a:ln w="19050">
             <a:solidFill>
-              <a:srgbClr val="CCFF00"/>
+              <a:srgbClr val="E2E8F0"/>
             </a:solidFill>
           </a:ln>
         </p:spPr>
@@ -5640,14 +8184,57 @@
       </p:sp>
       <p:sp>
         <p:nvSpPr>
-          <p:cNvPr id="6" name="TextBox 5"/>
+          <p:cNvPr id="6" name="Rounded Rectangle 5"/>
+          <p:cNvSpPr/>
+          <p:nvPr/>
+        </p:nvSpPr>
+        <p:spPr>
+          <a:xfrm>
+            <a:off x="731520" y="1508760"/>
+            <a:ext cx="10725912" cy="73152"/>
+          </a:xfrm>
+          <a:prstGeom prst="roundRect">
+            <a:avLst/>
+          </a:prstGeom>
+          <a:solidFill>
+            <a:srgbClr val="B45309"/>
+          </a:solidFill>
+          <a:ln>
+            <a:noFill/>
+          </a:ln>
+        </p:spPr>
+        <p:style>
+          <a:lnRef idx="1">
+            <a:schemeClr val="accent1"/>
+          </a:lnRef>
+          <a:fillRef idx="3">
+            <a:schemeClr val="accent1"/>
+          </a:fillRef>
+          <a:effectRef idx="2">
+            <a:schemeClr val="accent1"/>
+          </a:effectRef>
+          <a:fontRef idx="minor">
+            <a:schemeClr val="lt1"/>
+          </a:fontRef>
+        </p:style>
+        <p:txBody>
+          <a:bodyPr rtlCol="0" anchor="ctr"/>
+          <a:lstStyle/>
+          <a:p>
+            <a:pPr algn="ctr"/>
+          </a:p>
+        </p:txBody>
+      </p:sp>
+      <p:sp>
+        <p:nvSpPr>
+          <p:cNvPr id="7" name="TextBox 6"/>
           <p:cNvSpPr txBox="1"/>
           <p:nvPr/>
         </p:nvSpPr>
         <p:spPr>
           <a:xfrm>
-            <a:off x="1005840" y="1828800"/>
-            <a:ext cx="4572000" cy="4023360"/>
+            <a:off x="1005840" y="1645920"/>
+            <a:ext cx="10149840" cy="1737360"/>
           </a:xfrm>
           <a:prstGeom prst="rect">
             <a:avLst/>
@@ -5655,7 +8242,7 @@
           <a:noFill/>
         </p:spPr>
         <p:txBody>
-          <a:bodyPr wrap="square">
+          <a:bodyPr wrap="square" lIns="0" tIns="0" rIns="0" bIns="0">
             <a:spAutoFit/>
           </a:bodyPr>
           <a:lstStyle/>
@@ -5663,101 +8250,67 @@
             <a:pPr>
               <a:defRPr sz="1300" b="1">
                 <a:solidFill>
-                  <a:srgbClr val="CCFF00"/>
-                </a:solidFill>
-              </a:defRPr>
-            </a:pPr>
-            <a:r>
-              <a:t>⚡ ОБЯЗАТЕЛЬНЫЙ СТРЕСС-ТЕСТ ТЗ</a:t>
-            </a:r>
-          </a:p>
-          <a:p>
+                  <a:srgbClr val="B45309"/>
+                </a:solidFill>
+              </a:defRPr>
+            </a:pPr>
+            <a:r>
+              <a:t>⚡ Результаты Обязательного стресс-теста ТЗ (2038–2040 гг.)</a:t>
+            </a:r>
+          </a:p>
+          <a:p>
+            <a:pPr>
+              <a:spcBef>
+                <a:spcPts val="400"/>
+              </a:spcBef>
+              <a:defRPr sz="1050">
+                <a:solidFill>
+                  <a:srgbClr val="334155"/>
+                </a:solidFill>
+              </a:defRPr>
+            </a:pPr>
+            <a:r>
+              <a:t>Параметры шока: Спрос +15% (38–40 гг.), тарифы Земли +25% (38–39 гг.), срез лунного ISRU до 55% и 75%.</a:t>
+            </a:r>
             <a:br/>
-            <a:pPr>
-              <a:defRPr sz="1100">
-                <a:solidFill>
-                  <a:srgbClr val="FFFFFF"/>
-                </a:solidFill>
-              </a:defRPr>
-            </a:pPr>
-            <a:r>
-              <a:t>• Шоки спроса и цен: Спрос +15% (2038–2040), тарифы Earth-Core и Flex +25% (2038–2039), ISRU срезан до 55%/75%.</a:t>
-            </a:r>
-          </a:p>
-          <a:p>
+            <a:r>
+              <a:t>• Потери Throughput: 1.2% — строго выдержан норматив ТЗ (&lt;= 2.0%) благодаря модернизации ZBO.</a:t>
+            </a:r>
             <a:br/>
-            <a:pPr>
-              <a:defRPr sz="1100">
-                <a:solidFill>
-                  <a:srgbClr val="FFFFFF"/>
-                </a:solidFill>
-              </a:defRPr>
-            </a:pPr>
-            <a:r>
-              <a:t>• Потери оборота: Фактические потери 1.2% (благодаря ZBO строго выдержан норматив &lt;= 2.0%).</a:t>
-            </a:r>
-          </a:p>
-          <a:p>
+            <a:r>
+              <a:t>• Критический SLA: 100.0% — дефицит пилотируемых миссий равен строго 0.0 тонн на всем горизонте.</a:t>
+            </a:r>
             <a:br/>
-            <a:pPr>
-              <a:defRPr sz="1100">
-                <a:solidFill>
-                  <a:srgbClr val="FFFFFF"/>
-                </a:solidFill>
-              </a:defRPr>
-            </a:pPr>
-            <a:r>
-              <a:t>• Критический SLA: 100.0% — дефицит пилотируемых миссий равен строго 0.0 тонн.</a:t>
-            </a:r>
-          </a:p>
-          <a:p>
+            <a:r>
+              <a:t>• Совокупный SLA: 97.4% — директивный норматив ТЗ (&gt;= 97.0%) полностью соблюден.</a:t>
+            </a:r>
             <a:br/>
-            <a:pPr>
-              <a:defRPr sz="1100">
-                <a:solidFill>
-                  <a:srgbClr val="FFFFFF"/>
-                </a:solidFill>
-              </a:defRPr>
-            </a:pPr>
-            <a:r>
-              <a:t>• Совокупный SLA: 97.4% — директивный норматив &gt;= 97.0% соблюден.</a:t>
-            </a:r>
-          </a:p>
-          <a:p>
-            <a:br/>
-            <a:pPr>
-              <a:defRPr sz="1100">
-                <a:solidFill>
-                  <a:srgbClr val="FFFFFF"/>
-                </a:solidFill>
-              </a:defRPr>
-            </a:pPr>
-            <a:r>
-              <a:t>• Бонус: Геополитика (+5): Модуль парирования санкций и скачка тарифов Земли до +50%.</a:t>
-            </a:r>
-          </a:p>
-        </p:txBody>
-      </p:sp>
-      <p:sp>
-        <p:nvSpPr>
-          <p:cNvPr id="7" name="Rounded Rectangle 6"/>
+            <a:r>
+              <a:t>• Бонусный геополитический контур: модуль выдерживает санкционный скачок земных тарифов до +50%.</a:t>
+            </a:r>
+          </a:p>
+        </p:txBody>
+      </p:sp>
+      <p:sp>
+        <p:nvSpPr>
+          <p:cNvPr id="8" name="Rounded Rectangle 7"/>
           <p:cNvSpPr/>
           <p:nvPr/>
         </p:nvSpPr>
         <p:spPr>
           <a:xfrm>
-            <a:off x="6217920" y="1645920"/>
-            <a:ext cx="5212080" cy="4389120"/>
+            <a:off x="731520" y="3703320"/>
+            <a:ext cx="10725912" cy="2651760"/>
           </a:xfrm>
           <a:prstGeom prst="roundRect">
             <a:avLst/>
           </a:prstGeom>
           <a:solidFill>
-            <a:srgbClr val="0F0F14"/>
+            <a:srgbClr val="FFFFFF"/>
           </a:solidFill>
-          <a:ln w="12700">
+          <a:ln w="19050">
             <a:solidFill>
-              <a:srgbClr val="23232A"/>
+              <a:srgbClr val="E2E8F0"/>
             </a:solidFill>
           </a:ln>
         </p:spPr>
@@ -5785,113 +8338,429 @@
       </p:sp>
       <p:sp>
         <p:nvSpPr>
-          <p:cNvPr id="8" name="TextBox 7"/>
-          <p:cNvSpPr txBox="1"/>
+          <p:cNvPr id="9" name="Rounded Rectangle 8"/>
+          <p:cNvSpPr/>
           <p:nvPr/>
         </p:nvSpPr>
         <p:spPr>
           <a:xfrm>
-            <a:off x="6492240" y="1828800"/>
-            <a:ext cx="4663440" cy="4023360"/>
+            <a:off x="731520" y="3703320"/>
+            <a:ext cx="10725912" cy="73152"/>
           </a:xfrm>
-          <a:prstGeom prst="rect">
+          <a:prstGeom prst="roundRect">
             <a:avLst/>
           </a:prstGeom>
-          <a:noFill/>
+          <a:solidFill>
+            <a:srgbClr val="0284C7"/>
+          </a:solidFill>
+          <a:ln>
+            <a:noFill/>
+          </a:ln>
         </p:spPr>
-        <p:txBody>
-          <a:bodyPr wrap="square">
-            <a:spAutoFit/>
-          </a:bodyPr>
-          <a:lstStyle/>
-          <a:p>
-            <a:pPr>
-              <a:defRPr sz="1300" b="1">
-                <a:solidFill>
-                  <a:srgbClr val="CCFF00"/>
-                </a:solidFill>
-              </a:defRPr>
-            </a:pPr>
-            <a:r>
-              <a:t>🌪️ TORNADO-АНАЛИЗ ЧУВСТВИТЕЛЬНОСТИ</a:t>
-            </a:r>
-          </a:p>
-          <a:p>
-            <a:br/>
-            <a:pPr>
-              <a:defRPr sz="1100" b="1">
-                <a:solidFill>
-                  <a:srgbClr val="FFFFFF"/>
-                </a:solidFill>
-              </a:defRPr>
-            </a:pPr>
-            <a:r>
-              <a:t>Фактор риска               Ущерб               Мера защиты</a:t>
-            </a:r>
-          </a:p>
-          <a:p>
-            <a:pPr>
-              <a:defRPr sz="1000">
-                <a:solidFill>
-                  <a:srgbClr val="A1A1AA"/>
-                </a:solidFill>
-              </a:defRPr>
-            </a:pPr>
-            <a:r>
-              <a:t>Задержка ввода ISRU на 2 года +850 млн у.е. LCC  Шлюз 03 (Опцион Earth-New)</a:t>
-            </a:r>
-          </a:p>
-          <a:p>
-            <a:pPr>
-              <a:defRPr sz="1000">
-                <a:solidFill>
-                  <a:srgbClr val="A1A1AA"/>
-                </a:solidFill>
-              </a:defRPr>
-            </a:pPr>
-            <a:r>
-              <a:t>Штрафы Take-or-Pay         до 120 млн/год     NASA MILP: Order = Reserved</a:t>
-            </a:r>
-          </a:p>
-          <a:p>
-            <a:pPr>
-              <a:defRPr sz="1000">
-                <a:solidFill>
-                  <a:srgbClr val="A1A1AA"/>
-                </a:solidFill>
-              </a:defRPr>
-            </a:pPr>
-            <a:r>
-              <a:t>Рост цен земных пусков +25% +435 млн у.е. LCC  Максимизация лунного топлива</a:t>
-            </a:r>
-          </a:p>
-          <a:p>
-            <a:pPr>
-              <a:defRPr sz="1000">
-                <a:solidFill>
-                  <a:srgbClr val="A1A1AA"/>
-                </a:solidFill>
-              </a:defRPr>
-            </a:pPr>
-            <a:r>
-              <a:t>Пиковый рост спроса свыше +20% Риск дефицита      Буфер 120 т + Emergency 80 т</a:t>
-            </a:r>
-          </a:p>
-          <a:p>
-            <a:br/>
-            <a:pPr>
-              <a:defRPr sz="1100">
-                <a:solidFill>
-                  <a:srgbClr val="FFFFFF"/>
-                </a:solidFill>
-              </a:defRPr>
-            </a:pPr>
-            <a:r>
-              <a:t>Вывод: Все критические риски имеют встроенные в систему инженерные контрмеры.</a:t>
-            </a:r>
-          </a:p>
-        </p:txBody>
-      </p:sp>
+        <p:style>
+          <a:lnRef idx="1">
+            <a:schemeClr val="accent1"/>
+          </a:lnRef>
+          <a:fillRef idx="3">
+            <a:schemeClr val="accent1"/>
+          </a:fillRef>
+          <a:effectRef idx="2">
+            <a:schemeClr val="accent1"/>
+          </a:effectRef>
+          <a:fontRef idx="minor">
+            <a:schemeClr val="lt1"/>
+          </a:fontRef>
+        </p:style>
+        <p:txBody>
+          <a:bodyPr rtlCol="0" anchor="ctr"/>
+          <a:lstStyle/>
+          <a:p>
+            <a:pPr algn="ctr"/>
+          </a:p>
+        </p:txBody>
+      </p:sp>
+      <p:graphicFrame>
+        <p:nvGraphicFramePr>
+          <p:cNvPr id="10" name="Table 9"/>
+          <p:cNvGraphicFramePr>
+            <a:graphicFrameLocks noGrp="1"/>
+          </p:cNvGraphicFramePr>
+          <p:nvPr/>
+        </p:nvGraphicFramePr>
+        <p:xfrm>
+          <a:off x="914400" y="3886200"/>
+          <a:ext cx="10360152" cy="2286000"/>
+        </p:xfrm>
+        <a:graphic>
+          <a:graphicData uri="http://schemas.openxmlformats.org/drawingml/2006/table">
+            <a:tbl>
+              <a:tblPr firstRow="1" bandRow="1">
+                <a:tableStyleId>{5C22544A-7EE6-4342-B048-85BDC9FD1C3A}</a:tableStyleId>
+              </a:tblPr>
+              <a:tblGrid>
+                <a:gridCol w="3291840"/>
+                <a:gridCol w="2468880"/>
+                <a:gridCol w="4599432"/>
+              </a:tblGrid>
+              <a:tr h="457200">
+                <a:tc>
+                  <a:txBody>
+                    <a:bodyPr/>
+                    <a:lstStyle/>
+                    <a:p>
+                      <a:pPr algn="l">
+                        <a:defRPr sz="1000" b="1">
+                          <a:solidFill>
+                            <a:srgbClr val="FFFFFF"/>
+                          </a:solidFill>
+                        </a:defRPr>
+                      </a:pPr>
+                      <a:r>
+                        <a:t>Фактор неопределенности</a:t>
+                      </a:r>
+                    </a:p>
+                  </a:txBody>
+                  <a:tcPr>
+                    <a:solidFill>
+                      <a:srgbClr val="1E293B"/>
+                    </a:solidFill>
+                  </a:tcPr>
+                </a:tc>
+                <a:tc>
+                  <a:txBody>
+                    <a:bodyPr/>
+                    <a:lstStyle/>
+                    <a:p>
+                      <a:pPr algn="ctr">
+                        <a:defRPr sz="1000" b="1">
+                          <a:solidFill>
+                            <a:srgbClr val="FFFFFF"/>
+                          </a:solidFill>
+                        </a:defRPr>
+                      </a:pPr>
+                      <a:r>
+                        <a:t>Потенциальный ущерб</a:t>
+                      </a:r>
+                    </a:p>
+                  </a:txBody>
+                  <a:tcPr>
+                    <a:solidFill>
+                      <a:srgbClr val="1E293B"/>
+                    </a:solidFill>
+                  </a:tcPr>
+                </a:tc>
+                <a:tc>
+                  <a:txBody>
+                    <a:bodyPr/>
+                    <a:lstStyle/>
+                    <a:p>
+                      <a:pPr algn="l">
+                        <a:defRPr sz="1000" b="1">
+                          <a:solidFill>
+                            <a:srgbClr val="FFFFFF"/>
+                          </a:solidFill>
+                        </a:defRPr>
+                      </a:pPr>
+                      <a:r>
+                        <a:t>Инженерная мера парирования в системе</a:t>
+                      </a:r>
+                    </a:p>
+                  </a:txBody>
+                  <a:tcPr>
+                    <a:solidFill>
+                      <a:srgbClr val="1E293B"/>
+                    </a:solidFill>
+                  </a:tcPr>
+                </a:tc>
+              </a:tr>
+              <a:tr h="457200">
+                <a:tc>
+                  <a:txBody>
+                    <a:bodyPr/>
+                    <a:lstStyle/>
+                    <a:p>
+                      <a:pPr algn="l">
+                        <a:defRPr sz="950">
+                          <a:solidFill>
+                            <a:srgbClr val="0F172A"/>
+                          </a:solidFill>
+                        </a:defRPr>
+                      </a:pPr>
+                      <a:r>
+                        <a:t>Задержка ввода ISRU на 2 года</a:t>
+                      </a:r>
+                    </a:p>
+                  </a:txBody>
+                  <a:tcPr>
+                    <a:solidFill>
+                      <a:srgbClr val="FFFFFF"/>
+                    </a:solidFill>
+                  </a:tcPr>
+                </a:tc>
+                <a:tc>
+                  <a:txBody>
+                    <a:bodyPr/>
+                    <a:lstStyle/>
+                    <a:p>
+                      <a:pPr algn="ctr">
+                        <a:defRPr sz="950" b="1">
+                          <a:solidFill>
+                            <a:srgbClr val="B45309"/>
+                          </a:solidFill>
+                        </a:defRPr>
+                      </a:pPr>
+                      <a:r>
+                        <a:t>+850 млн у.е. LCC</a:t>
+                      </a:r>
+                    </a:p>
+                  </a:txBody>
+                  <a:tcPr>
+                    <a:solidFill>
+                      <a:srgbClr val="FFFFFF"/>
+                    </a:solidFill>
+                  </a:tcPr>
+                </a:tc>
+                <a:tc>
+                  <a:txBody>
+                    <a:bodyPr/>
+                    <a:lstStyle/>
+                    <a:p>
+                      <a:pPr algn="l">
+                        <a:defRPr sz="950">
+                          <a:solidFill>
+                            <a:srgbClr val="0F172A"/>
+                          </a:solidFill>
+                        </a:defRPr>
+                      </a:pPr>
+                      <a:r>
+                        <a:t>Шлюз 03: Активация резервного опциона Earth-New (130 т/год).</a:t>
+                      </a:r>
+                    </a:p>
+                  </a:txBody>
+                  <a:tcPr>
+                    <a:solidFill>
+                      <a:srgbClr val="FFFFFF"/>
+                    </a:solidFill>
+                  </a:tcPr>
+                </a:tc>
+              </a:tr>
+              <a:tr h="457200">
+                <a:tc>
+                  <a:txBody>
+                    <a:bodyPr/>
+                    <a:lstStyle/>
+                    <a:p>
+                      <a:pPr algn="l">
+                        <a:defRPr sz="950">
+                          <a:solidFill>
+                            <a:srgbClr val="0F172A"/>
+                          </a:solidFill>
+                        </a:defRPr>
+                      </a:pPr>
+                      <a:r>
+                        <a:t>Штрафы Take-or-Pay за недобор</a:t>
+                      </a:r>
+                    </a:p>
+                  </a:txBody>
+                  <a:tcPr>
+                    <a:solidFill>
+                      <a:srgbClr val="F8FAFC"/>
+                    </a:solidFill>
+                  </a:tcPr>
+                </a:tc>
+                <a:tc>
+                  <a:txBody>
+                    <a:bodyPr/>
+                    <a:lstStyle/>
+                    <a:p>
+                      <a:pPr algn="ctr">
+                        <a:defRPr sz="950" b="1">
+                          <a:solidFill>
+                            <a:srgbClr val="B45309"/>
+                          </a:solidFill>
+                        </a:defRPr>
+                      </a:pPr>
+                      <a:r>
+                        <a:t>до 120 млн у.е./год</a:t>
+                      </a:r>
+                    </a:p>
+                  </a:txBody>
+                  <a:tcPr>
+                    <a:solidFill>
+                      <a:srgbClr val="F8FAFC"/>
+                    </a:solidFill>
+                  </a:tcPr>
+                </a:tc>
+                <a:tc>
+                  <a:txBody>
+                    <a:bodyPr/>
+                    <a:lstStyle/>
+                    <a:p>
+                      <a:pPr algn="l">
+                        <a:defRPr sz="950">
+                          <a:solidFill>
+                            <a:srgbClr val="0F172A"/>
+                          </a:solidFill>
+                        </a:defRPr>
+                      </a:pPr>
+                      <a:r>
+                        <a:t>Алгоритм NASA MILP: Объем заказа строго равен бронированию (0 штрафов).</a:t>
+                      </a:r>
+                    </a:p>
+                  </a:txBody>
+                  <a:tcPr>
+                    <a:solidFill>
+                      <a:srgbClr val="F8FAFC"/>
+                    </a:solidFill>
+                  </a:tcPr>
+                </a:tc>
+              </a:tr>
+              <a:tr h="457200">
+                <a:tc>
+                  <a:txBody>
+                    <a:bodyPr/>
+                    <a:lstStyle/>
+                    <a:p>
+                      <a:pPr algn="l">
+                        <a:defRPr sz="950">
+                          <a:solidFill>
+                            <a:srgbClr val="0F172A"/>
+                          </a:solidFill>
+                        </a:defRPr>
+                      </a:pPr>
+                      <a:r>
+                        <a:t>Рост цен пусков Земли на +25%</a:t>
+                      </a:r>
+                    </a:p>
+                  </a:txBody>
+                  <a:tcPr>
+                    <a:solidFill>
+                      <a:srgbClr val="FFFFFF"/>
+                    </a:solidFill>
+                  </a:tcPr>
+                </a:tc>
+                <a:tc>
+                  <a:txBody>
+                    <a:bodyPr/>
+                    <a:lstStyle/>
+                    <a:p>
+                      <a:pPr algn="ctr">
+                        <a:defRPr sz="950" b="1">
+                          <a:solidFill>
+                            <a:srgbClr val="B45309"/>
+                          </a:solidFill>
+                        </a:defRPr>
+                      </a:pPr>
+                      <a:r>
+                        <a:t>+435 млн у.е. LCC</a:t>
+                      </a:r>
+                    </a:p>
+                  </a:txBody>
+                  <a:tcPr>
+                    <a:solidFill>
+                      <a:srgbClr val="FFFFFF"/>
+                    </a:solidFill>
+                  </a:tcPr>
+                </a:tc>
+                <a:tc>
+                  <a:txBody>
+                    <a:bodyPr/>
+                    <a:lstStyle/>
+                    <a:p>
+                      <a:pPr algn="l">
+                        <a:defRPr sz="950">
+                          <a:solidFill>
+                            <a:srgbClr val="0F172A"/>
+                          </a:solidFill>
+                        </a:defRPr>
+                      </a:pPr>
+                      <a:r>
+                        <a:t>Приоритетный отбор лунного топлива (до 120 т/год по себестоимости 3.0).</a:t>
+                      </a:r>
+                    </a:p>
+                  </a:txBody>
+                  <a:tcPr>
+                    <a:solidFill>
+                      <a:srgbClr val="FFFFFF"/>
+                    </a:solidFill>
+                  </a:tcPr>
+                </a:tc>
+              </a:tr>
+              <a:tr h="457200">
+                <a:tc>
+                  <a:txBody>
+                    <a:bodyPr/>
+                    <a:lstStyle/>
+                    <a:p>
+                      <a:pPr algn="l">
+                        <a:defRPr sz="950">
+                          <a:solidFill>
+                            <a:srgbClr val="0F172A"/>
+                          </a:solidFill>
+                        </a:defRPr>
+                      </a:pPr>
+                      <a:r>
+                        <a:t>Аномальный пик спроса (&gt; +20%)</a:t>
+                      </a:r>
+                    </a:p>
+                  </a:txBody>
+                  <a:tcPr>
+                    <a:solidFill>
+                      <a:srgbClr val="F8FAFC"/>
+                    </a:solidFill>
+                  </a:tcPr>
+                </a:tc>
+                <a:tc>
+                  <a:txBody>
+                    <a:bodyPr/>
+                    <a:lstStyle/>
+                    <a:p>
+                      <a:pPr algn="ctr">
+                        <a:defRPr sz="950" b="1">
+                          <a:solidFill>
+                            <a:srgbClr val="B45309"/>
+                          </a:solidFill>
+                        </a:defRPr>
+                      </a:pPr>
+                      <a:r>
+                        <a:t>Риск дефицита топлива</a:t>
+                      </a:r>
+                    </a:p>
+                  </a:txBody>
+                  <a:tcPr>
+                    <a:solidFill>
+                      <a:srgbClr val="F8FAFC"/>
+                    </a:solidFill>
+                  </a:tcPr>
+                </a:tc>
+                <a:tc>
+                  <a:txBody>
+                    <a:bodyPr/>
+                    <a:lstStyle/>
+                    <a:p>
+                      <a:pPr algn="l">
+                        <a:defRPr sz="950">
+                          <a:solidFill>
+                            <a:srgbClr val="0F172A"/>
+                          </a:solidFill>
+                        </a:defRPr>
+                      </a:pPr>
+                      <a:r>
+                        <a:t>Экспресс-доставка Earth-Flex + неснижаемый Emergency-резерв 80 т.</a:t>
+                      </a:r>
+                    </a:p>
+                  </a:txBody>
+                  <a:tcPr>
+                    <a:solidFill>
+                      <a:srgbClr val="F8FAFC"/>
+                    </a:solidFill>
+                  </a:tcPr>
+                </a:tc>
+              </a:tr>
+            </a:tbl>
+          </a:graphicData>
+        </a:graphic>
+      </p:graphicFrame>
     </p:spTree>
   </p:cSld>
   <p:clrMapOvr>
@@ -5925,7 +8794,7 @@
             <a:avLst/>
           </a:prstGeom>
           <a:solidFill>
-            <a:srgbClr val="050507"/>
+            <a:srgbClr val="F8FAFC"/>
           </a:solidFill>
           <a:ln>
             <a:noFill/>
@@ -5961,8 +8830,8 @@
         </p:nvSpPr>
         <p:spPr>
           <a:xfrm>
-            <a:off x="731520" y="457200"/>
-            <a:ext cx="9144000" cy="1005840"/>
+            <a:off x="731520" y="365760"/>
+            <a:ext cx="9326880" cy="1005840"/>
           </a:xfrm>
           <a:prstGeom prst="rect">
             <a:avLst/>
@@ -5978,24 +8847,24 @@
             <a:pPr>
               <a:defRPr sz="1000" b="1">
                 <a:solidFill>
-                  <a:srgbClr val="CCFF00"/>
-                </a:solidFill>
-              </a:defRPr>
-            </a:pPr>
-            <a:r>
-              <a:t>&lt;СЛАЙД 07 // ИТОГИ И РЕШЕНИЯ&gt;</a:t>
-            </a:r>
-          </a:p>
-          <a:p>
-            <a:pPr>
-              <a:defRPr sz="2200" b="1">
-                <a:solidFill>
-                  <a:srgbClr val="FFFFFF"/>
-                </a:solidFill>
-              </a:defRPr>
-            </a:pPr>
-            <a:r>
-              <a:t>ИТОГИ ПРОГРАММЫ И ПРОЕКТ РЕШЕНИЙ</a:t>
+                  <a:srgbClr val="0284C7"/>
+                </a:solidFill>
+              </a:defRPr>
+            </a:pPr>
+            <a:r>
+              <a:t>СЛАЙД 7 // ИТОГИ И РЕШЕНИЯ</a:t>
+            </a:r>
+          </a:p>
+          <a:p>
+            <a:pPr>
+              <a:defRPr sz="2100" b="1">
+                <a:solidFill>
+                  <a:srgbClr val="0F172A"/>
+                </a:solidFill>
+              </a:defRPr>
+            </a:pPr>
+            <a:r>
+              <a:t>Результаты выполнения кейса и проект решений</a:t>
             </a:r>
           </a:p>
         </p:txBody>
@@ -6008,18 +8877,18 @@
         </p:nvSpPr>
         <p:spPr>
           <a:xfrm>
-            <a:off x="10058400" y="502920"/>
-            <a:ext cx="1371600" cy="365760"/>
+            <a:off x="10149840" y="411480"/>
+            <a:ext cx="1280160" cy="384048"/>
           </a:xfrm>
           <a:prstGeom prst="roundRect">
             <a:avLst/>
           </a:prstGeom>
           <a:solidFill>
-            <a:srgbClr val="18181C"/>
+            <a:srgbClr val="F1F5F9"/>
           </a:solidFill>
-          <a:ln>
+          <a:ln w="12700">
             <a:solidFill>
-              <a:srgbClr val="23232A"/>
+              <a:srgbClr val="CBD5E1"/>
             </a:solidFill>
           </a:ln>
         </p:spPr>
@@ -6042,14 +8911,14 @@
           <a:lstStyle/>
           <a:p>
             <a:pPr algn="ctr">
-              <a:defRPr sz="1100" b="1">
-                <a:solidFill>
-                  <a:srgbClr val="A1A1AA"/>
-                </a:solidFill>
-              </a:defRPr>
-            </a:pPr>
-            <a:r>
-              <a:t>3:45 — 4:00</a:t>
+              <a:defRPr sz="1000" b="1">
+                <a:solidFill>
+                  <a:srgbClr val="334155"/>
+                </a:solidFill>
+              </a:defRPr>
+            </a:pPr>
+            <a:r>
+              <a:t>⏱ 3:45 — 4:00</a:t>
             </a:r>
           </a:p>
         </p:txBody>
@@ -6062,18 +8931,18 @@
         </p:nvSpPr>
         <p:spPr>
           <a:xfrm>
-            <a:off x="731520" y="1645920"/>
-            <a:ext cx="5120640" cy="4389120"/>
+            <a:off x="731520" y="1508760"/>
+            <a:ext cx="5120640" cy="4846320"/>
           </a:xfrm>
           <a:prstGeom prst="roundRect">
             <a:avLst/>
           </a:prstGeom>
           <a:solidFill>
-            <a:srgbClr val="0F0F14"/>
+            <a:srgbClr val="FFFFFF"/>
           </a:solidFill>
-          <a:ln w="12700">
+          <a:ln w="19050">
             <a:solidFill>
-              <a:srgbClr val="CCFF00"/>
+              <a:srgbClr val="E2E8F0"/>
             </a:solidFill>
           </a:ln>
         </p:spPr>
@@ -6101,14 +8970,57 @@
       </p:sp>
       <p:sp>
         <p:nvSpPr>
-          <p:cNvPr id="6" name="TextBox 5"/>
+          <p:cNvPr id="6" name="Rounded Rectangle 5"/>
+          <p:cNvSpPr/>
+          <p:nvPr/>
+        </p:nvSpPr>
+        <p:spPr>
+          <a:xfrm>
+            <a:off x="731520" y="1508760"/>
+            <a:ext cx="5120640" cy="73152"/>
+          </a:xfrm>
+          <a:prstGeom prst="roundRect">
+            <a:avLst/>
+          </a:prstGeom>
+          <a:solidFill>
+            <a:srgbClr val="10955D"/>
+          </a:solidFill>
+          <a:ln>
+            <a:noFill/>
+          </a:ln>
+        </p:spPr>
+        <p:style>
+          <a:lnRef idx="1">
+            <a:schemeClr val="accent1"/>
+          </a:lnRef>
+          <a:fillRef idx="3">
+            <a:schemeClr val="accent1"/>
+          </a:fillRef>
+          <a:effectRef idx="2">
+            <a:schemeClr val="accent1"/>
+          </a:effectRef>
+          <a:fontRef idx="minor">
+            <a:schemeClr val="lt1"/>
+          </a:fontRef>
+        </p:style>
+        <p:txBody>
+          <a:bodyPr rtlCol="0" anchor="ctr"/>
+          <a:lstStyle/>
+          <a:p>
+            <a:pPr algn="ctr"/>
+          </a:p>
+        </p:txBody>
+      </p:sp>
+      <p:sp>
+        <p:nvSpPr>
+          <p:cNvPr id="7" name="TextBox 6"/>
           <p:cNvSpPr txBox="1"/>
           <p:nvPr/>
         </p:nvSpPr>
         <p:spPr>
           <a:xfrm>
-            <a:off x="1005840" y="1828800"/>
-            <a:ext cx="4572000" cy="4023360"/>
+            <a:off x="1005840" y="1691640"/>
+            <a:ext cx="4572000" cy="4480560"/>
           </a:xfrm>
           <a:prstGeom prst="rect">
             <a:avLst/>
@@ -6116,7 +9028,7 @@
           <a:noFill/>
         </p:spPr>
         <p:txBody>
-          <a:bodyPr wrap="square">
+          <a:bodyPr wrap="square" lIns="0" tIns="0" rIns="0" bIns="0">
             <a:spAutoFit/>
           </a:bodyPr>
           <a:lstStyle/>
@@ -6124,114 +9036,186 @@
             <a:pPr>
               <a:defRPr sz="1300" b="1">
                 <a:solidFill>
-                  <a:srgbClr val="CCFF00"/>
-                </a:solidFill>
-              </a:defRPr>
-            </a:pPr>
-            <a:r>
-              <a:t>🏆 РЕЗУЛЬТАТЫ ВЫПОЛНЕНИЯ КЕЙСА</a:t>
-            </a:r>
-          </a:p>
-          <a:p>
-            <a:br/>
-            <a:pPr>
-              <a:defRPr sz="1100">
-                <a:solidFill>
-                  <a:srgbClr val="FFFFFF"/>
-                </a:solidFill>
-              </a:defRPr>
-            </a:pPr>
-            <a:r>
-              <a:t>✓ Все 20 критериев ТЗ выполнены на 100% + реализован бонус за геополитику.</a:t>
-            </a:r>
-          </a:p>
-          <a:p>
-            <a:br/>
-            <a:pPr>
-              <a:defRPr sz="1100">
-                <a:solidFill>
-                  <a:srgbClr val="FFFFFF"/>
-                </a:solidFill>
-              </a:defRPr>
-            </a:pPr>
-            <a:r>
-              <a:t>✓ Сходимость контрольного примера 2035 г. с точностью до 4 знаков (10^-4 т).</a:t>
-            </a:r>
-          </a:p>
-          <a:p>
-            <a:br/>
-            <a:pPr>
-              <a:defRPr sz="1100">
-                <a:solidFill>
-                  <a:srgbClr val="FFFFFF"/>
-                </a:solidFill>
-              </a:defRPr>
-            </a:pPr>
-            <a:r>
-              <a:t>✓ Доказанная экономия 1 096.8 млн у.е. NPV LCC при алгоритме NASA MILP.</a:t>
-            </a:r>
-          </a:p>
-          <a:p>
-            <a:br/>
-            <a:pPr>
-              <a:defRPr sz="1100">
-                <a:solidFill>
-                  <a:srgbClr val="FFFFFF"/>
-                </a:solidFill>
-              </a:defRPr>
-            </a:pPr>
-            <a:r>
-              <a:t>✓ Соблюдение директивы CAPEX с запасом 370 млн у.е. до 2037 года.</a:t>
-            </a:r>
-          </a:p>
-          <a:p>
-            <a:br/>
-            <a:pPr>
-              <a:defRPr sz="1100">
-                <a:solidFill>
-                  <a:srgbClr val="FFFFFF"/>
-                </a:solidFill>
-              </a:defRPr>
-            </a:pPr>
-            <a:r>
-              <a:t>✓ Масштабируемость до 2045 года и динамический ввод Канала F без изменения ядра.</a:t>
-            </a:r>
-          </a:p>
-          <a:p>
-            <a:br/>
-            <a:pPr>
-              <a:defRPr sz="1100">
-                <a:solidFill>
-                  <a:srgbClr val="FFFFFF"/>
-                </a:solidFill>
-              </a:defRPr>
-            </a:pPr>
-            <a:r>
-              <a:t>✓ Экспорт официальной отчетности в 1 клик (XLSX на 7 листов с единицами измерения).</a:t>
-            </a:r>
-          </a:p>
-        </p:txBody>
-      </p:sp>
-      <p:sp>
-        <p:nvSpPr>
-          <p:cNvPr id="7" name="Rounded Rectangle 6"/>
+                  <a:srgbClr val="10955D"/>
+                </a:solidFill>
+              </a:defRPr>
+            </a:pPr>
+            <a:r>
+              <a:t>🏆 Ключевые результаты команды</a:t>
+            </a:r>
+          </a:p>
+          <a:p>
+            <a:pPr>
+              <a:spcBef>
+                <a:spcPts val="600"/>
+              </a:spcBef>
+              <a:defRPr sz="1100" b="1">
+                <a:solidFill>
+                  <a:srgbClr val="0F172A"/>
+                </a:solidFill>
+              </a:defRPr>
+            </a:pPr>
+            <a:r>
+              <a:t>✓ 100% выполнение ТЗ:</a:t>
+            </a:r>
+          </a:p>
+          <a:p>
+            <a:pPr>
+              <a:spcAft>
+                <a:spcPts val="200"/>
+              </a:spcAft>
+              <a:defRPr sz="1000">
+                <a:solidFill>
+                  <a:srgbClr val="334155"/>
+                </a:solidFill>
+              </a:defRPr>
+            </a:pPr>
+            <a:r>
+              <a:t>   Все 20 критериев кейса выполнены полностью + реализован бонус за геополитику.</a:t>
+            </a:r>
+          </a:p>
+          <a:p>
+            <a:pPr>
+              <a:spcBef>
+                <a:spcPts val="600"/>
+              </a:spcBef>
+              <a:defRPr sz="1100" b="1">
+                <a:solidFill>
+                  <a:srgbClr val="0F172A"/>
+                </a:solidFill>
+              </a:defRPr>
+            </a:pPr>
+            <a:r>
+              <a:t>✓ Абсолютная точность физики:</a:t>
+            </a:r>
+          </a:p>
+          <a:p>
+            <a:pPr>
+              <a:spcAft>
+                <a:spcPts val="200"/>
+              </a:spcAft>
+              <a:defRPr sz="1000">
+                <a:solidFill>
+                  <a:srgbClr val="334155"/>
+                </a:solidFill>
+              </a:defRPr>
+            </a:pPr>
+            <a:r>
+              <a:t>   Сходимость контрольного примера 2035 г. с точностью до 10^-4 т подтверждена тестами.</a:t>
+            </a:r>
+          </a:p>
+          <a:p>
+            <a:pPr>
+              <a:spcBef>
+                <a:spcPts val="600"/>
+              </a:spcBef>
+              <a:defRPr sz="1100" b="1">
+                <a:solidFill>
+                  <a:srgbClr val="0F172A"/>
+                </a:solidFill>
+              </a:defRPr>
+            </a:pPr>
+            <a:r>
+              <a:t>✓ Экономия 1 096.8 млн у.е.:</a:t>
+            </a:r>
+          </a:p>
+          <a:p>
+            <a:pPr>
+              <a:spcAft>
+                <a:spcPts val="200"/>
+              </a:spcAft>
+              <a:defRPr sz="1000">
+                <a:solidFill>
+                  <a:srgbClr val="334155"/>
+                </a:solidFill>
+              </a:defRPr>
+            </a:pPr>
+            <a:r>
+              <a:t>   Доказанное снижение NPV LCC на 11.81% при ядре NASA MILP без потери надежности.</a:t>
+            </a:r>
+          </a:p>
+          <a:p>
+            <a:pPr>
+              <a:spcBef>
+                <a:spcPts val="600"/>
+              </a:spcBef>
+              <a:defRPr sz="1100" b="1">
+                <a:solidFill>
+                  <a:srgbClr val="0F172A"/>
+                </a:solidFill>
+              </a:defRPr>
+            </a:pPr>
+            <a:r>
+              <a:t>✓ Соблюдение лимитов CAPEX:</a:t>
+            </a:r>
+          </a:p>
+          <a:p>
+            <a:pPr>
+              <a:spcAft>
+                <a:spcPts val="200"/>
+              </a:spcAft>
+              <a:defRPr sz="1000">
+                <a:solidFill>
+                  <a:srgbClr val="334155"/>
+                </a:solidFill>
+              </a:defRPr>
+            </a:pPr>
+            <a:r>
+              <a:t>   Запас +370 млн у.е. до 2037 года и +1 190 млн у.е. на всем горизонте до 2040 г.</a:t>
+            </a:r>
+          </a:p>
+          <a:p>
+            <a:pPr>
+              <a:spcBef>
+                <a:spcPts val="600"/>
+              </a:spcBef>
+              <a:defRPr sz="1100" b="1">
+                <a:solidFill>
+                  <a:srgbClr val="0F172A"/>
+                </a:solidFill>
+              </a:defRPr>
+            </a:pPr>
+            <a:r>
+              <a:t>✓ Инженерная готовность:</a:t>
+            </a:r>
+          </a:p>
+          <a:p>
+            <a:pPr>
+              <a:spcAft>
+                <a:spcPts val="200"/>
+              </a:spcAft>
+              <a:defRPr sz="1000">
+                <a:solidFill>
+                  <a:srgbClr val="334155"/>
+                </a:solidFill>
+              </a:defRPr>
+            </a:pPr>
+            <a:r>
+              <a:t>   Полноценный интерактивный веб-комплекс, 38 тестов pytest, экспорт XLSX в 1 клик.</a:t>
+            </a:r>
+          </a:p>
+        </p:txBody>
+      </p:sp>
+      <p:sp>
+        <p:nvSpPr>
+          <p:cNvPr id="8" name="Rounded Rectangle 7"/>
           <p:cNvSpPr/>
           <p:nvPr/>
         </p:nvSpPr>
         <p:spPr>
           <a:xfrm>
-            <a:off x="6217920" y="1645920"/>
-            <a:ext cx="5212080" cy="4389120"/>
+            <a:off x="6217920" y="1508760"/>
+            <a:ext cx="5212080" cy="4846320"/>
           </a:xfrm>
           <a:prstGeom prst="roundRect">
             <a:avLst/>
           </a:prstGeom>
           <a:solidFill>
-            <a:srgbClr val="0F0F14"/>
+            <a:srgbClr val="FFFFFF"/>
           </a:solidFill>
-          <a:ln w="12700">
+          <a:ln w="19050">
             <a:solidFill>
-              <a:srgbClr val="23232A"/>
+              <a:srgbClr val="E2E8F0"/>
             </a:solidFill>
           </a:ln>
         </p:spPr>
@@ -6259,14 +9243,57 @@
       </p:sp>
       <p:sp>
         <p:nvSpPr>
-          <p:cNvPr id="8" name="TextBox 7"/>
+          <p:cNvPr id="9" name="Rounded Rectangle 8"/>
+          <p:cNvSpPr/>
+          <p:nvPr/>
+        </p:nvSpPr>
+        <p:spPr>
+          <a:xfrm>
+            <a:off x="6217920" y="1508760"/>
+            <a:ext cx="5212080" cy="73152"/>
+          </a:xfrm>
+          <a:prstGeom prst="roundRect">
+            <a:avLst/>
+          </a:prstGeom>
+          <a:solidFill>
+            <a:srgbClr val="0284C7"/>
+          </a:solidFill>
+          <a:ln>
+            <a:noFill/>
+          </a:ln>
+        </p:spPr>
+        <p:style>
+          <a:lnRef idx="1">
+            <a:schemeClr val="accent1"/>
+          </a:lnRef>
+          <a:fillRef idx="3">
+            <a:schemeClr val="accent1"/>
+          </a:fillRef>
+          <a:effectRef idx="2">
+            <a:schemeClr val="accent1"/>
+          </a:effectRef>
+          <a:fontRef idx="minor">
+            <a:schemeClr val="lt1"/>
+          </a:fontRef>
+        </p:style>
+        <p:txBody>
+          <a:bodyPr rtlCol="0" anchor="ctr"/>
+          <a:lstStyle/>
+          <a:p>
+            <a:pPr algn="ctr"/>
+          </a:p>
+        </p:txBody>
+      </p:sp>
+      <p:sp>
+        <p:nvSpPr>
+          <p:cNvPr id="10" name="TextBox 9"/>
           <p:cNvSpPr txBox="1"/>
           <p:nvPr/>
         </p:nvSpPr>
         <p:spPr>
           <a:xfrm>
-            <a:off x="6492240" y="1828800"/>
-            <a:ext cx="4663440" cy="4023360"/>
+            <a:off x="6492240" y="1691640"/>
+            <a:ext cx="4663440" cy="4480560"/>
           </a:xfrm>
           <a:prstGeom prst="rect">
             <a:avLst/>
@@ -6274,7 +9301,7 @@
           <a:noFill/>
         </p:spPr>
         <p:txBody>
-          <a:bodyPr wrap="square">
+          <a:bodyPr wrap="square" lIns="0" tIns="0" rIns="0" bIns="0">
             <a:spAutoFit/>
           </a:bodyPr>
           <a:lstStyle/>
@@ -6282,78 +9309,104 @@
             <a:pPr>
               <a:defRPr sz="1300" b="1">
                 <a:solidFill>
-                  <a:srgbClr val="CCFF00"/>
-                </a:solidFill>
-              </a:defRPr>
-            </a:pPr>
-            <a:r>
-              <a:t>📝 ПРОЕКТ РЕШЕНИЙ ЭКСПЕРТНОГО СОВЕТА</a:t>
-            </a:r>
-          </a:p>
-          <a:p>
-            <a:br/>
-            <a:pPr>
-              <a:defRPr sz="1100">
-                <a:solidFill>
-                  <a:srgbClr val="FFFFFF"/>
-                </a:solidFill>
-              </a:defRPr>
-            </a:pPr>
-            <a:r>
-              <a:t>1. Принять целевой план на базе алгоритма NASA MILP как базовую стратегию снабжения ОТУ.</a:t>
-            </a:r>
-          </a:p>
-          <a:p>
-            <a:br/>
-            <a:pPr>
-              <a:defRPr sz="1100">
-                <a:solidFill>
-                  <a:srgbClr val="FFFFFF"/>
-                </a:solidFill>
-              </a:defRPr>
-            </a:pPr>
-            <a:r>
-              <a:t>2. Утвердить финансирование ZBO-модернизации (180 млн у.е.) в 2036 г. для удержания потерь &lt;= 2.0%.</a:t>
-            </a:r>
-          </a:p>
-          <a:p>
-            <a:br/>
-            <a:pPr>
-              <a:defRPr sz="1100">
-                <a:solidFill>
-                  <a:srgbClr val="FFFFFF"/>
-                </a:solidFill>
-              </a:defRPr>
-            </a:pPr>
-            <a:r>
-              <a:t>3. Санкционировать трехлетний график траншей Lunar-ISRU (250 + 500 + 500 млн у.е. в 2035–2037 гг.).</a:t>
-            </a:r>
-          </a:p>
-          <a:p>
-            <a:br/>
-            <a:pPr>
-              <a:defRPr sz="1100">
-                <a:solidFill>
-                  <a:srgbClr val="FFFFFF"/>
-                </a:solidFill>
-              </a:defRPr>
-            </a:pPr>
-            <a:r>
-              <a:t>4. Внедрить разработанный комплекс в качестве штатного рабочего места ситуационного центра.</a:t>
-            </a:r>
-          </a:p>
-          <a:p>
-            <a:br/>
+                  <a:srgbClr val="0369A1"/>
+                </a:solidFill>
+              </a:defRPr>
+            </a:pPr>
+            <a:r>
+              <a:t>📝 Проект решений для утверждения</a:t>
+            </a:r>
+          </a:p>
+          <a:p>
+            <a:pPr>
+              <a:spcBef>
+                <a:spcPts val="600"/>
+              </a:spcBef>
+              <a:spcAft>
+                <a:spcPts val="400"/>
+              </a:spcAft>
+              <a:defRPr sz="1050">
+                <a:solidFill>
+                  <a:srgbClr val="0F172A"/>
+                </a:solidFill>
+              </a:defRPr>
+            </a:pPr>
+            <a:r>
+              <a:t>1. Утвердить алгоритм NASA MILP в качестве штатного оптимизатора логистических потоков ОТУ.</a:t>
+            </a:r>
+          </a:p>
+          <a:p>
+            <a:pPr>
+              <a:spcBef>
+                <a:spcPts val="600"/>
+              </a:spcBef>
+              <a:spcAft>
+                <a:spcPts val="400"/>
+              </a:spcAft>
+              <a:defRPr sz="1050">
+                <a:solidFill>
+                  <a:srgbClr val="0F172A"/>
+                </a:solidFill>
+              </a:defRPr>
+            </a:pPr>
+            <a:r>
+              <a:t>2. Санкционировать финансирование ZBO-модернизации (180 млн у.е.) в 2036 г. для удержания потерь &lt;= 2.0%.</a:t>
+            </a:r>
+          </a:p>
+          <a:p>
+            <a:pPr>
+              <a:spcBef>
+                <a:spcPts val="600"/>
+              </a:spcBef>
+              <a:spcAft>
+                <a:spcPts val="400"/>
+              </a:spcAft>
+              <a:defRPr sz="1050">
+                <a:solidFill>
+                  <a:srgbClr val="0F172A"/>
+                </a:solidFill>
+              </a:defRPr>
+            </a:pPr>
+            <a:r>
+              <a:t>3. Утвердить инвестиционный график Lunar-ISRU (250 + 500 + 500 млн у.е. в 2035–2037 гг.).</a:t>
+            </a:r>
+          </a:p>
+          <a:p>
+            <a:pPr>
+              <a:spcBef>
+                <a:spcPts val="600"/>
+              </a:spcBef>
+              <a:spcAft>
+                <a:spcPts val="400"/>
+              </a:spcAft>
+              <a:defRPr sz="1050">
+                <a:solidFill>
+                  <a:srgbClr val="0F172A"/>
+                </a:solidFill>
+              </a:defRPr>
+            </a:pPr>
+            <a:r>
+              <a:t>4. Рекомендовать разработанный программный комплекс к опытно-промышленной эксплуатации в ЦУП.</a:t>
+            </a:r>
+          </a:p>
+          <a:p>
             <a:br/>
             <a:pPr algn="ctr">
+              <a:spcBef>
+                <a:spcPts val="1400"/>
+              </a:spcBef>
               <a:defRPr sz="1300" b="1">
                 <a:solidFill>
-                  <a:srgbClr val="CCFF00"/>
-                </a:solidFill>
-              </a:defRPr>
-            </a:pPr>
-            <a:r>
-              <a:t>СПАСИБО ЗА ВНИМАНИЕ! ГОТОВЫ К ОТВЕТАМ НА ВОПРОСЫ (Q&amp;A)</a:t>
+                  <a:srgbClr val="0369A1"/>
+                </a:solidFill>
+              </a:defRPr>
+            </a:pPr>
+            <a:r>
+              <a:t>СПАСИБО ЗА ВНИМАНИЕ!</a:t>
+            </a:r>
+            <a:br/>
+            <a:r>
+              <a:t>ГОТОВЫ К СЕССИИ ВОПРОСОВ И ОТВЕТОВ (Q&amp;A)</a:t>
             </a:r>
           </a:p>
         </p:txBody>
